--- a/Vorl_2/slides/lecture2-style-B.pptx
+++ b/Vorl_2/slides/lecture2-style-B.pptx
@@ -137,13 +137,13 @@
   <p:extLst>
     <p:ext uri="{521415D9-36F7-43E2-AB2F-B90AF26B5E84}">
       <p14:sectionLst xmlns:p14="http://schemas.microsoft.com/office/powerpoint/2010/main">
-        <p14:section name="Opening" id="{fce0e7a2-e293-fd72-f4a8-3c60a4436ad5}">
+        <p14:section name="Opening" id="{32ef97f3-c670-5141-b806-950a2eb3b0a0}">
           <p14:sldIdLst>
             <p14:sldId id="256"/>
             <p14:sldId id="257"/>
           </p14:sldIdLst>
         </p14:section>
-        <p14:section name="Paper 1" id="{c9430476-7c23-b98d-74dc-cf2de905f2fd}">
+        <p14:section name="Paper 1" id="{cf012760-16aa-aa46-a057-75098f840838}">
           <p14:sldIdLst>
             <p14:sldId id="258"/>
             <p14:sldId id="259"/>
@@ -157,7 +157,7 @@
             <p14:sldId id="267"/>
           </p14:sldIdLst>
         </p14:section>
-        <p14:section name="Paper 2" id="{62de9bd6-cb86-6cb8-95cd-325e4bf8f317}">
+        <p14:section name="Paper 2" id="{25041ae3-4e37-254e-70c3-ca30288f845c}">
           <p14:sldIdLst>
             <p14:sldId id="268"/>
             <p14:sldId id="269"/>
@@ -171,7 +171,7 @@
             <p14:sldId id="277"/>
           </p14:sldIdLst>
         </p14:section>
-        <p14:section name="Cross comparison" id="{8b29ad8b-96e0-928b-65f1-6ed7aa54bdee}">
+        <p14:section name="Cross Comparison" id="{9e1215ad-b6b7-33d9-d689-049e2a799ce1}">
           <p14:sldIdLst>
             <p14:sldId id="278"/>
             <p14:sldId id="279"/>
@@ -180,14 +180,14 @@
             <p14:sldId id="282"/>
           </p14:sldIdLst>
         </p14:section>
-        <p14:section name="Criticism" id="{df78e67c-0f69-85c9-3bd3-663fa41c986f}">
+        <p14:section name="Criticism" id="{ebf04185-6457-c658-a734-92b5cd8c9186}">
           <p14:sldIdLst>
             <p14:sldId id="283"/>
             <p14:sldId id="284"/>
             <p14:sldId id="285"/>
           </p14:sldIdLst>
         </p14:section>
-        <p14:section name="Close" id="{0cc43412-dcc1-25af-4307-21f36dd9f63f}">
+        <p14:section name="Close" id="{b4900a08-eb11-4f4f-4304-954fc19e6082}">
           <p14:sldIdLst>
             <p14:sldId id="286"/>
           </p14:sldIdLst>
@@ -2708,7 +2708,7 @@
           <a:p>
             <a:r>
               <a:rPr lang="en-US" dirty="0"/>
-              <a:t>Collect on the board. Which ideas did neither paper propose?</a:t>
+              <a:t/>
             </a:r>
             <a:endParaRPr lang="en-US" dirty="0"/>
           </a:p>
@@ -3836,7 +3836,7 @@
                 <a:ea typeface="Arial" pitchFamily="34" charset="-122"/>
                 <a:cs typeface="Arial" pitchFamily="34" charset="-120"/>
               </a:rPr>
-              <a:t>Who decides what a good artifact is?</a:t>
+              <a:t>Lecture 2: Paper Discussion</a:t>
             </a:r>
             <a:endParaRPr lang="en-US" sz="4400" dirty="0"/>
           </a:p>
@@ -3914,7 +3914,7 @@
                 <a:ea typeface="Arial" pitchFamily="34" charset="-122"/>
                 <a:cs typeface="Arial" pitchFamily="34" charset="-120"/>
               </a:rPr>
-              <a:t>Seminar: Reproducibility in SE Research · Lecture 2 discussion · 27 October</a:t>
+              <a:t>Seminar: Reproducibility of Scientific Results in Software Engineering Research · 27 October</a:t>
             </a:r>
             <a:endParaRPr lang="en-US" sz="1600" dirty="0"/>
           </a:p>
@@ -3953,8 +3953,8 @@
         </p:nvSpPr>
         <p:spPr>
           <a:xfrm>
-            <a:off x="640080" y="411480"/>
-            <a:ext cx="10911535" cy="365760"/>
+            <a:off x="640080" y="365760"/>
+            <a:ext cx="10911535" cy="822960"/>
           </a:xfrm>
           <a:prstGeom prst="rect">
             <a:avLst/>
@@ -3963,14 +3963,14 @@
           <a:ln/>
         </p:spPr>
         <p:txBody>
-          <a:bodyPr wrap="square" lIns="0" tIns="0" rIns="0" bIns="0" rtlCol="0" anchor="t"/>
+          <a:bodyPr wrap="square" lIns="0" tIns="0" rIns="0" bIns="0" rtlCol="0" anchor="ctr"/>
           <a:lstStyle/>
           <a:p>
             <a:pPr indent="0" marL="0">
               <a:buNone/>
             </a:pPr>
             <a:r>
-              <a:rPr lang="en-US" sz="1600" b="1" spc="100" kern="0" dirty="0">
+              <a:rPr lang="en-US" sz="4000" b="1" dirty="0">
                 <a:solidFill>
                   <a:srgbClr val="00883A"/>
                 </a:solidFill>
@@ -3978,9 +3978,9 @@
                 <a:ea typeface="Arial" pitchFamily="34" charset="-122"/>
                 <a:cs typeface="Arial" pitchFamily="34" charset="-120"/>
               </a:rPr>
-              <a:t>Paper 1 · discussion</a:t>
-            </a:r>
-            <a:endParaRPr lang="en-US" sz="1600" dirty="0"/>
+              <a:t>Paper 1 · Discussion</a:t>
+            </a:r>
+            <a:endParaRPr lang="en-US" sz="4000" dirty="0"/>
           </a:p>
         </p:txBody>
       </p:sp>
@@ -3992,8 +3992,8 @@
         </p:nvSpPr>
         <p:spPr>
           <a:xfrm>
-            <a:off x="640080" y="822960"/>
-            <a:ext cx="10911535" cy="1188720"/>
+            <a:off x="640080" y="1325880"/>
+            <a:ext cx="10911535" cy="822960"/>
           </a:xfrm>
           <a:prstGeom prst="rect">
             <a:avLst/>
@@ -4009,7 +4009,7 @@
               <a:buNone/>
             </a:pPr>
             <a:r>
-              <a:rPr lang="en-US" sz="2800" b="1" dirty="0">
+              <a:rPr lang="en-US" sz="2600" b="1" dirty="0">
                 <a:solidFill>
                   <a:srgbClr val="1A1A1A"/>
                 </a:solidFill>
@@ -4019,7 +4019,7 @@
               </a:rPr>
               <a:t>Should artifact badges be easy to get or hard to get?</a:t>
             </a:r>
-            <a:endParaRPr lang="en-US" sz="2800" dirty="0"/>
+            <a:endParaRPr lang="en-US" sz="2600" dirty="0"/>
           </a:p>
         </p:txBody>
       </p:sp>
@@ -4031,12 +4031,12 @@
         </p:nvSpPr>
         <p:spPr>
           <a:xfrm>
-            <a:off x="640080" y="2011680"/>
-            <a:ext cx="10911535" cy="1325880"/>
+            <a:off x="640080" y="2240280"/>
+            <a:ext cx="10911535" cy="1188720"/>
           </a:xfrm>
           <a:prstGeom prst="roundRect">
             <a:avLst>
-              <a:gd name="adj" fmla="val 4138"/>
+              <a:gd name="adj" fmla="val 4615"/>
             </a:avLst>
           </a:prstGeom>
           <a:solidFill>
@@ -4058,8 +4058,8 @@
         </p:nvSpPr>
         <p:spPr>
           <a:xfrm>
-            <a:off x="914400" y="2148840"/>
-            <a:ext cx="10362895" cy="1097280"/>
+            <a:off x="914400" y="2359152"/>
+            <a:ext cx="10362895" cy="1005840"/>
           </a:xfrm>
           <a:prstGeom prst="rect">
             <a:avLst/>
@@ -4097,12 +4097,12 @@
         </p:nvSpPr>
         <p:spPr>
           <a:xfrm>
-            <a:off x="640080" y="3566160"/>
-            <a:ext cx="5318608" cy="2377440"/>
+            <a:off x="640080" y="3611880"/>
+            <a:ext cx="5318608" cy="2423160"/>
           </a:xfrm>
           <a:prstGeom prst="roundRect">
             <a:avLst>
-              <a:gd name="adj" fmla="val 2308"/>
+              <a:gd name="adj" fmla="val 2264"/>
             </a:avLst>
           </a:prstGeom>
           <a:solidFill>
@@ -4202,12 +4202,12 @@
         </p:nvSpPr>
         <p:spPr>
           <a:xfrm>
-            <a:off x="6233008" y="3566160"/>
-            <a:ext cx="5318608" cy="2377440"/>
+            <a:off x="6233008" y="3611880"/>
+            <a:ext cx="5318608" cy="2423160"/>
           </a:xfrm>
           <a:prstGeom prst="roundRect">
             <a:avLst>
-              <a:gd name="adj" fmla="val 2308"/>
+              <a:gd name="adj" fmla="val 2264"/>
             </a:avLst>
           </a:prstGeom>
           <a:solidFill>
@@ -4380,8 +4380,8 @@
         </p:nvSpPr>
         <p:spPr>
           <a:xfrm>
-            <a:off x="640080" y="411480"/>
-            <a:ext cx="10911535" cy="365760"/>
+            <a:off x="640080" y="365760"/>
+            <a:ext cx="10911535" cy="822960"/>
           </a:xfrm>
           <a:prstGeom prst="rect">
             <a:avLst/>
@@ -4390,14 +4390,14 @@
           <a:ln/>
         </p:spPr>
         <p:txBody>
-          <a:bodyPr wrap="square" lIns="0" tIns="0" rIns="0" bIns="0" rtlCol="0" anchor="t"/>
+          <a:bodyPr wrap="square" lIns="0" tIns="0" rIns="0" bIns="0" rtlCol="0" anchor="ctr"/>
           <a:lstStyle/>
           <a:p>
             <a:pPr indent="0" marL="0">
               <a:buNone/>
             </a:pPr>
             <a:r>
-              <a:rPr lang="en-US" sz="1600" b="1" spc="100" kern="0" dirty="0">
+              <a:rPr lang="en-US" sz="4000" b="1" dirty="0">
                 <a:solidFill>
                   <a:srgbClr val="00883A"/>
                 </a:solidFill>
@@ -4405,9 +4405,9 @@
                 <a:ea typeface="Arial" pitchFamily="34" charset="-122"/>
                 <a:cs typeface="Arial" pitchFamily="34" charset="-120"/>
               </a:rPr>
-              <a:t>Paper 1 · discussion</a:t>
-            </a:r>
-            <a:endParaRPr lang="en-US" sz="1600" dirty="0"/>
+              <a:t>Paper 1 · Discussion</a:t>
+            </a:r>
+            <a:endParaRPr lang="en-US" sz="4000" dirty="0"/>
           </a:p>
         </p:txBody>
       </p:sp>
@@ -4419,8 +4419,8 @@
         </p:nvSpPr>
         <p:spPr>
           <a:xfrm>
-            <a:off x="640080" y="822960"/>
-            <a:ext cx="10911535" cy="1188720"/>
+            <a:off x="640080" y="1325880"/>
+            <a:ext cx="10911535" cy="822960"/>
           </a:xfrm>
           <a:prstGeom prst="rect">
             <a:avLst/>
@@ -4436,7 +4436,7 @@
               <a:buNone/>
             </a:pPr>
             <a:r>
-              <a:rPr lang="en-US" sz="2800" b="1" dirty="0">
+              <a:rPr lang="en-US" sz="2600" b="1" dirty="0">
                 <a:solidFill>
                   <a:srgbClr val="1A1A1A"/>
                 </a:solidFill>
@@ -4446,7 +4446,7 @@
               </a:rPr>
               <a:t>Who checks the checkers?</a:t>
             </a:r>
-            <a:endParaRPr lang="en-US" sz="2800" dirty="0"/>
+            <a:endParaRPr lang="en-US" sz="2600" dirty="0"/>
           </a:p>
         </p:txBody>
       </p:sp>
@@ -4458,12 +4458,12 @@
         </p:nvSpPr>
         <p:spPr>
           <a:xfrm>
-            <a:off x="640080" y="2011680"/>
-            <a:ext cx="10911535" cy="1325880"/>
+            <a:off x="640080" y="2240280"/>
+            <a:ext cx="10911535" cy="1188720"/>
           </a:xfrm>
           <a:prstGeom prst="roundRect">
             <a:avLst>
-              <a:gd name="adj" fmla="val 4138"/>
+              <a:gd name="adj" fmla="val 4615"/>
             </a:avLst>
           </a:prstGeom>
           <a:solidFill>
@@ -4485,8 +4485,8 @@
         </p:nvSpPr>
         <p:spPr>
           <a:xfrm>
-            <a:off x="914400" y="2148840"/>
-            <a:ext cx="10362895" cy="1097280"/>
+            <a:off x="914400" y="2359152"/>
+            <a:ext cx="10362895" cy="1005840"/>
           </a:xfrm>
           <a:prstGeom prst="rect">
             <a:avLst/>
@@ -4524,12 +4524,12 @@
         </p:nvSpPr>
         <p:spPr>
           <a:xfrm>
-            <a:off x="640080" y="3566160"/>
-            <a:ext cx="5318608" cy="2377440"/>
+            <a:off x="640080" y="3611880"/>
+            <a:ext cx="5318608" cy="2423160"/>
           </a:xfrm>
           <a:prstGeom prst="roundRect">
             <a:avLst>
-              <a:gd name="adj" fmla="val 2308"/>
+              <a:gd name="adj" fmla="val 2264"/>
             </a:avLst>
           </a:prstGeom>
           <a:solidFill>
@@ -4629,12 +4629,12 @@
         </p:nvSpPr>
         <p:spPr>
           <a:xfrm>
-            <a:off x="6233008" y="3566160"/>
-            <a:ext cx="5318608" cy="2377440"/>
+            <a:off x="6233008" y="3611880"/>
+            <a:ext cx="5318608" cy="2423160"/>
           </a:xfrm>
           <a:prstGeom prst="roundRect">
             <a:avLst>
-              <a:gd name="adj" fmla="val 2308"/>
+              <a:gd name="adj" fmla="val 2264"/>
             </a:avLst>
           </a:prstGeom>
           <a:solidFill>
@@ -4807,8 +4807,8 @@
         </p:nvSpPr>
         <p:spPr>
           <a:xfrm>
-            <a:off x="640080" y="411480"/>
-            <a:ext cx="10911535" cy="365760"/>
+            <a:off x="640080" y="365760"/>
+            <a:ext cx="10911535" cy="822960"/>
           </a:xfrm>
           <a:prstGeom prst="rect">
             <a:avLst/>
@@ -4817,14 +4817,14 @@
           <a:ln/>
         </p:spPr>
         <p:txBody>
-          <a:bodyPr wrap="square" lIns="0" tIns="0" rIns="0" bIns="0" rtlCol="0" anchor="t"/>
+          <a:bodyPr wrap="square" lIns="0" tIns="0" rIns="0" bIns="0" rtlCol="0" anchor="ctr"/>
           <a:lstStyle/>
           <a:p>
             <a:pPr indent="0" marL="0">
               <a:buNone/>
             </a:pPr>
             <a:r>
-              <a:rPr lang="en-US" sz="1600" b="1" spc="100" kern="0" dirty="0">
+              <a:rPr lang="en-US" sz="4000" b="1" dirty="0">
                 <a:solidFill>
                   <a:srgbClr val="00883A"/>
                 </a:solidFill>
@@ -4832,9 +4832,9 @@
                 <a:ea typeface="Arial" pitchFamily="34" charset="-122"/>
                 <a:cs typeface="Arial" pitchFamily="34" charset="-120"/>
               </a:rPr>
-              <a:t>Paper 1 · discussion</a:t>
-            </a:r>
-            <a:endParaRPr lang="en-US" sz="1600" dirty="0"/>
+              <a:t>Paper 1 · Discussion</a:t>
+            </a:r>
+            <a:endParaRPr lang="en-US" sz="4000" dirty="0"/>
           </a:p>
         </p:txBody>
       </p:sp>
@@ -4846,8 +4846,8 @@
         </p:nvSpPr>
         <p:spPr>
           <a:xfrm>
-            <a:off x="640080" y="822960"/>
-            <a:ext cx="10911535" cy="1188720"/>
+            <a:off x="640080" y="1325880"/>
+            <a:ext cx="10911535" cy="822960"/>
           </a:xfrm>
           <a:prstGeom prst="rect">
             <a:avLst/>
@@ -4863,7 +4863,7 @@
               <a:buNone/>
             </a:pPr>
             <a:r>
-              <a:rPr lang="en-US" sz="2800" b="1" dirty="0">
+              <a:rPr lang="en-US" sz="2600" b="1" dirty="0">
                 <a:solidFill>
                   <a:srgbClr val="1A1A1A"/>
                 </a:solidFill>
@@ -4873,7 +4873,7 @@
               </a:rPr>
               <a:t>Is "set up in 30 minutes" a quality standard or a convenience rule?</a:t>
             </a:r>
-            <a:endParaRPr lang="en-US" sz="2800" dirty="0"/>
+            <a:endParaRPr lang="en-US" sz="2600" dirty="0"/>
           </a:p>
         </p:txBody>
       </p:sp>
@@ -4885,12 +4885,12 @@
         </p:nvSpPr>
         <p:spPr>
           <a:xfrm>
-            <a:off x="640080" y="2011680"/>
-            <a:ext cx="10911535" cy="1325880"/>
+            <a:off x="640080" y="2240280"/>
+            <a:ext cx="10911535" cy="1188720"/>
           </a:xfrm>
           <a:prstGeom prst="roundRect">
             <a:avLst>
-              <a:gd name="adj" fmla="val 4138"/>
+              <a:gd name="adj" fmla="val 4615"/>
             </a:avLst>
           </a:prstGeom>
           <a:solidFill>
@@ -4912,8 +4912,8 @@
         </p:nvSpPr>
         <p:spPr>
           <a:xfrm>
-            <a:off x="914400" y="2148840"/>
-            <a:ext cx="10362895" cy="1097280"/>
+            <a:off x="914400" y="2359152"/>
+            <a:ext cx="10362895" cy="1005840"/>
           </a:xfrm>
           <a:prstGeom prst="rect">
             <a:avLst/>
@@ -4951,12 +4951,12 @@
         </p:nvSpPr>
         <p:spPr>
           <a:xfrm>
-            <a:off x="640080" y="3566160"/>
-            <a:ext cx="5318608" cy="2377440"/>
+            <a:off x="640080" y="3611880"/>
+            <a:ext cx="5318608" cy="2423160"/>
           </a:xfrm>
           <a:prstGeom prst="roundRect">
             <a:avLst>
-              <a:gd name="adj" fmla="val 2308"/>
+              <a:gd name="adj" fmla="val 2264"/>
             </a:avLst>
           </a:prstGeom>
           <a:solidFill>
@@ -5056,12 +5056,12 @@
         </p:nvSpPr>
         <p:spPr>
           <a:xfrm>
-            <a:off x="6233008" y="3566160"/>
-            <a:ext cx="5318608" cy="2377440"/>
+            <a:off x="6233008" y="3611880"/>
+            <a:ext cx="5318608" cy="2423160"/>
           </a:xfrm>
           <a:prstGeom prst="roundRect">
             <a:avLst>
-              <a:gd name="adj" fmla="val 2308"/>
+              <a:gd name="adj" fmla="val 2264"/>
             </a:avLst>
           </a:prstGeom>
           <a:solidFill>
@@ -5337,8 +5337,8 @@
         </p:nvSpPr>
         <p:spPr>
           <a:xfrm>
-            <a:off x="640080" y="411480"/>
-            <a:ext cx="10911535" cy="365760"/>
+            <a:off x="640080" y="365760"/>
+            <a:ext cx="10911535" cy="822960"/>
           </a:xfrm>
           <a:prstGeom prst="rect">
             <a:avLst/>
@@ -5347,14 +5347,14 @@
           <a:ln/>
         </p:spPr>
         <p:txBody>
-          <a:bodyPr wrap="square" lIns="0" tIns="0" rIns="0" bIns="0" rtlCol="0" anchor="t"/>
+          <a:bodyPr wrap="square" lIns="0" tIns="0" rIns="0" bIns="0" rtlCol="0" anchor="ctr"/>
           <a:lstStyle/>
           <a:p>
             <a:pPr indent="0" marL="0">
               <a:buNone/>
             </a:pPr>
             <a:r>
-              <a:rPr lang="en-US" sz="1600" b="1" spc="100" kern="0" dirty="0">
+              <a:rPr lang="en-US" sz="4000" b="1" dirty="0">
                 <a:solidFill>
                   <a:srgbClr val="00883A"/>
                 </a:solidFill>
@@ -5362,9 +5362,9 @@
                 <a:ea typeface="Arial" pitchFamily="34" charset="-122"/>
                 <a:cs typeface="Arial" pitchFamily="34" charset="-120"/>
               </a:rPr>
-              <a:t>General summary</a:t>
-            </a:r>
-            <a:endParaRPr lang="en-US" sz="1600" dirty="0"/>
+              <a:t>General Summary</a:t>
+            </a:r>
+            <a:endParaRPr lang="en-US" sz="4000" dirty="0"/>
           </a:p>
         </p:txBody>
       </p:sp>
@@ -5376,47 +5376,8 @@
         </p:nvSpPr>
         <p:spPr>
           <a:xfrm>
-            <a:off x="640080" y="822960"/>
-            <a:ext cx="10911535" cy="1188720"/>
-          </a:xfrm>
-          <a:prstGeom prst="rect">
-            <a:avLst/>
-          </a:prstGeom>
-          <a:noFill/>
-          <a:ln/>
-        </p:spPr>
-        <p:txBody>
-          <a:bodyPr wrap="square" lIns="0" tIns="0" rIns="0" bIns="0" rtlCol="0" anchor="t"/>
-          <a:lstStyle/>
-          <a:p>
-            <a:pPr indent="0" marL="0">
-              <a:buNone/>
-            </a:pPr>
-            <a:r>
-              <a:rPr lang="en-US" sz="2800" b="1" dirty="0">
-                <a:solidFill>
-                  <a:srgbClr val="1A1A1A"/>
-                </a:solidFill>
-                <a:latin typeface="Arial" pitchFamily="34" charset="0"/>
-                <a:ea typeface="Arial" pitchFamily="34" charset="-122"/>
-                <a:cs typeface="Arial" pitchFamily="34" charset="-120"/>
-              </a:rPr>
-              <a:t>Sharing artifacts is the norm, but nobody is rewarded for doing it well</a:t>
-            </a:r>
-            <a:endParaRPr lang="en-US" sz="2800" dirty="0"/>
-          </a:p>
-        </p:txBody>
-      </p:sp>
-      <p:sp>
-        <p:nvSpPr>
-          <p:cNvPr id="4" name="Text 2"/>
-          <p:cNvSpPr txBox="1"/>
-          <p:nvPr/>
-        </p:nvSpPr>
-        <p:spPr>
-          <a:xfrm>
-            <a:off x="640080" y="2103120"/>
-            <a:ext cx="10911535" cy="4114800"/>
+            <a:off x="640080" y="1463040"/>
+            <a:ext cx="10911535" cy="4754880"/>
           </a:xfrm>
           <a:prstGeom prst="rect">
             <a:avLst/>
@@ -5436,7 +5397,7 @@
               <a:buChar char="•"/>
             </a:pPr>
             <a:r>
-              <a:rPr lang="en-US" sz="2000" dirty="0">
+              <a:rPr lang="en-US" sz="2200" dirty="0">
                 <a:solidFill>
                   <a:srgbClr val="1A1A1A"/>
                 </a:solidFill>
@@ -5446,7 +5407,7 @@
               </a:rPr>
               <a:t>Counted artifact links in 1434 SE papers and surveyed 153 authors</a:t>
             </a:r>
-            <a:endParaRPr lang="en-US" sz="2000" dirty="0"/>
+            <a:endParaRPr lang="en-US" sz="2200" dirty="0"/>
           </a:p>
           <a:p>
             <a:pPr marL="279400" indent="-279400">
@@ -5457,7 +5418,7 @@
               <a:buChar char="•"/>
             </a:pPr>
             <a:r>
-              <a:rPr lang="en-US" sz="2000" dirty="0">
+              <a:rPr lang="en-US" sz="2200" dirty="0">
                 <a:solidFill>
                   <a:srgbClr val="1A1A1A"/>
                 </a:solidFill>
@@ -5467,7 +5428,7 @@
               </a:rPr>
               <a:t>Most papers link an artifact, few go through artifact evaluation</a:t>
             </a:r>
-            <a:endParaRPr lang="en-US" sz="2000" dirty="0"/>
+            <a:endParaRPr lang="en-US" sz="2200" dirty="0"/>
           </a:p>
           <a:p>
             <a:pPr marL="279400" indent="-279400">
@@ -5478,7 +5439,7 @@
               <a:buChar char="•"/>
             </a:pPr>
             <a:r>
-              <a:rPr lang="en-US" sz="2000" dirty="0">
+              <a:rPr lang="en-US" sz="2200" dirty="0">
                 <a:solidFill>
                   <a:srgbClr val="1A1A1A"/>
                 </a:solidFill>
@@ -5488,7 +5449,7 @@
               </a:rPr>
               <a:t>Twelve challenges for creators, users and reviewers; the root is incentives</a:t>
             </a:r>
-            <a:endParaRPr lang="en-US" sz="2000" dirty="0"/>
+            <a:endParaRPr lang="en-US" sz="2200" dirty="0"/>
           </a:p>
           <a:p>
             <a:pPr marL="279400" indent="-279400">
@@ -5499,7 +5460,7 @@
               <a:buChar char="•"/>
             </a:pPr>
             <a:r>
-              <a:rPr lang="en-US" sz="2000" dirty="0">
+              <a:rPr lang="en-US" sz="2200" dirty="0">
                 <a:solidFill>
                   <a:srgbClr val="1A1A1A"/>
                 </a:solidFill>
@@ -5509,7 +5470,7 @@
               </a:rPr>
               <a:t>Eight recommendations, each aimed at a specific group</a:t>
             </a:r>
-            <a:endParaRPr lang="en-US" sz="2000" dirty="0"/>
+            <a:endParaRPr lang="en-US" sz="2200" dirty="0"/>
           </a:p>
         </p:txBody>
       </p:sp>
@@ -5594,8 +5555,8 @@
         </p:nvSpPr>
         <p:spPr>
           <a:xfrm>
-            <a:off x="640080" y="411480"/>
-            <a:ext cx="10911535" cy="365760"/>
+            <a:off x="640080" y="365760"/>
+            <a:ext cx="10911535" cy="822960"/>
           </a:xfrm>
           <a:prstGeom prst="rect">
             <a:avLst/>
@@ -5604,14 +5565,14 @@
           <a:ln/>
         </p:spPr>
         <p:txBody>
-          <a:bodyPr wrap="square" lIns="0" tIns="0" rIns="0" bIns="0" rtlCol="0" anchor="t"/>
+          <a:bodyPr wrap="square" lIns="0" tIns="0" rIns="0" bIns="0" rtlCol="0" anchor="ctr"/>
           <a:lstStyle/>
           <a:p>
             <a:pPr indent="0" marL="0">
               <a:buNone/>
             </a:pPr>
             <a:r>
-              <a:rPr lang="en-US" sz="1600" b="1" spc="100" kern="0" dirty="0">
+              <a:rPr lang="en-US" sz="4000" b="1" dirty="0">
                 <a:solidFill>
                   <a:srgbClr val="00883A"/>
                 </a:solidFill>
@@ -5619,9 +5580,9 @@
                 <a:ea typeface="Arial" pitchFamily="34" charset="-122"/>
                 <a:cs typeface="Arial" pitchFamily="34" charset="-120"/>
               </a:rPr>
-              <a:t>Terminology</a:t>
-            </a:r>
-            <a:endParaRPr lang="en-US" sz="1600" dirty="0"/>
+              <a:t>Terminology / Definitions</a:t>
+            </a:r>
+            <a:endParaRPr lang="en-US" sz="4000" dirty="0"/>
           </a:p>
         </p:txBody>
       </p:sp>
@@ -5633,47 +5594,8 @@
         </p:nvSpPr>
         <p:spPr>
           <a:xfrm>
-            <a:off x="640080" y="822960"/>
-            <a:ext cx="10911535" cy="1188720"/>
-          </a:xfrm>
-          <a:prstGeom prst="rect">
-            <a:avLst/>
-          </a:prstGeom>
-          <a:noFill/>
-          <a:ln/>
-        </p:spPr>
-        <p:txBody>
-          <a:bodyPr wrap="square" lIns="0" tIns="0" rIns="0" bIns="0" rtlCol="0" anchor="t"/>
-          <a:lstStyle/>
-          <a:p>
-            <a:pPr indent="0" marL="0">
-              <a:buNone/>
-            </a:pPr>
-            <a:r>
-              <a:rPr lang="en-US" sz="2800" b="1" dirty="0">
-                <a:solidFill>
-                  <a:srgbClr val="1A1A1A"/>
-                </a:solidFill>
-                <a:latin typeface="Arial" pitchFamily="34" charset="0"/>
-                <a:ea typeface="Arial" pitchFamily="34" charset="-122"/>
-                <a:cs typeface="Arial" pitchFamily="34" charset="-120"/>
-              </a:rPr>
-              <a:t>"Artifact" means any link to external material</a:t>
-            </a:r>
-            <a:endParaRPr lang="en-US" sz="2800" dirty="0"/>
-          </a:p>
-        </p:txBody>
-      </p:sp>
-      <p:sp>
-        <p:nvSpPr>
-          <p:cNvPr id="4" name="Text 2"/>
-          <p:cNvSpPr txBox="1"/>
-          <p:nvPr/>
-        </p:nvSpPr>
-        <p:spPr>
-          <a:xfrm>
-            <a:off x="640080" y="2103120"/>
-            <a:ext cx="10911535" cy="4114800"/>
+            <a:off x="640080" y="1463040"/>
+            <a:ext cx="10911535" cy="4754880"/>
           </a:xfrm>
           <a:prstGeom prst="rect">
             <a:avLst/>
@@ -5693,7 +5615,7 @@
               <a:buChar char="•"/>
             </a:pPr>
             <a:r>
-              <a:rPr lang="en-US" sz="2000" dirty="0">
+              <a:rPr lang="en-US" sz="2200" dirty="0">
                 <a:solidFill>
                   <a:srgbClr val="1A1A1A"/>
                 </a:solidFill>
@@ -5703,7 +5625,7 @@
               </a:rPr>
               <a:t>Artifact: "any external materials or information provided … via a link" (p. 3)</a:t>
             </a:r>
-            <a:endParaRPr lang="en-US" sz="2000" dirty="0"/>
+            <a:endParaRPr lang="en-US" sz="2200" dirty="0"/>
           </a:p>
           <a:p>
             <a:pPr marL="279400" indent="-279400">
@@ -5714,7 +5636,7 @@
               <a:buChar char="•"/>
             </a:pPr>
             <a:r>
-              <a:rPr lang="en-US" sz="2000" dirty="0">
+              <a:rPr lang="en-US" sz="2200" dirty="0">
                 <a:solidFill>
                   <a:srgbClr val="1A1A1A"/>
                 </a:solidFill>
@@ -5724,7 +5646,7 @@
               </a:rPr>
               <a:t>Available: the link still works; content was not checked (p. 11)</a:t>
             </a:r>
-            <a:endParaRPr lang="en-US" sz="2000" dirty="0"/>
+            <a:endParaRPr lang="en-US" sz="2200" dirty="0"/>
           </a:p>
           <a:p>
             <a:pPr marL="279400" indent="-279400">
@@ -5735,7 +5657,7 @@
               <a:buChar char="•"/>
             </a:pPr>
             <a:r>
-              <a:rPr lang="en-US" sz="2000" dirty="0">
+              <a:rPr lang="en-US" sz="2200" dirty="0">
                 <a:solidFill>
                   <a:srgbClr val="1A1A1A"/>
                 </a:solidFill>
@@ -5745,7 +5667,7 @@
               </a:rPr>
               <a:t>ACM quality criteria: documented, consistent, complete, exercisable (pp. 4–5)</a:t>
             </a:r>
-            <a:endParaRPr lang="en-US" sz="2000" dirty="0"/>
+            <a:endParaRPr lang="en-US" sz="2200" dirty="0"/>
           </a:p>
           <a:p>
             <a:pPr marL="279400" indent="-279400">
@@ -5756,7 +5678,7 @@
               <a:buChar char="•"/>
             </a:pPr>
             <a:r>
-              <a:rPr lang="en-US" sz="2000" dirty="0">
+              <a:rPr lang="en-US" sz="2200" dirty="0">
                 <a:solidFill>
                   <a:srgbClr val="1A1A1A"/>
                 </a:solidFill>
@@ -5766,7 +5688,7 @@
               </a:rPr>
               <a:t>Mostly says "replication"; re-running an artifact = our 2020 reproducibility</a:t>
             </a:r>
-            <a:endParaRPr lang="en-US" sz="2000" dirty="0"/>
+            <a:endParaRPr lang="en-US" sz="2200" dirty="0"/>
           </a:p>
           <a:p>
             <a:pPr marL="279400" indent="-279400">
@@ -5777,7 +5699,7 @@
               <a:buChar char="•"/>
             </a:pPr>
             <a:r>
-              <a:rPr lang="en-US" sz="2000" dirty="0">
+              <a:rPr lang="en-US" sz="2200" dirty="0">
                 <a:solidFill>
                   <a:srgbClr val="1A1A1A"/>
                 </a:solidFill>
@@ -5787,7 +5709,7 @@
               </a:rPr>
               <a:t>Diffusion of Innovations: innovation, channels, time, social system (p. 5)</a:t>
             </a:r>
-            <a:endParaRPr lang="en-US" sz="2000" dirty="0"/>
+            <a:endParaRPr lang="en-US" sz="2200" dirty="0"/>
           </a:p>
         </p:txBody>
       </p:sp>
@@ -5872,8 +5794,8 @@
         </p:nvSpPr>
         <p:spPr>
           <a:xfrm>
-            <a:off x="640080" y="411480"/>
-            <a:ext cx="10911535" cy="365760"/>
+            <a:off x="640080" y="365760"/>
+            <a:ext cx="10911535" cy="822960"/>
           </a:xfrm>
           <a:prstGeom prst="rect">
             <a:avLst/>
@@ -5882,14 +5804,14 @@
           <a:ln/>
         </p:spPr>
         <p:txBody>
-          <a:bodyPr wrap="square" lIns="0" tIns="0" rIns="0" bIns="0" rtlCol="0" anchor="t"/>
+          <a:bodyPr wrap="square" lIns="0" tIns="0" rIns="0" bIns="0" rtlCol="0" anchor="ctr"/>
           <a:lstStyle/>
           <a:p>
             <a:pPr indent="0" marL="0">
               <a:buNone/>
             </a:pPr>
             <a:r>
-              <a:rPr lang="en-US" sz="1600" b="1" spc="100" kern="0" dirty="0">
+              <a:rPr lang="en-US" sz="4000" b="1" dirty="0">
                 <a:solidFill>
                   <a:srgbClr val="00883A"/>
                 </a:solidFill>
@@ -5897,9 +5819,9 @@
                 <a:ea typeface="Arial" pitchFamily="34" charset="-122"/>
                 <a:cs typeface="Arial" pitchFamily="34" charset="-120"/>
               </a:rPr>
-              <a:t>Research questions</a:t>
-            </a:r>
-            <a:endParaRPr lang="en-US" sz="1600" dirty="0"/>
+              <a:t>Research Questions</a:t>
+            </a:r>
+            <a:endParaRPr lang="en-US" sz="4000" dirty="0"/>
           </a:p>
         </p:txBody>
       </p:sp>
@@ -5911,47 +5833,8 @@
         </p:nvSpPr>
         <p:spPr>
           <a:xfrm>
-            <a:off x="640080" y="822960"/>
-            <a:ext cx="10911535" cy="1188720"/>
-          </a:xfrm>
-          <a:prstGeom prst="rect">
-            <a:avLst/>
-          </a:prstGeom>
-          <a:noFill/>
-          <a:ln/>
-        </p:spPr>
-        <p:txBody>
-          <a:bodyPr wrap="square" lIns="0" tIns="0" rIns="0" bIns="0" rtlCol="0" anchor="t"/>
-          <a:lstStyle/>
-          <a:p>
-            <a:pPr indent="0" marL="0">
-              <a:buNone/>
-            </a:pPr>
-            <a:r>
-              <a:rPr lang="en-US" sz="2800" b="1" dirty="0">
-                <a:solidFill>
-                  <a:srgbClr val="1A1A1A"/>
-                </a:solidFill>
-                <a:latin typeface="Arial" pitchFamily="34" charset="0"/>
-                <a:ea typeface="Arial" pitchFamily="34" charset="-122"/>
-                <a:cs typeface="Arial" pitchFamily="34" charset="-120"/>
-              </a:rPr>
-              <a:t>Do we value artifacts, and what makes them hard?</a:t>
-            </a:r>
-            <a:endParaRPr lang="en-US" sz="2800" dirty="0"/>
-          </a:p>
-        </p:txBody>
-      </p:sp>
-      <p:sp>
-        <p:nvSpPr>
-          <p:cNvPr id="4" name="Text 2"/>
-          <p:cNvSpPr txBox="1"/>
-          <p:nvPr/>
-        </p:nvSpPr>
-        <p:spPr>
-          <a:xfrm>
-            <a:off x="640080" y="2103120"/>
-            <a:ext cx="10911535" cy="4114800"/>
+            <a:off x="640080" y="1463040"/>
+            <a:ext cx="10911535" cy="4754880"/>
           </a:xfrm>
           <a:prstGeom prst="rect">
             <a:avLst/>
@@ -5971,7 +5854,7 @@
               <a:buChar char="•"/>
             </a:pPr>
             <a:r>
-              <a:rPr lang="en-US" sz="2000" dirty="0">
+              <a:rPr lang="en-US" sz="2200" dirty="0">
                 <a:solidFill>
                   <a:srgbClr val="1A1A1A"/>
                 </a:solidFill>
@@ -5981,7 +5864,7 @@
               </a:rPr>
               <a:t>RQ1: Does the SE community perceive inherent value in artifacts?</a:t>
             </a:r>
-            <a:endParaRPr lang="en-US" sz="2000" dirty="0"/>
+            <a:endParaRPr lang="en-US" sz="2200" dirty="0"/>
           </a:p>
           <a:p>
             <a:pPr marL="279400" indent="-279400">
@@ -5992,7 +5875,7 @@
               <a:buChar char="•"/>
             </a:pPr>
             <a:r>
-              <a:rPr lang="en-US" sz="2000" dirty="0">
+              <a:rPr lang="en-US" sz="2200" dirty="0">
                 <a:solidFill>
                   <a:srgbClr val="1A1A1A"/>
                 </a:solidFill>
@@ -6002,7 +5885,7 @@
               </a:rPr>
               <a:t>RQ2.1: What challenges do artifact creators face?</a:t>
             </a:r>
-            <a:endParaRPr lang="en-US" sz="2000" dirty="0"/>
+            <a:endParaRPr lang="en-US" sz="2200" dirty="0"/>
           </a:p>
           <a:p>
             <a:pPr marL="279400" indent="-279400">
@@ -6013,7 +5896,7 @@
               <a:buChar char="•"/>
             </a:pPr>
             <a:r>
-              <a:rPr lang="en-US" sz="2000" dirty="0">
+              <a:rPr lang="en-US" sz="2200" dirty="0">
                 <a:solidFill>
                   <a:srgbClr val="1A1A1A"/>
                 </a:solidFill>
@@ -6023,7 +5906,7 @@
               </a:rPr>
               <a:t>RQ2.2: What challenges do artifact users face?</a:t>
             </a:r>
-            <a:endParaRPr lang="en-US" sz="2000" dirty="0"/>
+            <a:endParaRPr lang="en-US" sz="2200" dirty="0"/>
           </a:p>
           <a:p>
             <a:pPr marL="279400" indent="-279400">
@@ -6034,7 +5917,7 @@
               <a:buChar char="•"/>
             </a:pPr>
             <a:r>
-              <a:rPr lang="en-US" sz="2000" dirty="0">
+              <a:rPr lang="en-US" sz="2200" dirty="0">
                 <a:solidFill>
                   <a:srgbClr val="1A1A1A"/>
                 </a:solidFill>
@@ -6044,7 +5927,7 @@
               </a:rPr>
               <a:t>RQ2.3: What challenges do artifact reviewers face?</a:t>
             </a:r>
-            <a:endParaRPr lang="en-US" sz="2000" dirty="0"/>
+            <a:endParaRPr lang="en-US" sz="2200" dirty="0"/>
           </a:p>
         </p:txBody>
       </p:sp>
@@ -6129,8 +6012,8 @@
         </p:nvSpPr>
         <p:spPr>
           <a:xfrm>
-            <a:off x="640080" y="411480"/>
-            <a:ext cx="10911535" cy="365760"/>
+            <a:off x="640080" y="365760"/>
+            <a:ext cx="10911535" cy="822960"/>
           </a:xfrm>
           <a:prstGeom prst="rect">
             <a:avLst/>
@@ -6139,14 +6022,14 @@
           <a:ln/>
         </p:spPr>
         <p:txBody>
-          <a:bodyPr wrap="square" lIns="0" tIns="0" rIns="0" bIns="0" rtlCol="0" anchor="t"/>
+          <a:bodyPr wrap="square" lIns="0" tIns="0" rIns="0" bIns="0" rtlCol="0" anchor="ctr"/>
           <a:lstStyle/>
           <a:p>
             <a:pPr indent="0" marL="0">
               <a:buNone/>
             </a:pPr>
             <a:r>
-              <a:rPr lang="en-US" sz="1600" b="1" spc="100" kern="0" dirty="0">
+              <a:rPr lang="en-US" sz="4000" b="1" dirty="0">
                 <a:solidFill>
                   <a:srgbClr val="00883A"/>
                 </a:solidFill>
@@ -6156,58 +6039,19 @@
               </a:rPr>
               <a:t>Methodology</a:t>
             </a:r>
-            <a:endParaRPr lang="en-US" sz="1600" dirty="0"/>
-          </a:p>
-        </p:txBody>
-      </p:sp>
-      <p:sp>
-        <p:nvSpPr>
-          <p:cNvPr id="3" name="Text 1"/>
-          <p:cNvSpPr txBox="1"/>
-          <p:nvPr/>
-        </p:nvSpPr>
-        <p:spPr>
-          <a:xfrm>
-            <a:off x="640080" y="822960"/>
-            <a:ext cx="10911535" cy="1188720"/>
-          </a:xfrm>
-          <a:prstGeom prst="rect">
-            <a:avLst/>
-          </a:prstGeom>
-          <a:noFill/>
-          <a:ln/>
-        </p:spPr>
-        <p:txBody>
-          <a:bodyPr wrap="square" lIns="0" tIns="0" rIns="0" bIns="0" rtlCol="0" anchor="t"/>
-          <a:lstStyle/>
-          <a:p>
-            <a:pPr indent="0" marL="0">
-              <a:buNone/>
-            </a:pPr>
-            <a:r>
-              <a:rPr lang="en-US" sz="2800" b="1" dirty="0">
-                <a:solidFill>
-                  <a:srgbClr val="1A1A1A"/>
-                </a:solidFill>
-                <a:latin typeface="Arial" pitchFamily="34" charset="0"/>
-                <a:ea typeface="Arial" pitchFamily="34" charset="-122"/>
-                <a:cs typeface="Arial" pitchFamily="34" charset="-120"/>
-              </a:rPr>
-              <a:t>A publication survey and an author survey, analysed together</a:t>
-            </a:r>
-            <a:endParaRPr lang="en-US" sz="2800" dirty="0"/>
-          </a:p>
-        </p:txBody>
-      </p:sp>
-      <p:sp>
-        <p:nvSpPr>
-          <p:cNvPr id="4" name="panel12"/>
+            <a:endParaRPr lang="en-US" sz="4000" dirty="0"/>
+          </a:p>
+        </p:txBody>
+      </p:sp>
+      <p:sp>
+        <p:nvSpPr>
+          <p:cNvPr id="3" name="panel12"/>
           <p:cNvSpPr/>
           <p:nvPr/>
         </p:nvSpPr>
         <p:spPr>
           <a:xfrm>
-            <a:off x="640080" y="2103120"/>
+            <a:off x="640080" y="1463040"/>
             <a:ext cx="3454298" cy="1051560"/>
           </a:xfrm>
           <a:prstGeom prst="roundRect">
@@ -6228,14 +6072,53 @@
       </p:sp>
       <p:sp>
         <p:nvSpPr>
+          <p:cNvPr id="4" name="Text 2"/>
+          <p:cNvSpPr txBox="1"/>
+          <p:nvPr/>
+        </p:nvSpPr>
+        <p:spPr>
+          <a:xfrm>
+            <a:off x="868680" y="1572768"/>
+            <a:ext cx="1645920" cy="822960"/>
+          </a:xfrm>
+          <a:prstGeom prst="rect">
+            <a:avLst/>
+          </a:prstGeom>
+          <a:noFill/>
+          <a:ln/>
+        </p:spPr>
+        <p:txBody>
+          <a:bodyPr wrap="square" lIns="0" tIns="0" rIns="0" bIns="0" rtlCol="0" anchor="ctr"/>
+          <a:lstStyle/>
+          <a:p>
+            <a:pPr indent="0" marL="0">
+              <a:buNone/>
+            </a:pPr>
+            <a:r>
+              <a:rPr lang="en-US" sz="3600" b="1" dirty="0">
+                <a:solidFill>
+                  <a:srgbClr val="00883A"/>
+                </a:solidFill>
+                <a:latin typeface="Arial" pitchFamily="34" charset="0"/>
+                <a:ea typeface="Arial" pitchFamily="34" charset="-122"/>
+                <a:cs typeface="Arial" pitchFamily="34" charset="-120"/>
+              </a:rPr>
+              <a:t>1434</a:t>
+            </a:r>
+            <a:endParaRPr lang="en-US" sz="3600" dirty="0"/>
+          </a:p>
+        </p:txBody>
+      </p:sp>
+      <p:sp>
+        <p:nvSpPr>
           <p:cNvPr id="5" name="Text 3"/>
           <p:cNvSpPr txBox="1"/>
           <p:nvPr/>
         </p:nvSpPr>
         <p:spPr>
           <a:xfrm>
-            <a:off x="868680" y="2212848"/>
-            <a:ext cx="1645920" cy="822960"/>
+            <a:off x="2468880" y="1572768"/>
+            <a:ext cx="1442618" cy="822960"/>
           </a:xfrm>
           <a:prstGeom prst="rect">
             <a:avLst/>
@@ -6251,45 +6134,6 @@
               <a:buNone/>
             </a:pPr>
             <a:r>
-              <a:rPr lang="en-US" sz="3600" b="1" dirty="0">
-                <a:solidFill>
-                  <a:srgbClr val="00883A"/>
-                </a:solidFill>
-                <a:latin typeface="Arial" pitchFamily="34" charset="0"/>
-                <a:ea typeface="Arial" pitchFamily="34" charset="-122"/>
-                <a:cs typeface="Arial" pitchFamily="34" charset="-120"/>
-              </a:rPr>
-              <a:t>1434</a:t>
-            </a:r>
-            <a:endParaRPr lang="en-US" sz="3600" dirty="0"/>
-          </a:p>
-        </p:txBody>
-      </p:sp>
-      <p:sp>
-        <p:nvSpPr>
-          <p:cNvPr id="6" name="Text 4"/>
-          <p:cNvSpPr txBox="1"/>
-          <p:nvPr/>
-        </p:nvSpPr>
-        <p:spPr>
-          <a:xfrm>
-            <a:off x="2468880" y="2212848"/>
-            <a:ext cx="1442618" cy="822960"/>
-          </a:xfrm>
-          <a:prstGeom prst="rect">
-            <a:avLst/>
-          </a:prstGeom>
-          <a:noFill/>
-          <a:ln/>
-        </p:spPr>
-        <p:txBody>
-          <a:bodyPr wrap="square" lIns="0" tIns="0" rIns="0" bIns="0" rtlCol="0" anchor="ctr"/>
-          <a:lstStyle/>
-          <a:p>
-            <a:pPr indent="0" marL="0">
-              <a:buNone/>
-            </a:pPr>
-            <a:r>
               <a:rPr lang="en-US" sz="1800" dirty="0">
                 <a:solidFill>
                   <a:srgbClr val="5F6368"/>
@@ -6306,13 +6150,13 @@
       </p:sp>
       <p:sp>
         <p:nvSpPr>
-          <p:cNvPr id="7" name="panel13"/>
+          <p:cNvPr id="6" name="panel13"/>
           <p:cNvSpPr/>
           <p:nvPr/>
         </p:nvSpPr>
         <p:spPr>
           <a:xfrm>
-            <a:off x="4368698" y="2103120"/>
+            <a:off x="4368698" y="1463040"/>
             <a:ext cx="3454298" cy="1051560"/>
           </a:xfrm>
           <a:prstGeom prst="roundRect">
@@ -6333,14 +6177,53 @@
       </p:sp>
       <p:sp>
         <p:nvSpPr>
+          <p:cNvPr id="7" name="Text 5"/>
+          <p:cNvSpPr txBox="1"/>
+          <p:nvPr/>
+        </p:nvSpPr>
+        <p:spPr>
+          <a:xfrm>
+            <a:off x="4597298" y="1572768"/>
+            <a:ext cx="1645920" cy="822960"/>
+          </a:xfrm>
+          <a:prstGeom prst="rect">
+            <a:avLst/>
+          </a:prstGeom>
+          <a:noFill/>
+          <a:ln/>
+        </p:spPr>
+        <p:txBody>
+          <a:bodyPr wrap="square" lIns="0" tIns="0" rIns="0" bIns="0" rtlCol="0" anchor="ctr"/>
+          <a:lstStyle/>
+          <a:p>
+            <a:pPr indent="0" marL="0">
+              <a:buNone/>
+            </a:pPr>
+            <a:r>
+              <a:rPr lang="en-US" sz="3600" b="1" dirty="0">
+                <a:solidFill>
+                  <a:srgbClr val="00883A"/>
+                </a:solidFill>
+                <a:latin typeface="Arial" pitchFamily="34" charset="0"/>
+                <a:ea typeface="Arial" pitchFamily="34" charset="-122"/>
+                <a:cs typeface="Arial" pitchFamily="34" charset="-120"/>
+              </a:rPr>
+              <a:t>153</a:t>
+            </a:r>
+            <a:endParaRPr lang="en-US" sz="3600" dirty="0"/>
+          </a:p>
+        </p:txBody>
+      </p:sp>
+      <p:sp>
+        <p:nvSpPr>
           <p:cNvPr id="8" name="Text 6"/>
           <p:cNvSpPr txBox="1"/>
           <p:nvPr/>
         </p:nvSpPr>
         <p:spPr>
           <a:xfrm>
-            <a:off x="4597298" y="2212848"/>
-            <a:ext cx="1645920" cy="822960"/>
+            <a:off x="6197498" y="1572768"/>
+            <a:ext cx="1442618" cy="822960"/>
           </a:xfrm>
           <a:prstGeom prst="rect">
             <a:avLst/>
@@ -6356,45 +6239,6 @@
               <a:buNone/>
             </a:pPr>
             <a:r>
-              <a:rPr lang="en-US" sz="3600" b="1" dirty="0">
-                <a:solidFill>
-                  <a:srgbClr val="00883A"/>
-                </a:solidFill>
-                <a:latin typeface="Arial" pitchFamily="34" charset="0"/>
-                <a:ea typeface="Arial" pitchFamily="34" charset="-122"/>
-                <a:cs typeface="Arial" pitchFamily="34" charset="-120"/>
-              </a:rPr>
-              <a:t>153</a:t>
-            </a:r>
-            <a:endParaRPr lang="en-US" sz="3600" dirty="0"/>
-          </a:p>
-        </p:txBody>
-      </p:sp>
-      <p:sp>
-        <p:nvSpPr>
-          <p:cNvPr id="9" name="Text 7"/>
-          <p:cNvSpPr txBox="1"/>
-          <p:nvPr/>
-        </p:nvSpPr>
-        <p:spPr>
-          <a:xfrm>
-            <a:off x="6197498" y="2212848"/>
-            <a:ext cx="1442618" cy="822960"/>
-          </a:xfrm>
-          <a:prstGeom prst="rect">
-            <a:avLst/>
-          </a:prstGeom>
-          <a:noFill/>
-          <a:ln/>
-        </p:spPr>
-        <p:txBody>
-          <a:bodyPr wrap="square" lIns="0" tIns="0" rIns="0" bIns="0" rtlCol="0" anchor="ctr"/>
-          <a:lstStyle/>
-          <a:p>
-            <a:pPr indent="0" marL="0">
-              <a:buNone/>
-            </a:pPr>
-            <a:r>
               <a:rPr lang="en-US" sz="1800" dirty="0">
                 <a:solidFill>
                   <a:srgbClr val="5F6368"/>
@@ -6411,13 +6255,13 @@
       </p:sp>
       <p:sp>
         <p:nvSpPr>
-          <p:cNvPr id="10" name="panel14"/>
+          <p:cNvPr id="9" name="panel14"/>
           <p:cNvSpPr/>
           <p:nvPr/>
         </p:nvSpPr>
         <p:spPr>
           <a:xfrm>
-            <a:off x="8097317" y="2103120"/>
+            <a:off x="8097317" y="1463040"/>
             <a:ext cx="3454298" cy="1051560"/>
           </a:xfrm>
           <a:prstGeom prst="roundRect">
@@ -6438,14 +6282,53 @@
       </p:sp>
       <p:sp>
         <p:nvSpPr>
+          <p:cNvPr id="10" name="Text 8"/>
+          <p:cNvSpPr txBox="1"/>
+          <p:nvPr/>
+        </p:nvSpPr>
+        <p:spPr>
+          <a:xfrm>
+            <a:off x="8325917" y="1572768"/>
+            <a:ext cx="1645920" cy="822960"/>
+          </a:xfrm>
+          <a:prstGeom prst="rect">
+            <a:avLst/>
+          </a:prstGeom>
+          <a:noFill/>
+          <a:ln/>
+        </p:spPr>
+        <p:txBody>
+          <a:bodyPr wrap="square" lIns="0" tIns="0" rIns="0" bIns="0" rtlCol="0" anchor="ctr"/>
+          <a:lstStyle/>
+          <a:p>
+            <a:pPr indent="0" marL="0">
+              <a:buNone/>
+            </a:pPr>
+            <a:r>
+              <a:rPr lang="en-US" sz="3600" b="1" dirty="0">
+                <a:solidFill>
+                  <a:srgbClr val="00883A"/>
+                </a:solidFill>
+                <a:latin typeface="Arial" pitchFamily="34" charset="0"/>
+                <a:ea typeface="Arial" pitchFamily="34" charset="-122"/>
+                <a:cs typeface="Arial" pitchFamily="34" charset="-120"/>
+              </a:rPr>
+              <a:t>32</a:t>
+            </a:r>
+            <a:endParaRPr lang="en-US" sz="3600" dirty="0"/>
+          </a:p>
+        </p:txBody>
+      </p:sp>
+      <p:sp>
+        <p:nvSpPr>
           <p:cNvPr id="11" name="Text 9"/>
           <p:cNvSpPr txBox="1"/>
           <p:nvPr/>
         </p:nvSpPr>
         <p:spPr>
           <a:xfrm>
-            <a:off x="8325917" y="2212848"/>
-            <a:ext cx="1645920" cy="822960"/>
+            <a:off x="9926117" y="1572768"/>
+            <a:ext cx="1442618" cy="822960"/>
           </a:xfrm>
           <a:prstGeom prst="rect">
             <a:avLst/>
@@ -6461,17 +6344,17 @@
               <a:buNone/>
             </a:pPr>
             <a:r>
-              <a:rPr lang="en-US" sz="3600" b="1" dirty="0">
-                <a:solidFill>
-                  <a:srgbClr val="00883A"/>
-                </a:solidFill>
-                <a:latin typeface="Arial" pitchFamily="34" charset="0"/>
-                <a:ea typeface="Arial" pitchFamily="34" charset="-122"/>
-                <a:cs typeface="Arial" pitchFamily="34" charset="-120"/>
-              </a:rPr>
-              <a:t>32</a:t>
-            </a:r>
-            <a:endParaRPr lang="en-US" sz="3600" dirty="0"/>
+              <a:rPr lang="en-US" sz="1800" dirty="0">
+                <a:solidFill>
+                  <a:srgbClr val="5F6368"/>
+                </a:solidFill>
+                <a:latin typeface="Arial" pitchFamily="34" charset="0"/>
+                <a:ea typeface="Arial" pitchFamily="34" charset="-122"/>
+                <a:cs typeface="Arial" pitchFamily="34" charset="-120"/>
+              </a:rPr>
+              <a:t>of them reviewers</a:t>
+            </a:r>
+            <a:endParaRPr lang="en-US" sz="1800" dirty="0"/>
           </a:p>
         </p:txBody>
       </p:sp>
@@ -6483,47 +6366,8 @@
         </p:nvSpPr>
         <p:spPr>
           <a:xfrm>
-            <a:off x="9926117" y="2212848"/>
-            <a:ext cx="1442618" cy="822960"/>
-          </a:xfrm>
-          <a:prstGeom prst="rect">
-            <a:avLst/>
-          </a:prstGeom>
-          <a:noFill/>
-          <a:ln/>
-        </p:spPr>
-        <p:txBody>
-          <a:bodyPr wrap="square" lIns="0" tIns="0" rIns="0" bIns="0" rtlCol="0" anchor="ctr"/>
-          <a:lstStyle/>
-          <a:p>
-            <a:pPr indent="0" marL="0">
-              <a:buNone/>
-            </a:pPr>
-            <a:r>
-              <a:rPr lang="en-US" sz="1800" dirty="0">
-                <a:solidFill>
-                  <a:srgbClr val="5F6368"/>
-                </a:solidFill>
-                <a:latin typeface="Arial" pitchFamily="34" charset="0"/>
-                <a:ea typeface="Arial" pitchFamily="34" charset="-122"/>
-                <a:cs typeface="Arial" pitchFamily="34" charset="-120"/>
-              </a:rPr>
-              <a:t>of them reviewers</a:t>
-            </a:r>
-            <a:endParaRPr lang="en-US" sz="1800" dirty="0"/>
-          </a:p>
-        </p:txBody>
-      </p:sp>
-      <p:sp>
-        <p:nvSpPr>
-          <p:cNvPr id="13" name="Text 11"/>
-          <p:cNvSpPr txBox="1"/>
-          <p:nvPr/>
-        </p:nvSpPr>
-        <p:spPr>
-          <a:xfrm>
-            <a:off x="640080" y="3429000"/>
-            <a:ext cx="10911535" cy="2788920"/>
+            <a:off x="640080" y="2788920"/>
+            <a:ext cx="10911535" cy="3429000"/>
           </a:xfrm>
           <a:prstGeom prst="rect">
             <a:avLst/>
@@ -6701,8 +6545,8 @@
         </p:nvSpPr>
         <p:spPr>
           <a:xfrm>
-            <a:off x="640080" y="411480"/>
-            <a:ext cx="10911535" cy="365760"/>
+            <a:off x="640080" y="365760"/>
+            <a:ext cx="10911535" cy="822960"/>
           </a:xfrm>
           <a:prstGeom prst="rect">
             <a:avLst/>
@@ -6711,14 +6555,14 @@
           <a:ln/>
         </p:spPr>
         <p:txBody>
-          <a:bodyPr wrap="square" lIns="0" tIns="0" rIns="0" bIns="0" rtlCol="0" anchor="t"/>
+          <a:bodyPr wrap="square" lIns="0" tIns="0" rIns="0" bIns="0" rtlCol="0" anchor="ctr"/>
           <a:lstStyle/>
           <a:p>
             <a:pPr indent="0" marL="0">
               <a:buNone/>
             </a:pPr>
             <a:r>
-              <a:rPr lang="en-US" sz="1600" b="1" spc="100" kern="0" dirty="0">
+              <a:rPr lang="en-US" sz="4000" b="1" dirty="0">
                 <a:solidFill>
                   <a:srgbClr val="00883A"/>
                 </a:solidFill>
@@ -6728,7 +6572,7 @@
               </a:rPr>
               <a:t>Results</a:t>
             </a:r>
-            <a:endParaRPr lang="en-US" sz="1600" dirty="0"/>
+            <a:endParaRPr lang="en-US" sz="4000" dirty="0"/>
           </a:p>
         </p:txBody>
       </p:sp>
@@ -6740,47 +6584,8 @@
         </p:nvSpPr>
         <p:spPr>
           <a:xfrm>
-            <a:off x="640080" y="822960"/>
-            <a:ext cx="10911535" cy="1188720"/>
-          </a:xfrm>
-          <a:prstGeom prst="rect">
-            <a:avLst/>
-          </a:prstGeom>
-          <a:noFill/>
-          <a:ln/>
-        </p:spPr>
-        <p:txBody>
-          <a:bodyPr wrap="square" lIns="0" tIns="0" rIns="0" bIns="0" rtlCol="0" anchor="t"/>
-          <a:lstStyle/>
-          <a:p>
-            <a:pPr indent="0" marL="0">
-              <a:buNone/>
-            </a:pPr>
-            <a:r>
-              <a:rPr lang="en-US" sz="2800" b="1" dirty="0">
-                <a:solidFill>
-                  <a:srgbClr val="1A1A1A"/>
-                </a:solidFill>
-                <a:latin typeface="Arial" pitchFamily="34" charset="0"/>
-                <a:ea typeface="Arial" pitchFamily="34" charset="-122"/>
-                <a:cs typeface="Arial" pitchFamily="34" charset="-120"/>
-              </a:rPr>
-              <a:t>Most papers link an artifact, but few are submitted for evaluation</a:t>
-            </a:r>
-            <a:endParaRPr lang="en-US" sz="2800" dirty="0"/>
-          </a:p>
-        </p:txBody>
-      </p:sp>
-      <p:sp>
-        <p:nvSpPr>
-          <p:cNvPr id="4" name="Text 2"/>
-          <p:cNvSpPr txBox="1"/>
-          <p:nvPr/>
-        </p:nvSpPr>
-        <p:spPr>
-          <a:xfrm>
-            <a:off x="640080" y="2103120"/>
-            <a:ext cx="10911535" cy="4114800"/>
+            <a:off x="640080" y="1463040"/>
+            <a:ext cx="10911535" cy="4754880"/>
           </a:xfrm>
           <a:prstGeom prst="rect">
             <a:avLst/>
@@ -6800,7 +6605,7 @@
               <a:buChar char="•"/>
             </a:pPr>
             <a:r>
-              <a:rPr lang="en-US" sz="2000" dirty="0">
+              <a:rPr lang="en-US" sz="2200" dirty="0">
                 <a:solidFill>
                   <a:srgbClr val="1A1A1A"/>
                 </a:solidFill>
@@ -6810,7 +6615,7 @@
               </a:rPr>
               <a:t>62.7 % of papers link an artifact, rising from 51 % to 69 % (p. 11)</a:t>
             </a:r>
-            <a:endParaRPr lang="en-US" sz="2000" dirty="0"/>
+            <a:endParaRPr lang="en-US" sz="2200" dirty="0"/>
           </a:p>
           <a:p>
             <a:pPr marL="279400" indent="-279400">
@@ -6821,7 +6626,7 @@
               <a:buChar char="•"/>
             </a:pPr>
             <a:r>
-              <a:rPr lang="en-US" sz="2000" dirty="0">
+              <a:rPr lang="en-US" sz="2200" dirty="0">
                 <a:solidFill>
                   <a:srgbClr val="1A1A1A"/>
                 </a:solidFill>
@@ -6831,7 +6636,7 @@
               </a:rPr>
               <a:t>About 14 % of links dead; 26 % for 2014 papers (Fig. 3, p. 20)</a:t>
             </a:r>
-            <a:endParaRPr lang="en-US" sz="2000" dirty="0"/>
+            <a:endParaRPr lang="en-US" sz="2200" dirty="0"/>
           </a:p>
           <a:p>
             <a:pPr marL="279400" indent="-279400">
@@ -6842,7 +6647,7 @@
               <a:buChar char="•"/>
             </a:pPr>
             <a:r>
-              <a:rPr lang="en-US" sz="2000" dirty="0">
+              <a:rPr lang="en-US" sz="2200" dirty="0">
                 <a:solidFill>
                   <a:srgbClr val="1A1A1A"/>
                 </a:solidFill>
@@ -6852,7 +6657,7 @@
               </a:rPr>
               <a:t>FSE: 74 of 196 artifact papers submitted to AE, 64 accepted (Fig. 4)</a:t>
             </a:r>
-            <a:endParaRPr lang="en-US" sz="2000" dirty="0"/>
+            <a:endParaRPr lang="en-US" sz="2200" dirty="0"/>
           </a:p>
           <a:p>
             <a:pPr marL="279400" indent="-279400">
@@ -6863,7 +6668,7 @@
               <a:buChar char="•"/>
             </a:pPr>
             <a:r>
-              <a:rPr lang="en-US" sz="2000" dirty="0">
+              <a:rPr lang="en-US" sz="2200" dirty="0">
                 <a:solidFill>
                   <a:srgbClr val="1A1A1A"/>
                 </a:solidFill>
@@ -6873,7 +6678,7 @@
               </a:rPr>
               <a:t>Top user problems: no usage instructions (103), artifact gone (81)</a:t>
             </a:r>
-            <a:endParaRPr lang="en-US" sz="2000" dirty="0"/>
+            <a:endParaRPr lang="en-US" sz="2200" dirty="0"/>
           </a:p>
           <a:p>
             <a:pPr marL="279400" indent="-279400">
@@ -6884,7 +6689,7 @@
               <a:buChar char="•"/>
             </a:pPr>
             <a:r>
-              <a:rPr lang="en-US" sz="2000" dirty="0">
+              <a:rPr lang="en-US" sz="2200" dirty="0">
                 <a:solidFill>
                   <a:srgbClr val="1A1A1A"/>
                 </a:solidFill>
@@ -6894,7 +6699,7 @@
               </a:rPr>
               <a:t>C1 "not worth it" and C10 "no reviewer incentives" drive the rest</a:t>
             </a:r>
-            <a:endParaRPr lang="en-US" sz="2000" dirty="0"/>
+            <a:endParaRPr lang="en-US" sz="2200" dirty="0"/>
           </a:p>
         </p:txBody>
       </p:sp>
@@ -6979,8 +6784,8 @@
         </p:nvSpPr>
         <p:spPr>
           <a:xfrm>
-            <a:off x="640080" y="411480"/>
-            <a:ext cx="10911535" cy="365760"/>
+            <a:off x="640080" y="365760"/>
+            <a:ext cx="10911535" cy="822960"/>
           </a:xfrm>
           <a:prstGeom prst="rect">
             <a:avLst/>
@@ -6989,14 +6794,14 @@
           <a:ln/>
         </p:spPr>
         <p:txBody>
-          <a:bodyPr wrap="square" lIns="0" tIns="0" rIns="0" bIns="0" rtlCol="0" anchor="t"/>
+          <a:bodyPr wrap="square" lIns="0" tIns="0" rIns="0" bIns="0" rtlCol="0" anchor="ctr"/>
           <a:lstStyle/>
           <a:p>
             <a:pPr indent="0" marL="0">
               <a:buNone/>
             </a:pPr>
             <a:r>
-              <a:rPr lang="en-US" sz="1600" b="1" spc="100" kern="0" dirty="0">
+              <a:rPr lang="en-US" sz="4000" b="1" dirty="0">
                 <a:solidFill>
                   <a:srgbClr val="00883A"/>
                 </a:solidFill>
@@ -7004,9 +6809,9 @@
                 <a:ea typeface="Arial" pitchFamily="34" charset="-122"/>
                 <a:cs typeface="Arial" pitchFamily="34" charset="-120"/>
               </a:rPr>
-              <a:t>Validity and discussion</a:t>
-            </a:r>
-            <a:endParaRPr lang="en-US" sz="1600" dirty="0"/>
+              <a:t>Validity / Discussion</a:t>
+            </a:r>
+            <a:endParaRPr lang="en-US" sz="4000" dirty="0"/>
           </a:p>
         </p:txBody>
       </p:sp>
@@ -7018,47 +6823,8 @@
         </p:nvSpPr>
         <p:spPr>
           <a:xfrm>
-            <a:off x="640080" y="822960"/>
-            <a:ext cx="10911535" cy="1188720"/>
-          </a:xfrm>
-          <a:prstGeom prst="rect">
-            <a:avLst/>
-          </a:prstGeom>
-          <a:noFill/>
-          <a:ln/>
-        </p:spPr>
-        <p:txBody>
-          <a:bodyPr wrap="square" lIns="0" tIns="0" rIns="0" bIns="0" rtlCol="0" anchor="t"/>
-          <a:lstStyle/>
-          <a:p>
-            <a:pPr indent="0" marL="0">
-              <a:buNone/>
-            </a:pPr>
-            <a:r>
-              <a:rPr lang="en-US" sz="2800" b="1" dirty="0">
-                <a:solidFill>
-                  <a:srgbClr val="1A1A1A"/>
-                </a:solidFill>
-                <a:latin typeface="Arial" pitchFamily="34" charset="0"/>
-                <a:ea typeface="Arial" pitchFamily="34" charset="-122"/>
-                <a:cs typeface="Arial" pitchFamily="34" charset="-120"/>
-              </a:rPr>
-              <a:t>Eight recommendations, from creators up to funders</a:t>
-            </a:r>
-            <a:endParaRPr lang="en-US" sz="2800" dirty="0"/>
-          </a:p>
-        </p:txBody>
-      </p:sp>
-      <p:sp>
-        <p:nvSpPr>
-          <p:cNvPr id="4" name="Text 2"/>
-          <p:cNvSpPr txBox="1"/>
-          <p:nvPr/>
-        </p:nvSpPr>
-        <p:spPr>
-          <a:xfrm>
-            <a:off x="640080" y="2103120"/>
-            <a:ext cx="10911535" cy="4114800"/>
+            <a:off x="640080" y="1463040"/>
+            <a:ext cx="10911535" cy="4754880"/>
           </a:xfrm>
           <a:prstGeom prst="rect">
             <a:avLst/>
@@ -7078,7 +6844,7 @@
               <a:buChar char="•"/>
             </a:pPr>
             <a:r>
-              <a:rPr lang="en-US" sz="2000" dirty="0">
+              <a:rPr lang="en-US" sz="2200" dirty="0">
                 <a:solidFill>
                   <a:srgbClr val="1A1A1A"/>
                 </a:solidFill>
@@ -7088,7 +6854,7 @@
               </a:rPr>
               <a:t>Creators: describe the artifact, make it self-contained, plan from day one (R1–R3)</a:t>
             </a:r>
-            <a:endParaRPr lang="en-US" sz="2000" dirty="0"/>
+            <a:endParaRPr lang="en-US" sz="2200" dirty="0"/>
           </a:p>
           <a:p>
             <a:pPr marL="279400" indent="-279400">
@@ -7099,7 +6865,7 @@
               <a:buChar char="•"/>
             </a:pPr>
             <a:r>
-              <a:rPr lang="en-US" sz="2000" dirty="0">
+              <a:rPr lang="en-US" sz="2200" dirty="0">
                 <a:solidFill>
                   <a:srgbClr val="1A1A1A"/>
                 </a:solidFill>
@@ -7109,7 +6875,7 @@
               </a:rPr>
               <a:t>Reviewers and organisers: rubrics, aligned expectations, cheaper reviewing (R4–R6)</a:t>
             </a:r>
-            <a:endParaRPr lang="en-US" sz="2000" dirty="0"/>
+            <a:endParaRPr lang="en-US" sz="2200" dirty="0"/>
           </a:p>
           <a:p>
             <a:pPr marL="279400" indent="-279400">
@@ -7120,7 +6886,7 @@
               <a:buChar char="•"/>
             </a:pPr>
             <a:r>
-              <a:rPr lang="en-US" sz="2000" dirty="0">
+              <a:rPr lang="en-US" sz="2200" dirty="0">
                 <a:solidFill>
                   <a:srgbClr val="1A1A1A"/>
                 </a:solidFill>
@@ -7130,7 +6896,7 @@
               </a:rPr>
               <a:t>Community leaders: count artifacts in hiring, promotion and grants (R7–R8)</a:t>
             </a:r>
-            <a:endParaRPr lang="en-US" sz="2000" dirty="0"/>
+            <a:endParaRPr lang="en-US" sz="2200" dirty="0"/>
           </a:p>
           <a:p>
             <a:pPr marL="279400" indent="-279400">
@@ -7141,7 +6907,7 @@
               <a:buChar char="•"/>
             </a:pPr>
             <a:r>
-              <a:rPr lang="en-US" sz="2000" dirty="0">
+              <a:rPr lang="en-US" sz="2200" dirty="0">
                 <a:solidFill>
                   <a:srgbClr val="1A1A1A"/>
                 </a:solidFill>
@@ -7151,7 +6917,7 @@
               </a:rPr>
               <a:t>Threats: links ≠ usable artifacts; authors not contacted; 2018 authors only (pp. 10–11)</a:t>
             </a:r>
-            <a:endParaRPr lang="en-US" sz="2000" dirty="0"/>
+            <a:endParaRPr lang="en-US" sz="2200" dirty="0"/>
           </a:p>
         </p:txBody>
       </p:sp>
@@ -7236,8 +7002,8 @@
         </p:nvSpPr>
         <p:spPr>
           <a:xfrm>
-            <a:off x="640080" y="822960"/>
-            <a:ext cx="10911535" cy="1188720"/>
+            <a:off x="640080" y="365760"/>
+            <a:ext cx="10911535" cy="822960"/>
           </a:xfrm>
           <a:prstGeom prst="rect">
             <a:avLst/>
@@ -7246,16 +7012,16 @@
           <a:ln/>
         </p:spPr>
         <p:txBody>
-          <a:bodyPr wrap="square" lIns="0" tIns="0" rIns="0" bIns="0" rtlCol="0" anchor="t"/>
+          <a:bodyPr wrap="square" lIns="0" tIns="0" rIns="0" bIns="0" rtlCol="0" anchor="ctr"/>
           <a:lstStyle/>
           <a:p>
             <a:pPr indent="0" marL="0">
               <a:buNone/>
             </a:pPr>
             <a:r>
-              <a:rPr lang="en-US" sz="3600" b="1" dirty="0">
-                <a:solidFill>
-                  <a:srgbClr val="1A1A1A"/>
+              <a:rPr lang="en-US" sz="4000" b="1" dirty="0">
+                <a:solidFill>
+                  <a:srgbClr val="00883A"/>
                 </a:solidFill>
                 <a:latin typeface="Arial" pitchFamily="34" charset="0"/>
                 <a:ea typeface="Arial" pitchFamily="34" charset="-122"/>
@@ -7263,7 +7029,7 @@
               </a:rPr>
               <a:t>Index</a:t>
             </a:r>
-            <a:endParaRPr lang="en-US" sz="3600" dirty="0"/>
+            <a:endParaRPr lang="en-US" sz="4000" dirty="0"/>
           </a:p>
         </p:txBody>
       </p:sp>
@@ -7275,7 +7041,7 @@
         </p:nvSpPr>
         <p:spPr>
           <a:xfrm>
-            <a:off x="640080" y="1737360"/>
+            <a:off x="640080" y="1554480"/>
             <a:ext cx="731520" cy="502920"/>
           </a:xfrm>
           <a:prstGeom prst="rect">
@@ -7314,7 +7080,7 @@
         </p:nvSpPr>
         <p:spPr>
           <a:xfrm>
-            <a:off x="1463040" y="1737360"/>
+            <a:off x="1463040" y="1554480"/>
             <a:ext cx="10088575" cy="502920"/>
           </a:xfrm>
           <a:prstGeom prst="rect">
@@ -7353,7 +7119,7 @@
         </p:nvSpPr>
         <p:spPr>
           <a:xfrm>
-            <a:off x="640080" y="2359152"/>
+            <a:off x="640080" y="2194560"/>
             <a:ext cx="731520" cy="502920"/>
           </a:xfrm>
           <a:prstGeom prst="rect">
@@ -7392,7 +7158,7 @@
         </p:nvSpPr>
         <p:spPr>
           <a:xfrm>
-            <a:off x="1463040" y="2359152"/>
+            <a:off x="1463040" y="2194560"/>
             <a:ext cx="10088575" cy="502920"/>
           </a:xfrm>
           <a:prstGeom prst="rect">
@@ -7431,7 +7197,7 @@
         </p:nvSpPr>
         <p:spPr>
           <a:xfrm>
-            <a:off x="640080" y="2980944"/>
+            <a:off x="640080" y="2834640"/>
             <a:ext cx="731520" cy="502920"/>
           </a:xfrm>
           <a:prstGeom prst="rect">
@@ -7470,7 +7236,7 @@
         </p:nvSpPr>
         <p:spPr>
           <a:xfrm>
-            <a:off x="1463040" y="2980944"/>
+            <a:off x="1463040" y="2834640"/>
             <a:ext cx="10088575" cy="502920"/>
           </a:xfrm>
           <a:prstGeom prst="rect">
@@ -7509,7 +7275,7 @@
         </p:nvSpPr>
         <p:spPr>
           <a:xfrm>
-            <a:off x="640080" y="3602736"/>
+            <a:off x="640080" y="3474720"/>
             <a:ext cx="731520" cy="502920"/>
           </a:xfrm>
           <a:prstGeom prst="rect">
@@ -7548,7 +7314,7 @@
         </p:nvSpPr>
         <p:spPr>
           <a:xfrm>
-            <a:off x="1463040" y="3602736"/>
+            <a:off x="1463040" y="3474720"/>
             <a:ext cx="10088575" cy="502920"/>
           </a:xfrm>
           <a:prstGeom prst="rect">
@@ -7587,7 +7353,7 @@
         </p:nvSpPr>
         <p:spPr>
           <a:xfrm>
-            <a:off x="640080" y="4224528"/>
+            <a:off x="640080" y="4114800"/>
             <a:ext cx="731520" cy="502920"/>
           </a:xfrm>
           <a:prstGeom prst="rect">
@@ -7626,7 +7392,7 @@
         </p:nvSpPr>
         <p:spPr>
           <a:xfrm>
-            <a:off x="1463040" y="4224528"/>
+            <a:off x="1463040" y="4114800"/>
             <a:ext cx="10088575" cy="502920"/>
           </a:xfrm>
           <a:prstGeom prst="rect">
@@ -7665,7 +7431,7 @@
         </p:nvSpPr>
         <p:spPr>
           <a:xfrm>
-            <a:off x="640080" y="4846320"/>
+            <a:off x="640080" y="4754880"/>
             <a:ext cx="731520" cy="502920"/>
           </a:xfrm>
           <a:prstGeom prst="rect">
@@ -7704,7 +7470,7 @@
         </p:nvSpPr>
         <p:spPr>
           <a:xfrm>
-            <a:off x="1463040" y="4846320"/>
+            <a:off x="1463040" y="4754880"/>
             <a:ext cx="10088575" cy="502920"/>
           </a:xfrm>
           <a:prstGeom prst="rect">
@@ -7743,7 +7509,7 @@
         </p:nvSpPr>
         <p:spPr>
           <a:xfrm>
-            <a:off x="640080" y="5468112"/>
+            <a:off x="640080" y="5394960"/>
             <a:ext cx="731520" cy="502920"/>
           </a:xfrm>
           <a:prstGeom prst="rect">
@@ -7782,7 +7548,7 @@
         </p:nvSpPr>
         <p:spPr>
           <a:xfrm>
-            <a:off x="1463040" y="5468112"/>
+            <a:off x="1463040" y="5394960"/>
             <a:ext cx="10088575" cy="502920"/>
           </a:xfrm>
           <a:prstGeom prst="rect">
@@ -7894,8 +7660,8 @@
         </p:nvSpPr>
         <p:spPr>
           <a:xfrm>
-            <a:off x="640080" y="411480"/>
-            <a:ext cx="10911535" cy="365760"/>
+            <a:off x="640080" y="365760"/>
+            <a:ext cx="10911535" cy="822960"/>
           </a:xfrm>
           <a:prstGeom prst="rect">
             <a:avLst/>
@@ -7904,14 +7670,14 @@
           <a:ln/>
         </p:spPr>
         <p:txBody>
-          <a:bodyPr wrap="square" lIns="0" tIns="0" rIns="0" bIns="0" rtlCol="0" anchor="t"/>
+          <a:bodyPr wrap="square" lIns="0" tIns="0" rIns="0" bIns="0" rtlCol="0" anchor="ctr"/>
           <a:lstStyle/>
           <a:p>
             <a:pPr indent="0" marL="0">
               <a:buNone/>
             </a:pPr>
             <a:r>
-              <a:rPr lang="en-US" sz="1600" b="1" spc="100" kern="0" dirty="0">
+              <a:rPr lang="en-US" sz="4000" b="1" dirty="0">
                 <a:solidFill>
                   <a:srgbClr val="00883A"/>
                 </a:solidFill>
@@ -7919,9 +7685,9 @@
                 <a:ea typeface="Arial" pitchFamily="34" charset="-122"/>
                 <a:cs typeface="Arial" pitchFamily="34" charset="-120"/>
               </a:rPr>
-              <a:t>Paper 2 · discussion</a:t>
-            </a:r>
-            <a:endParaRPr lang="en-US" sz="1600" dirty="0"/>
+              <a:t>Paper 2 · Discussion</a:t>
+            </a:r>
+            <a:endParaRPr lang="en-US" sz="4000" dirty="0"/>
           </a:p>
         </p:txBody>
       </p:sp>
@@ -7933,8 +7699,8 @@
         </p:nvSpPr>
         <p:spPr>
           <a:xfrm>
-            <a:off x="640080" y="822960"/>
-            <a:ext cx="10911535" cy="1188720"/>
+            <a:off x="640080" y="1325880"/>
+            <a:ext cx="10911535" cy="822960"/>
           </a:xfrm>
           <a:prstGeom prst="rect">
             <a:avLst/>
@@ -7950,7 +7716,7 @@
               <a:buNone/>
             </a:pPr>
             <a:r>
-              <a:rPr lang="en-US" sz="2800" b="1" dirty="0">
+              <a:rPr lang="en-US" sz="2600" b="1" dirty="0">
                 <a:solidFill>
                   <a:srgbClr val="1A1A1A"/>
                 </a:solidFill>
@@ -7960,7 +7726,7 @@
               </a:rPr>
               <a:t>Should a failed artifact evaluation be able to reject a paper?</a:t>
             </a:r>
-            <a:endParaRPr lang="en-US" sz="2800" dirty="0"/>
+            <a:endParaRPr lang="en-US" sz="2600" dirty="0"/>
           </a:p>
         </p:txBody>
       </p:sp>
@@ -7972,12 +7738,12 @@
         </p:nvSpPr>
         <p:spPr>
           <a:xfrm>
-            <a:off x="640080" y="2011680"/>
-            <a:ext cx="10911535" cy="1325880"/>
+            <a:off x="640080" y="2240280"/>
+            <a:ext cx="10911535" cy="1188720"/>
           </a:xfrm>
           <a:prstGeom prst="roundRect">
             <a:avLst>
-              <a:gd name="adj" fmla="val 4138"/>
+              <a:gd name="adj" fmla="val 4615"/>
             </a:avLst>
           </a:prstGeom>
           <a:solidFill>
@@ -7999,8 +7765,8 @@
         </p:nvSpPr>
         <p:spPr>
           <a:xfrm>
-            <a:off x="914400" y="2148840"/>
-            <a:ext cx="10362895" cy="1097280"/>
+            <a:off x="914400" y="2359152"/>
+            <a:ext cx="10362895" cy="1005840"/>
           </a:xfrm>
           <a:prstGeom prst="rect">
             <a:avLst/>
@@ -8038,12 +7804,12 @@
         </p:nvSpPr>
         <p:spPr>
           <a:xfrm>
-            <a:off x="640080" y="3566160"/>
-            <a:ext cx="5318608" cy="2377440"/>
+            <a:off x="640080" y="3611880"/>
+            <a:ext cx="5318608" cy="2423160"/>
           </a:xfrm>
           <a:prstGeom prst="roundRect">
             <a:avLst>
-              <a:gd name="adj" fmla="val 2308"/>
+              <a:gd name="adj" fmla="val 2264"/>
             </a:avLst>
           </a:prstGeom>
           <a:solidFill>
@@ -8143,12 +7909,12 @@
         </p:nvSpPr>
         <p:spPr>
           <a:xfrm>
-            <a:off x="6233008" y="3566160"/>
-            <a:ext cx="5318608" cy="2377440"/>
+            <a:off x="6233008" y="3611880"/>
+            <a:ext cx="5318608" cy="2423160"/>
           </a:xfrm>
           <a:prstGeom prst="roundRect">
             <a:avLst>
-              <a:gd name="adj" fmla="val 2308"/>
+              <a:gd name="adj" fmla="val 2264"/>
             </a:avLst>
           </a:prstGeom>
           <a:solidFill>
@@ -8321,8 +8087,8 @@
         </p:nvSpPr>
         <p:spPr>
           <a:xfrm>
-            <a:off x="640080" y="411480"/>
-            <a:ext cx="10911535" cy="365760"/>
+            <a:off x="640080" y="365760"/>
+            <a:ext cx="10911535" cy="822960"/>
           </a:xfrm>
           <a:prstGeom prst="rect">
             <a:avLst/>
@@ -8331,14 +8097,14 @@
           <a:ln/>
         </p:spPr>
         <p:txBody>
-          <a:bodyPr wrap="square" lIns="0" tIns="0" rIns="0" bIns="0" rtlCol="0" anchor="t"/>
+          <a:bodyPr wrap="square" lIns="0" tIns="0" rIns="0" bIns="0" rtlCol="0" anchor="ctr"/>
           <a:lstStyle/>
           <a:p>
             <a:pPr indent="0" marL="0">
               <a:buNone/>
             </a:pPr>
             <a:r>
-              <a:rPr lang="en-US" sz="1600" b="1" spc="100" kern="0" dirty="0">
+              <a:rPr lang="en-US" sz="4000" b="1" dirty="0">
                 <a:solidFill>
                   <a:srgbClr val="00883A"/>
                 </a:solidFill>
@@ -8346,9 +8112,9 @@
                 <a:ea typeface="Arial" pitchFamily="34" charset="-122"/>
                 <a:cs typeface="Arial" pitchFamily="34" charset="-120"/>
               </a:rPr>
-              <a:t>Paper 2 · discussion</a:t>
-            </a:r>
-            <a:endParaRPr lang="en-US" sz="1600" dirty="0"/>
+              <a:t>Paper 2 · Discussion</a:t>
+            </a:r>
+            <a:endParaRPr lang="en-US" sz="4000" dirty="0"/>
           </a:p>
         </p:txBody>
       </p:sp>
@@ -8360,8 +8126,8 @@
         </p:nvSpPr>
         <p:spPr>
           <a:xfrm>
-            <a:off x="640080" y="822960"/>
-            <a:ext cx="10911535" cy="1188720"/>
+            <a:off x="640080" y="1325880"/>
+            <a:ext cx="10911535" cy="822960"/>
           </a:xfrm>
           <a:prstGeom prst="rect">
             <a:avLst/>
@@ -8377,7 +8143,7 @@
               <a:buNone/>
             </a:pPr>
             <a:r>
-              <a:rPr lang="en-US" sz="2800" b="1" dirty="0">
+              <a:rPr lang="en-US" sz="2600" b="1" dirty="0">
                 <a:solidFill>
                   <a:srgbClr val="1A1A1A"/>
                 </a:solidFill>
@@ -8387,7 +8153,7 @@
               </a:rPr>
               <a:t>Who keeps an artifact alive after the PhD?</a:t>
             </a:r>
-            <a:endParaRPr lang="en-US" sz="2800" dirty="0"/>
+            <a:endParaRPr lang="en-US" sz="2600" dirty="0"/>
           </a:p>
         </p:txBody>
       </p:sp>
@@ -8399,12 +8165,12 @@
         </p:nvSpPr>
         <p:spPr>
           <a:xfrm>
-            <a:off x="640080" y="2011680"/>
-            <a:ext cx="10911535" cy="1325880"/>
+            <a:off x="640080" y="2240280"/>
+            <a:ext cx="10911535" cy="1188720"/>
           </a:xfrm>
           <a:prstGeom prst="roundRect">
             <a:avLst>
-              <a:gd name="adj" fmla="val 4138"/>
+              <a:gd name="adj" fmla="val 4615"/>
             </a:avLst>
           </a:prstGeom>
           <a:solidFill>
@@ -8426,8 +8192,8 @@
         </p:nvSpPr>
         <p:spPr>
           <a:xfrm>
-            <a:off x="914400" y="2148840"/>
-            <a:ext cx="10362895" cy="1097280"/>
+            <a:off x="914400" y="2359152"/>
+            <a:ext cx="10362895" cy="1005840"/>
           </a:xfrm>
           <a:prstGeom prst="rect">
             <a:avLst/>
@@ -8465,12 +8231,12 @@
         </p:nvSpPr>
         <p:spPr>
           <a:xfrm>
-            <a:off x="640080" y="3566160"/>
-            <a:ext cx="5318608" cy="2377440"/>
+            <a:off x="640080" y="3611880"/>
+            <a:ext cx="5318608" cy="2423160"/>
           </a:xfrm>
           <a:prstGeom prst="roundRect">
             <a:avLst>
-              <a:gd name="adj" fmla="val 2308"/>
+              <a:gd name="adj" fmla="val 2264"/>
             </a:avLst>
           </a:prstGeom>
           <a:solidFill>
@@ -8570,12 +8336,12 @@
         </p:nvSpPr>
         <p:spPr>
           <a:xfrm>
-            <a:off x="6233008" y="3566160"/>
-            <a:ext cx="5318608" cy="2377440"/>
+            <a:off x="6233008" y="3611880"/>
+            <a:ext cx="5318608" cy="2423160"/>
           </a:xfrm>
           <a:prstGeom prst="roundRect">
             <a:avLst>
-              <a:gd name="adj" fmla="val 2308"/>
+              <a:gd name="adj" fmla="val 2264"/>
             </a:avLst>
           </a:prstGeom>
           <a:solidFill>
@@ -8748,8 +8514,8 @@
         </p:nvSpPr>
         <p:spPr>
           <a:xfrm>
-            <a:off x="640080" y="411480"/>
-            <a:ext cx="10911535" cy="365760"/>
+            <a:off x="640080" y="365760"/>
+            <a:ext cx="10911535" cy="822960"/>
           </a:xfrm>
           <a:prstGeom prst="rect">
             <a:avLst/>
@@ -8758,14 +8524,14 @@
           <a:ln/>
         </p:spPr>
         <p:txBody>
-          <a:bodyPr wrap="square" lIns="0" tIns="0" rIns="0" bIns="0" rtlCol="0" anchor="t"/>
+          <a:bodyPr wrap="square" lIns="0" tIns="0" rIns="0" bIns="0" rtlCol="0" anchor="ctr"/>
           <a:lstStyle/>
           <a:p>
             <a:pPr indent="0" marL="0">
               <a:buNone/>
             </a:pPr>
             <a:r>
-              <a:rPr lang="en-US" sz="1600" b="1" spc="100" kern="0" dirty="0">
+              <a:rPr lang="en-US" sz="4000" b="1" dirty="0">
                 <a:solidFill>
                   <a:srgbClr val="00883A"/>
                 </a:solidFill>
@@ -8773,9 +8539,9 @@
                 <a:ea typeface="Arial" pitchFamily="34" charset="-122"/>
                 <a:cs typeface="Arial" pitchFamily="34" charset="-120"/>
               </a:rPr>
-              <a:t>Paper 2 · discussion</a:t>
-            </a:r>
-            <a:endParaRPr lang="en-US" sz="1600" dirty="0"/>
+              <a:t>Paper 2 · Discussion</a:t>
+            </a:r>
+            <a:endParaRPr lang="en-US" sz="4000" dirty="0"/>
           </a:p>
         </p:txBody>
       </p:sp>
@@ -8787,8 +8553,8 @@
         </p:nvSpPr>
         <p:spPr>
           <a:xfrm>
-            <a:off x="640080" y="822960"/>
-            <a:ext cx="10911535" cy="1188720"/>
+            <a:off x="640080" y="1325880"/>
+            <a:ext cx="10911535" cy="822960"/>
           </a:xfrm>
           <a:prstGeom prst="rect">
             <a:avLst/>
@@ -8804,7 +8570,7 @@
               <a:buNone/>
             </a:pPr>
             <a:r>
-              <a:rPr lang="en-US" sz="2800" b="1" dirty="0">
+              <a:rPr lang="en-US" sz="2600" b="1" dirty="0">
                 <a:solidFill>
                   <a:srgbClr val="1A1A1A"/>
                 </a:solidFill>
@@ -8814,7 +8580,7 @@
               </a:rPr>
               <a:t>Students as artifact reviewers: training opportunity or devaluation?</a:t>
             </a:r>
-            <a:endParaRPr lang="en-US" sz="2800" dirty="0"/>
+            <a:endParaRPr lang="en-US" sz="2600" dirty="0"/>
           </a:p>
         </p:txBody>
       </p:sp>
@@ -8826,12 +8592,12 @@
         </p:nvSpPr>
         <p:spPr>
           <a:xfrm>
-            <a:off x="640080" y="2011680"/>
-            <a:ext cx="10911535" cy="1325880"/>
+            <a:off x="640080" y="2240280"/>
+            <a:ext cx="10911535" cy="1188720"/>
           </a:xfrm>
           <a:prstGeom prst="roundRect">
             <a:avLst>
-              <a:gd name="adj" fmla="val 4138"/>
+              <a:gd name="adj" fmla="val 4615"/>
             </a:avLst>
           </a:prstGeom>
           <a:solidFill>
@@ -8853,8 +8619,8 @@
         </p:nvSpPr>
         <p:spPr>
           <a:xfrm>
-            <a:off x="914400" y="2148840"/>
-            <a:ext cx="10362895" cy="1097280"/>
+            <a:off x="914400" y="2359152"/>
+            <a:ext cx="10362895" cy="1005840"/>
           </a:xfrm>
           <a:prstGeom prst="rect">
             <a:avLst/>
@@ -8892,12 +8658,12 @@
         </p:nvSpPr>
         <p:spPr>
           <a:xfrm>
-            <a:off x="640080" y="3566160"/>
-            <a:ext cx="5318608" cy="2377440"/>
+            <a:off x="640080" y="3611880"/>
+            <a:ext cx="5318608" cy="2423160"/>
           </a:xfrm>
           <a:prstGeom prst="roundRect">
             <a:avLst>
-              <a:gd name="adj" fmla="val 2308"/>
+              <a:gd name="adj" fmla="val 2264"/>
             </a:avLst>
           </a:prstGeom>
           <a:solidFill>
@@ -8997,12 +8763,12 @@
         </p:nvSpPr>
         <p:spPr>
           <a:xfrm>
-            <a:off x="6233008" y="3566160"/>
-            <a:ext cx="5318608" cy="2377440"/>
+            <a:off x="6233008" y="3611880"/>
+            <a:ext cx="5318608" cy="2423160"/>
           </a:xfrm>
           <a:prstGeom prst="roundRect">
             <a:avLst>
-              <a:gd name="adj" fmla="val 2308"/>
+              <a:gd name="adj" fmla="val 2264"/>
             </a:avLst>
           </a:prstGeom>
           <a:solidFill>
@@ -9200,7 +8966,7 @@
                 <a:ea typeface="Arial" pitchFamily="34" charset="-122"/>
                 <a:cs typeface="Arial" pitchFamily="34" charset="-120"/>
               </a:rPr>
-              <a:t>Cross comparison</a:t>
+              <a:t>Cross Comparison</a:t>
             </a:r>
             <a:endParaRPr lang="en-US" sz="4800" dirty="0"/>
           </a:p>
@@ -9230,17 +8996,6 @@
             <a:pPr indent="0" marL="0">
               <a:buNone/>
             </a:pPr>
-            <a:r>
-              <a:rPr lang="en-US" sz="2000" dirty="0">
-                <a:solidFill>
-                  <a:srgbClr val="E3F1E8"/>
-                </a:solidFill>
-                <a:latin typeface="Arial" pitchFamily="34" charset="0"/>
-                <a:ea typeface="Arial" pitchFamily="34" charset="-122"/>
-                <a:cs typeface="Arial" pitchFamily="34" charset="-120"/>
-              </a:rPr>
-              <a:t>Similarities and differences</a:t>
-            </a:r>
             <a:endParaRPr lang="en-US" sz="2000" dirty="0"/>
           </a:p>
         </p:txBody>
@@ -9278,8 +9033,8 @@
         </p:nvSpPr>
         <p:spPr>
           <a:xfrm>
-            <a:off x="640080" y="411480"/>
-            <a:ext cx="10911535" cy="365760"/>
+            <a:off x="640080" y="365760"/>
+            <a:ext cx="10911535" cy="822960"/>
           </a:xfrm>
           <a:prstGeom prst="rect">
             <a:avLst/>
@@ -9288,14 +9043,14 @@
           <a:ln/>
         </p:spPr>
         <p:txBody>
-          <a:bodyPr wrap="square" lIns="0" tIns="0" rIns="0" bIns="0" rtlCol="0" anchor="t"/>
+          <a:bodyPr wrap="square" lIns="0" tIns="0" rIns="0" bIns="0" rtlCol="0" anchor="ctr"/>
           <a:lstStyle/>
           <a:p>
             <a:pPr indent="0" marL="0">
               <a:buNone/>
             </a:pPr>
             <a:r>
-              <a:rPr lang="en-US" sz="1600" b="1" spc="100" kern="0" dirty="0">
+              <a:rPr lang="en-US" sz="4000" b="1" dirty="0">
                 <a:solidFill>
                   <a:srgbClr val="00883A"/>
                 </a:solidFill>
@@ -9303,48 +9058,9 @@
                 <a:ea typeface="Arial" pitchFamily="34" charset="-122"/>
                 <a:cs typeface="Arial" pitchFamily="34" charset="-120"/>
               </a:rPr>
-              <a:t>Cross comparison</a:t>
-            </a:r>
-            <a:endParaRPr lang="en-US" sz="1600" dirty="0"/>
-          </a:p>
-        </p:txBody>
-      </p:sp>
-      <p:sp>
-        <p:nvSpPr>
-          <p:cNvPr id="3" name="Text 1"/>
-          <p:cNvSpPr txBox="1"/>
-          <p:nvPr/>
-        </p:nvSpPr>
-        <p:spPr>
-          <a:xfrm>
-            <a:off x="640080" y="822960"/>
-            <a:ext cx="10911535" cy="1188720"/>
-          </a:xfrm>
-          <a:prstGeom prst="rect">
-            <a:avLst/>
-          </a:prstGeom>
-          <a:noFill/>
-          <a:ln/>
-        </p:spPr>
-        <p:txBody>
-          <a:bodyPr wrap="square" lIns="0" tIns="0" rIns="0" bIns="0" rtlCol="0" anchor="t"/>
-          <a:lstStyle/>
-          <a:p>
-            <a:pPr indent="0" marL="0">
-              <a:buNone/>
-            </a:pPr>
-            <a:r>
-              <a:rPr lang="en-US" sz="2800" b="1" dirty="0">
-                <a:solidFill>
-                  <a:srgbClr val="1A1A1A"/>
-                </a:solidFill>
-                <a:latin typeface="Arial" pitchFamily="34" charset="0"/>
-                <a:ea typeface="Arial" pitchFamily="34" charset="-122"/>
-                <a:cs typeface="Arial" pitchFamily="34" charset="-120"/>
-              </a:rPr>
-              <a:t>Same problem, asked from opposite sides</a:t>
-            </a:r>
-            <a:endParaRPr lang="en-US" sz="2800" dirty="0"/>
+              <a:t>Cross Comparison: Differences</a:t>
+            </a:r>
+            <a:endParaRPr lang="en-US" sz="4000" dirty="0"/>
           </a:p>
         </p:txBody>
       </p:sp>
@@ -9363,7 +9079,7 @@
           </p:nvPr>
         </p:nvGraphicFramePr>
         <p:xfrm>
-          <a:off x="640080" y="2103120"/>
+          <a:off x="640080" y="1554480"/>
           <a:ext cx="10911535" cy="914400"/>
         </p:xfrm>
         <a:graphic>
@@ -9375,7 +9091,7 @@
                 <a:gridCol w="3637178"/>
                 <a:gridCol w="3637178"/>
               </a:tblGrid>
-              <a:tr h="566928">
+              <a:tr h="640080">
                 <a:tc>
                   <a:txBody>
                     <a:bodyPr/>
@@ -9384,7 +9100,7 @@
                       <a:pPr indent="0" marL="0">
                         <a:buNone/>
                       </a:pPr>
-                      <a:endParaRPr lang="en-US" sz="1800" dirty="0">
+                      <a:endParaRPr lang="en-US" sz="2000" dirty="0">
                         <a:latin typeface="Arial" charset="0"/>
                         <a:ea typeface="Arial" charset="0"/>
                         <a:cs typeface="Arial" charset="0"/>
@@ -9442,7 +9158,7 @@
                         <a:buNone/>
                       </a:pPr>
                       <a:r>
-                        <a:rPr lang="en-US" sz="1800" b="1" dirty="0">
+                        <a:rPr lang="en-US" sz="2000" b="1" dirty="0">
                           <a:solidFill>
                             <a:srgbClr val="FFFFFF"/>
                           </a:solidFill>
@@ -9452,7 +9168,7 @@
                         </a:rPr>
                         <a:t>Hermann et al.</a:t>
                       </a:r>
-                      <a:endParaRPr lang="en-US" sz="1800" dirty="0">
+                      <a:endParaRPr lang="en-US" sz="2000" dirty="0">
                         <a:latin typeface="Arial" charset="0"/>
                         <a:ea typeface="Arial" charset="0"/>
                         <a:cs typeface="Arial" charset="0"/>
@@ -9510,7 +9226,7 @@
                         <a:buNone/>
                       </a:pPr>
                       <a:r>
-                        <a:rPr lang="en-US" sz="1800" b="1" dirty="0">
+                        <a:rPr lang="en-US" sz="2000" b="1" dirty="0">
                           <a:solidFill>
                             <a:srgbClr val="FFFFFF"/>
                           </a:solidFill>
@@ -9520,7 +9236,7 @@
                         </a:rPr>
                         <a:t>Timperley et al.</a:t>
                       </a:r>
-                      <a:endParaRPr lang="en-US" sz="1800" dirty="0">
+                      <a:endParaRPr lang="en-US" sz="2000" dirty="0">
                         <a:latin typeface="Arial" charset="0"/>
                         <a:ea typeface="Arial" charset="0"/>
                         <a:cs typeface="Arial" charset="0"/>
@@ -9570,7 +9286,7 @@
                   </a:tcPr>
                 </a:tc>
               </a:tr>
-              <a:tr h="566928">
+              <a:tr h="640080">
                 <a:tc>
                   <a:txBody>
                     <a:bodyPr/>
@@ -9580,7 +9296,7 @@
                         <a:buNone/>
                       </a:pPr>
                       <a:r>
-                        <a:rPr lang="en-US" sz="1800" b="1" dirty="0">
+                        <a:rPr lang="en-US" sz="2000" b="1" dirty="0">
                           <a:solidFill>
                             <a:srgbClr val="1A1A1A"/>
                           </a:solidFill>
@@ -9590,7 +9306,7 @@
                         </a:rPr>
                         <a:t>Asked</a:t>
                       </a:r>
-                      <a:endParaRPr lang="en-US" sz="1800" dirty="0">
+                      <a:endParaRPr lang="en-US" sz="2000" dirty="0">
                         <a:latin typeface="Arial" charset="0"/>
                         <a:ea typeface="Arial" charset="0"/>
                         <a:cs typeface="Arial" charset="0"/>
@@ -9648,7 +9364,7 @@
                         <a:buNone/>
                       </a:pPr>
                       <a:r>
-                        <a:rPr lang="en-US" sz="1800" dirty="0">
+                        <a:rPr lang="en-US" sz="2000" dirty="0">
                           <a:solidFill>
                             <a:srgbClr val="1A1A1A"/>
                           </a:solidFill>
@@ -9658,7 +9374,7 @@
                         </a:rPr>
                         <a:t>Reviewers (AEC members)</a:t>
                       </a:r>
-                      <a:endParaRPr lang="en-US" sz="1800" dirty="0">
+                      <a:endParaRPr lang="en-US" sz="2000" dirty="0">
                         <a:latin typeface="Arial" charset="0"/>
                         <a:ea typeface="Arial" charset="0"/>
                         <a:cs typeface="Arial" charset="0"/>
@@ -9716,7 +9432,7 @@
                         <a:buNone/>
                       </a:pPr>
                       <a:r>
-                        <a:rPr lang="en-US" sz="1800" dirty="0">
+                        <a:rPr lang="en-US" sz="2000" dirty="0">
                           <a:solidFill>
                             <a:srgbClr val="1A1A1A"/>
                           </a:solidFill>
@@ -9726,7 +9442,7 @@
                         </a:rPr>
                         <a:t>Authors (few reviewers)</a:t>
                       </a:r>
-                      <a:endParaRPr lang="en-US" sz="1800" dirty="0">
+                      <a:endParaRPr lang="en-US" sz="2000" dirty="0">
                         <a:latin typeface="Arial" charset="0"/>
                         <a:ea typeface="Arial" charset="0"/>
                         <a:cs typeface="Arial" charset="0"/>
@@ -9776,7 +9492,7 @@
                   </a:tcPr>
                 </a:tc>
               </a:tr>
-              <a:tr h="566928">
+              <a:tr h="640080">
                 <a:tc>
                   <a:txBody>
                     <a:bodyPr/>
@@ -9786,7 +9502,7 @@
                         <a:buNone/>
                       </a:pPr>
                       <a:r>
-                        <a:rPr lang="en-US" sz="1800" b="1" dirty="0">
+                        <a:rPr lang="en-US" sz="2000" b="1" dirty="0">
                           <a:solidFill>
                             <a:srgbClr val="1A1A1A"/>
                           </a:solidFill>
@@ -9796,7 +9512,7 @@
                         </a:rPr>
                         <a:t>Field</a:t>
                       </a:r>
-                      <a:endParaRPr lang="en-US" sz="1800" dirty="0">
+                      <a:endParaRPr lang="en-US" sz="2000" dirty="0">
                         <a:latin typeface="Arial" charset="0"/>
                         <a:ea typeface="Arial" charset="0"/>
                         <a:cs typeface="Arial" charset="0"/>
@@ -9854,7 +9570,7 @@
                         <a:buNone/>
                       </a:pPr>
                       <a:r>
-                        <a:rPr lang="en-US" sz="1800" dirty="0">
+                        <a:rPr lang="en-US" sz="2000" dirty="0">
                           <a:solidFill>
                             <a:srgbClr val="1A1A1A"/>
                           </a:solidFill>
@@ -9864,7 +9580,7 @@
                         </a:rPr>
                         <a:t>SE and programming languages</a:t>
                       </a:r>
-                      <a:endParaRPr lang="en-US" sz="1800" dirty="0">
+                      <a:endParaRPr lang="en-US" sz="2000" dirty="0">
                         <a:latin typeface="Arial" charset="0"/>
                         <a:ea typeface="Arial" charset="0"/>
                         <a:cs typeface="Arial" charset="0"/>
@@ -9922,7 +9638,7 @@
                         <a:buNone/>
                       </a:pPr>
                       <a:r>
-                        <a:rPr lang="en-US" sz="1800" dirty="0">
+                        <a:rPr lang="en-US" sz="2000" dirty="0">
                           <a:solidFill>
                             <a:srgbClr val="1A1A1A"/>
                           </a:solidFill>
@@ -9932,7 +9648,7 @@
                         </a:rPr>
                         <a:t>SE only</a:t>
                       </a:r>
-                      <a:endParaRPr lang="en-US" sz="1800" dirty="0">
+                      <a:endParaRPr lang="en-US" sz="2000" dirty="0">
                         <a:latin typeface="Arial" charset="0"/>
                         <a:ea typeface="Arial" charset="0"/>
                         <a:cs typeface="Arial" charset="0"/>
@@ -9982,7 +9698,7 @@
                   </a:tcPr>
                 </a:tc>
               </a:tr>
-              <a:tr h="566928">
+              <a:tr h="640080">
                 <a:tc>
                   <a:txBody>
                     <a:bodyPr/>
@@ -9992,7 +9708,7 @@
                         <a:buNone/>
                       </a:pPr>
                       <a:r>
-                        <a:rPr lang="en-US" sz="1800" b="1" dirty="0">
+                        <a:rPr lang="en-US" sz="2000" b="1" dirty="0">
                           <a:solidFill>
                             <a:srgbClr val="1A1A1A"/>
                           </a:solidFill>
@@ -10002,7 +9718,7 @@
                         </a:rPr>
                         <a:t>Diagnosis</a:t>
                       </a:r>
-                      <a:endParaRPr lang="en-US" sz="1800" dirty="0">
+                      <a:endParaRPr lang="en-US" sz="2000" dirty="0">
                         <a:latin typeface="Arial" charset="0"/>
                         <a:ea typeface="Arial" charset="0"/>
                         <a:cs typeface="Arial" charset="0"/>
@@ -10060,7 +9776,7 @@
                         <a:buNone/>
                       </a:pPr>
                       <a:r>
-                        <a:rPr lang="en-US" sz="1800" dirty="0">
+                        <a:rPr lang="en-US" sz="2000" dirty="0">
                           <a:solidFill>
                             <a:srgbClr val="1A1A1A"/>
                           </a:solidFill>
@@ -10070,7 +9786,7 @@
                         </a:rPr>
                         <a:t>Unclear purpose and standards</a:t>
                       </a:r>
-                      <a:endParaRPr lang="en-US" sz="1800" dirty="0">
+                      <a:endParaRPr lang="en-US" sz="2000" dirty="0">
                         <a:latin typeface="Arial" charset="0"/>
                         <a:ea typeface="Arial" charset="0"/>
                         <a:cs typeface="Arial" charset="0"/>
@@ -10128,7 +9844,7 @@
                         <a:buNone/>
                       </a:pPr>
                       <a:r>
-                        <a:rPr lang="en-US" sz="1800" dirty="0">
+                        <a:rPr lang="en-US" sz="2000" dirty="0">
                           <a:solidFill>
                             <a:srgbClr val="1A1A1A"/>
                           </a:solidFill>
@@ -10138,7 +9854,7 @@
                         </a:rPr>
                         <a:t>Misaligned incentives</a:t>
                       </a:r>
-                      <a:endParaRPr lang="en-US" sz="1800" dirty="0">
+                      <a:endParaRPr lang="en-US" sz="2000" dirty="0">
                         <a:latin typeface="Arial" charset="0"/>
                         <a:ea typeface="Arial" charset="0"/>
                         <a:cs typeface="Arial" charset="0"/>
@@ -10188,7 +9904,7 @@
                   </a:tcPr>
                 </a:tc>
               </a:tr>
-              <a:tr h="566928">
+              <a:tr h="640080">
                 <a:tc>
                   <a:txBody>
                     <a:bodyPr/>
@@ -10198,7 +9914,7 @@
                         <a:buNone/>
                       </a:pPr>
                       <a:r>
-                        <a:rPr lang="en-US" sz="1800" b="1" dirty="0">
+                        <a:rPr lang="en-US" sz="2000" b="1" dirty="0">
                           <a:solidFill>
                             <a:srgbClr val="1A1A1A"/>
                           </a:solidFill>
@@ -10208,7 +9924,7 @@
                         </a:rPr>
                         <a:t>Proposal</a:t>
                       </a:r>
-                      <a:endParaRPr lang="en-US" sz="1800" dirty="0">
+                      <a:endParaRPr lang="en-US" sz="2000" dirty="0">
                         <a:latin typeface="Arial" charset="0"/>
                         <a:ea typeface="Arial" charset="0"/>
                         <a:cs typeface="Arial" charset="0"/>
@@ -10266,7 +9982,7 @@
                         <a:buNone/>
                       </a:pPr>
                       <a:r>
-                        <a:rPr lang="en-US" sz="1800" dirty="0">
+                        <a:rPr lang="en-US" sz="2000" dirty="0">
                           <a:solidFill>
                             <a:srgbClr val="1A1A1A"/>
                           </a:solidFill>
@@ -10276,7 +9992,7 @@
                         </a:rPr>
                         <a:t>Standards per community in the calls</a:t>
                       </a:r>
-                      <a:endParaRPr lang="en-US" sz="1800" dirty="0">
+                      <a:endParaRPr lang="en-US" sz="2000" dirty="0">
                         <a:latin typeface="Arial" charset="0"/>
                         <a:ea typeface="Arial" charset="0"/>
                         <a:cs typeface="Arial" charset="0"/>
@@ -10334,7 +10050,7 @@
                         <a:buNone/>
                       </a:pPr>
                       <a:r>
-                        <a:rPr lang="en-US" sz="1800" dirty="0">
+                        <a:rPr lang="en-US" sz="2000" dirty="0">
                           <a:solidFill>
                             <a:srgbClr val="1A1A1A"/>
                           </a:solidFill>
@@ -10344,7 +10060,7 @@
                         </a:rPr>
                         <a:t>R1–R8 for each group</a:t>
                       </a:r>
-                      <a:endParaRPr lang="en-US" sz="1800" dirty="0">
+                      <a:endParaRPr lang="en-US" sz="2000" dirty="0">
                         <a:latin typeface="Arial" charset="0"/>
                         <a:ea typeface="Arial" charset="0"/>
                         <a:cs typeface="Arial" charset="0"/>
@@ -10400,14 +10116,14 @@
       </p:graphicFrame>
       <p:sp>
         <p:nvSpPr>
-          <p:cNvPr id="5" name="Text 2"/>
+          <p:cNvPr id="4" name="Text 1"/>
           <p:cNvSpPr txBox="1"/>
           <p:nvPr/>
         </p:nvSpPr>
         <p:spPr>
           <a:xfrm>
-            <a:off x="640080" y="5257800"/>
-            <a:ext cx="10911535" cy="822960"/>
+            <a:off x="640080" y="5074920"/>
+            <a:ext cx="10911535" cy="914400"/>
           </a:xfrm>
           <a:prstGeom prst="rect">
             <a:avLst/>
@@ -10423,7 +10139,7 @@
               <a:buNone/>
             </a:pPr>
             <a:r>
-              <a:rPr lang="en-US" sz="1600" dirty="0">
+              <a:rPr lang="en-US" sz="1800" dirty="0">
                 <a:solidFill>
                   <a:srgbClr val="5F6368"/>
                 </a:solidFill>
@@ -10433,7 +10149,7 @@
               </a:rPr>
               <a:t>Timperley et al. build three recommendations on Hermann et al.</a:t>
             </a:r>
-            <a:endParaRPr lang="en-US" sz="1600" dirty="0"/>
+            <a:endParaRPr lang="en-US" sz="1800" dirty="0"/>
           </a:p>
         </p:txBody>
       </p:sp>
@@ -10518,8 +10234,8 @@
         </p:nvSpPr>
         <p:spPr>
           <a:xfrm>
-            <a:off x="640080" y="411480"/>
-            <a:ext cx="10911535" cy="365760"/>
+            <a:off x="640080" y="365760"/>
+            <a:ext cx="10911535" cy="822960"/>
           </a:xfrm>
           <a:prstGeom prst="rect">
             <a:avLst/>
@@ -10528,14 +10244,14 @@
           <a:ln/>
         </p:spPr>
         <p:txBody>
-          <a:bodyPr wrap="square" lIns="0" tIns="0" rIns="0" bIns="0" rtlCol="0" anchor="t"/>
+          <a:bodyPr wrap="square" lIns="0" tIns="0" rIns="0" bIns="0" rtlCol="0" anchor="ctr"/>
           <a:lstStyle/>
           <a:p>
             <a:pPr indent="0" marL="0">
               <a:buNone/>
             </a:pPr>
             <a:r>
-              <a:rPr lang="en-US" sz="1600" b="1" spc="100" kern="0" dirty="0">
+              <a:rPr lang="en-US" sz="4000" b="1" dirty="0">
                 <a:solidFill>
                   <a:srgbClr val="00883A"/>
                 </a:solidFill>
@@ -10543,9 +10259,9 @@
                 <a:ea typeface="Arial" pitchFamily="34" charset="-122"/>
                 <a:cs typeface="Arial" pitchFamily="34" charset="-120"/>
               </a:rPr>
-              <a:t>Similarities</a:t>
-            </a:r>
-            <a:endParaRPr lang="en-US" sz="1600" dirty="0"/>
+              <a:t>Cross Comparison: Similarities</a:t>
+            </a:r>
+            <a:endParaRPr lang="en-US" sz="4000" dirty="0"/>
           </a:p>
         </p:txBody>
       </p:sp>
@@ -10557,47 +10273,8 @@
         </p:nvSpPr>
         <p:spPr>
           <a:xfrm>
-            <a:off x="640080" y="822960"/>
-            <a:ext cx="10911535" cy="1188720"/>
-          </a:xfrm>
-          <a:prstGeom prst="rect">
-            <a:avLst/>
-          </a:prstGeom>
-          <a:noFill/>
-          <a:ln/>
-        </p:spPr>
-        <p:txBody>
-          <a:bodyPr wrap="square" lIns="0" tIns="0" rIns="0" bIns="0" rtlCol="0" anchor="t"/>
-          <a:lstStyle/>
-          <a:p>
-            <a:pPr indent="0" marL="0">
-              <a:buNone/>
-            </a:pPr>
-            <a:r>
-              <a:rPr lang="en-US" sz="2800" b="1" dirty="0">
-                <a:solidFill>
-                  <a:srgbClr val="1A1A1A"/>
-                </a:solidFill>
-                <a:latin typeface="Arial" pitchFamily="34" charset="0"/>
-                <a:ea typeface="Arial" pitchFamily="34" charset="-122"/>
-                <a:cs typeface="Arial" pitchFamily="34" charset="-120"/>
-              </a:rPr>
-              <a:t>Both see a missing standard and want artifacts to count for acceptance</a:t>
-            </a:r>
-            <a:endParaRPr lang="en-US" sz="2800" dirty="0"/>
-          </a:p>
-        </p:txBody>
-      </p:sp>
-      <p:sp>
-        <p:nvSpPr>
-          <p:cNvPr id="4" name="Text 2"/>
-          <p:cNvSpPr txBox="1"/>
-          <p:nvPr/>
-        </p:nvSpPr>
-        <p:spPr>
-          <a:xfrm>
-            <a:off x="640080" y="2103120"/>
-            <a:ext cx="10911535" cy="4114800"/>
+            <a:off x="640080" y="1463040"/>
+            <a:ext cx="10911535" cy="4754880"/>
           </a:xfrm>
           <a:prstGeom prst="rect">
             <a:avLst/>
@@ -10617,7 +10294,7 @@
               <a:buChar char="•"/>
             </a:pPr>
             <a:r>
-              <a:rPr lang="en-US" sz="2000" dirty="0">
+              <a:rPr lang="en-US" sz="2200" dirty="0">
                 <a:solidFill>
                   <a:srgbClr val="1A1A1A"/>
                 </a:solidFill>
@@ -10627,7 +10304,7 @@
               </a:rPr>
               <a:t>No agreed quality threshold (Hermann p. 478; Timperley C6, p. 16)</a:t>
             </a:r>
-            <a:endParaRPr lang="en-US" sz="2000" dirty="0"/>
+            <a:endParaRPr lang="en-US" sz="2200" dirty="0"/>
           </a:p>
           <a:p>
             <a:pPr marL="279400" indent="-279400">
@@ -10638,7 +10315,7 @@
               <a:buChar char="•"/>
             </a:pPr>
             <a:r>
-              <a:rPr lang="en-US" sz="2000" dirty="0">
+              <a:rPr lang="en-US" sz="2200" dirty="0">
                 <a:solidFill>
                   <a:srgbClr val="1A1A1A"/>
                 </a:solidFill>
@@ -10648,7 +10325,7 @@
               </a:rPr>
               <a:t>Reviewers are inexperienced and under-rewarded</a:t>
             </a:r>
-            <a:endParaRPr lang="en-US" sz="2000" dirty="0"/>
+            <a:endParaRPr lang="en-US" sz="2200" dirty="0"/>
           </a:p>
           <a:p>
             <a:pPr marL="279400" indent="-279400">
@@ -10659,7 +10336,7 @@
               <a:buChar char="•"/>
             </a:pPr>
             <a:r>
-              <a:rPr lang="en-US" sz="2000" dirty="0">
+              <a:rPr lang="en-US" sz="2200" dirty="0">
                 <a:solidFill>
                   <a:srgbClr val="1A1A1A"/>
                 </a:solidFill>
@@ -10669,7 +10346,7 @@
               </a:rPr>
               <a:t>Both lean towards coupling AE to paper acceptance</a:t>
             </a:r>
-            <a:endParaRPr lang="en-US" sz="2000" dirty="0"/>
+            <a:endParaRPr lang="en-US" sz="2200" dirty="0"/>
           </a:p>
           <a:p>
             <a:pPr marL="279400" indent="-279400">
@@ -10680,7 +10357,7 @@
               <a:buChar char="•"/>
             </a:pPr>
             <a:r>
-              <a:rPr lang="en-US" sz="2000" dirty="0">
+              <a:rPr lang="en-US" sz="2200" dirty="0">
                 <a:solidFill>
                   <a:srgbClr val="1A1A1A"/>
                 </a:solidFill>
@@ -10690,7 +10367,7 @@
               </a:rPr>
               <a:t>Neither opens an artifact or tests whether badges mean better artifacts</a:t>
             </a:r>
-            <a:endParaRPr lang="en-US" sz="2000" dirty="0"/>
+            <a:endParaRPr lang="en-US" sz="2200" dirty="0"/>
           </a:p>
         </p:txBody>
       </p:sp>
@@ -10775,8 +10452,8 @@
         </p:nvSpPr>
         <p:spPr>
           <a:xfrm>
-            <a:off x="640080" y="411480"/>
-            <a:ext cx="10911535" cy="365760"/>
+            <a:off x="640080" y="365760"/>
+            <a:ext cx="10911535" cy="822960"/>
           </a:xfrm>
           <a:prstGeom prst="rect">
             <a:avLst/>
@@ -10785,14 +10462,14 @@
           <a:ln/>
         </p:spPr>
         <p:txBody>
-          <a:bodyPr wrap="square" lIns="0" tIns="0" rIns="0" bIns="0" rtlCol="0" anchor="t"/>
+          <a:bodyPr wrap="square" lIns="0" tIns="0" rIns="0" bIns="0" rtlCol="0" anchor="ctr"/>
           <a:lstStyle/>
           <a:p>
             <a:pPr indent="0" marL="0">
               <a:buNone/>
             </a:pPr>
             <a:r>
-              <a:rPr lang="en-US" sz="1600" b="1" spc="100" kern="0" dirty="0">
+              <a:rPr lang="en-US" sz="4000" b="1" dirty="0">
                 <a:solidFill>
                   <a:srgbClr val="00883A"/>
                 </a:solidFill>
@@ -10800,9 +10477,9 @@
                 <a:ea typeface="Arial" pitchFamily="34" charset="-122"/>
                 <a:cs typeface="Arial" pitchFamily="34" charset="-120"/>
               </a:rPr>
-              <a:t>Discussion: what do you agree with?</a:t>
-            </a:r>
-            <a:endParaRPr lang="en-US" sz="1600" dirty="0"/>
+              <a:t>Discussion: What Do You Agree With?</a:t>
+            </a:r>
+            <a:endParaRPr lang="en-US" sz="4000" dirty="0"/>
           </a:p>
         </p:txBody>
       </p:sp>
@@ -10814,8 +10491,8 @@
         </p:nvSpPr>
         <p:spPr>
           <a:xfrm>
-            <a:off x="640080" y="822960"/>
-            <a:ext cx="10911535" cy="1188720"/>
+            <a:off x="640080" y="1325880"/>
+            <a:ext cx="10911535" cy="822960"/>
           </a:xfrm>
           <a:prstGeom prst="rect">
             <a:avLst/>
@@ -10831,7 +10508,7 @@
               <a:buNone/>
             </a:pPr>
             <a:r>
-              <a:rPr lang="en-US" sz="2800" b="1" dirty="0">
+              <a:rPr lang="en-US" sz="2600" b="1" dirty="0">
                 <a:solidFill>
                   <a:srgbClr val="1A1A1A"/>
                 </a:solidFill>
@@ -10841,7 +10518,7 @@
               </a:rPr>
               <a:t>Fix the definitions first, or the incentives?</a:t>
             </a:r>
-            <a:endParaRPr lang="en-US" sz="2800" dirty="0"/>
+            <a:endParaRPr lang="en-US" sz="2600" dirty="0"/>
           </a:p>
         </p:txBody>
       </p:sp>
@@ -10853,12 +10530,12 @@
         </p:nvSpPr>
         <p:spPr>
           <a:xfrm>
-            <a:off x="640080" y="2011680"/>
-            <a:ext cx="10911535" cy="1325880"/>
+            <a:off x="640080" y="2240280"/>
+            <a:ext cx="10911535" cy="1188720"/>
           </a:xfrm>
           <a:prstGeom prst="roundRect">
             <a:avLst>
-              <a:gd name="adj" fmla="val 4138"/>
+              <a:gd name="adj" fmla="val 4615"/>
             </a:avLst>
           </a:prstGeom>
           <a:solidFill>
@@ -10880,8 +10557,8 @@
         </p:nvSpPr>
         <p:spPr>
           <a:xfrm>
-            <a:off x="914400" y="2148840"/>
-            <a:ext cx="10362895" cy="1097280"/>
+            <a:off x="914400" y="2359152"/>
+            <a:ext cx="10362895" cy="1005840"/>
           </a:xfrm>
           <a:prstGeom prst="rect">
             <a:avLst/>
@@ -10919,12 +10596,12 @@
         </p:nvSpPr>
         <p:spPr>
           <a:xfrm>
-            <a:off x="640080" y="3566160"/>
-            <a:ext cx="5318608" cy="2377440"/>
+            <a:off x="640080" y="3611880"/>
+            <a:ext cx="5318608" cy="2423160"/>
           </a:xfrm>
           <a:prstGeom prst="roundRect">
             <a:avLst>
-              <a:gd name="adj" fmla="val 2308"/>
+              <a:gd name="adj" fmla="val 2264"/>
             </a:avLst>
           </a:prstGeom>
           <a:solidFill>
@@ -11024,12 +10701,12 @@
         </p:nvSpPr>
         <p:spPr>
           <a:xfrm>
-            <a:off x="6233008" y="3566160"/>
-            <a:ext cx="5318608" cy="2377440"/>
+            <a:off x="6233008" y="3611880"/>
+            <a:ext cx="5318608" cy="2423160"/>
           </a:xfrm>
           <a:prstGeom prst="roundRect">
             <a:avLst>
-              <a:gd name="adj" fmla="val 2308"/>
+              <a:gd name="adj" fmla="val 2264"/>
             </a:avLst>
           </a:prstGeom>
           <a:solidFill>
@@ -11202,8 +10879,8 @@
         </p:nvSpPr>
         <p:spPr>
           <a:xfrm>
-            <a:off x="640080" y="411480"/>
-            <a:ext cx="10911535" cy="365760"/>
+            <a:off x="640080" y="365760"/>
+            <a:ext cx="10911535" cy="822960"/>
           </a:xfrm>
           <a:prstGeom prst="rect">
             <a:avLst/>
@@ -11212,14 +10889,14 @@
           <a:ln/>
         </p:spPr>
         <p:txBody>
-          <a:bodyPr wrap="square" lIns="0" tIns="0" rIns="0" bIns="0" rtlCol="0" anchor="t"/>
+          <a:bodyPr wrap="square" lIns="0" tIns="0" rIns="0" bIns="0" rtlCol="0" anchor="ctr"/>
           <a:lstStyle/>
           <a:p>
             <a:pPr indent="0" marL="0">
               <a:buNone/>
             </a:pPr>
             <a:r>
-              <a:rPr lang="en-US" sz="1600" b="1" spc="100" kern="0" dirty="0">
+              <a:rPr lang="en-US" sz="4000" b="1" dirty="0">
                 <a:solidFill>
                   <a:srgbClr val="00883A"/>
                 </a:solidFill>
@@ -11227,9 +10904,9 @@
                 <a:ea typeface="Arial" pitchFamily="34" charset="-122"/>
                 <a:cs typeface="Arial" pitchFamily="34" charset="-120"/>
               </a:rPr>
-              <a:t>Discussion: what do you agree with?</a:t>
-            </a:r>
-            <a:endParaRPr lang="en-US" sz="1600" dirty="0"/>
+              <a:t>Discussion: What Do You Agree With?</a:t>
+            </a:r>
+            <a:endParaRPr lang="en-US" sz="4000" dirty="0"/>
           </a:p>
         </p:txBody>
       </p:sp>
@@ -11241,8 +10918,8 @@
         </p:nvSpPr>
         <p:spPr>
           <a:xfrm>
-            <a:off x="640080" y="822960"/>
-            <a:ext cx="10911535" cy="1188720"/>
+            <a:off x="640080" y="1325880"/>
+            <a:ext cx="10911535" cy="822960"/>
           </a:xfrm>
           <a:prstGeom prst="rect">
             <a:avLst/>
@@ -11258,7 +10935,7 @@
               <a:buNone/>
             </a:pPr>
             <a:r>
-              <a:rPr lang="en-US" sz="2800" b="1" dirty="0">
+              <a:rPr lang="en-US" sz="2600" b="1" dirty="0">
                 <a:solidFill>
                   <a:srgbClr val="1A1A1A"/>
                 </a:solidFill>
@@ -11268,7 +10945,7 @@
               </a:rPr>
               <a:t>Run the authors' scripts, or try to break them?</a:t>
             </a:r>
-            <a:endParaRPr lang="en-US" sz="2800" dirty="0"/>
+            <a:endParaRPr lang="en-US" sz="2600" dirty="0"/>
           </a:p>
         </p:txBody>
       </p:sp>
@@ -11280,12 +10957,12 @@
         </p:nvSpPr>
         <p:spPr>
           <a:xfrm>
-            <a:off x="640080" y="2011680"/>
-            <a:ext cx="10911535" cy="1325880"/>
+            <a:off x="640080" y="2240280"/>
+            <a:ext cx="10911535" cy="1188720"/>
           </a:xfrm>
           <a:prstGeom prst="roundRect">
             <a:avLst>
-              <a:gd name="adj" fmla="val 4138"/>
+              <a:gd name="adj" fmla="val 4615"/>
             </a:avLst>
           </a:prstGeom>
           <a:solidFill>
@@ -11307,8 +10984,8 @@
         </p:nvSpPr>
         <p:spPr>
           <a:xfrm>
-            <a:off x="914400" y="2148840"/>
-            <a:ext cx="10362895" cy="1097280"/>
+            <a:off x="914400" y="2359152"/>
+            <a:ext cx="10362895" cy="1005840"/>
           </a:xfrm>
           <a:prstGeom prst="rect">
             <a:avLst/>
@@ -11346,12 +11023,12 @@
         </p:nvSpPr>
         <p:spPr>
           <a:xfrm>
-            <a:off x="640080" y="3566160"/>
-            <a:ext cx="5318608" cy="2377440"/>
+            <a:off x="640080" y="3611880"/>
+            <a:ext cx="5318608" cy="2423160"/>
           </a:xfrm>
           <a:prstGeom prst="roundRect">
             <a:avLst>
-              <a:gd name="adj" fmla="val 2308"/>
+              <a:gd name="adj" fmla="val 2264"/>
             </a:avLst>
           </a:prstGeom>
           <a:solidFill>
@@ -11451,12 +11128,12 @@
         </p:nvSpPr>
         <p:spPr>
           <a:xfrm>
-            <a:off x="6233008" y="3566160"/>
-            <a:ext cx="5318608" cy="2377440"/>
+            <a:off x="6233008" y="3611880"/>
+            <a:ext cx="5318608" cy="2423160"/>
           </a:xfrm>
           <a:prstGeom prst="roundRect">
             <a:avLst>
-              <a:gd name="adj" fmla="val 2308"/>
+              <a:gd name="adj" fmla="val 2264"/>
             </a:avLst>
           </a:prstGeom>
           <a:solidFill>
@@ -11684,17 +11361,6 @@
             <a:pPr indent="0" marL="0">
               <a:buNone/>
             </a:pPr>
-            <a:r>
-              <a:rPr lang="en-US" sz="2000" dirty="0">
-                <a:solidFill>
-                  <a:srgbClr val="E3F1E8"/>
-                </a:solidFill>
-                <a:latin typeface="Arial" pitchFamily="34" charset="0"/>
-                <a:ea typeface="Arial" pitchFamily="34" charset="-122"/>
-                <a:cs typeface="Arial" pitchFamily="34" charset="-120"/>
-              </a:rPr>
-              <a:t>Where the papers' evidence is weaker than their claims</a:t>
-            </a:r>
             <a:endParaRPr lang="en-US" sz="2000" dirty="0"/>
           </a:p>
         </p:txBody>
@@ -11732,8 +11398,8 @@
         </p:nvSpPr>
         <p:spPr>
           <a:xfrm>
-            <a:off x="640080" y="411480"/>
-            <a:ext cx="10911535" cy="365760"/>
+            <a:off x="640080" y="365760"/>
+            <a:ext cx="10911535" cy="822960"/>
           </a:xfrm>
           <a:prstGeom prst="rect">
             <a:avLst/>
@@ -11742,14 +11408,14 @@
           <a:ln/>
         </p:spPr>
         <p:txBody>
-          <a:bodyPr wrap="square" lIns="0" tIns="0" rIns="0" bIns="0" rtlCol="0" anchor="t"/>
+          <a:bodyPr wrap="square" lIns="0" tIns="0" rIns="0" bIns="0" rtlCol="0" anchor="ctr"/>
           <a:lstStyle/>
           <a:p>
             <a:pPr indent="0" marL="0">
               <a:buNone/>
             </a:pPr>
             <a:r>
-              <a:rPr lang="en-US" sz="1600" b="1" spc="100" kern="0" dirty="0">
+              <a:rPr lang="en-US" sz="4000" b="1" dirty="0">
                 <a:solidFill>
                   <a:srgbClr val="00883A"/>
                 </a:solidFill>
@@ -11759,7 +11425,7 @@
               </a:rPr>
               <a:t>Criticism · Paper 1</a:t>
             </a:r>
-            <a:endParaRPr lang="en-US" sz="1600" dirty="0"/>
+            <a:endParaRPr lang="en-US" sz="4000" dirty="0"/>
           </a:p>
         </p:txBody>
       </p:sp>
@@ -11771,47 +11437,8 @@
         </p:nvSpPr>
         <p:spPr>
           <a:xfrm>
-            <a:off x="640080" y="822960"/>
-            <a:ext cx="10911535" cy="1188720"/>
-          </a:xfrm>
-          <a:prstGeom prst="rect">
-            <a:avLst/>
-          </a:prstGeom>
-          <a:noFill/>
-          <a:ln/>
-        </p:spPr>
-        <p:txBody>
-          <a:bodyPr wrap="square" lIns="0" tIns="0" rIns="0" bIns="0" rtlCol="0" anchor="t"/>
-          <a:lstStyle/>
-          <a:p>
-            <a:pPr indent="0" marL="0">
-              <a:buNone/>
-            </a:pPr>
-            <a:r>
-              <a:rPr lang="en-US" sz="2800" b="1" dirty="0">
-                <a:solidFill>
-                  <a:srgbClr val="1A1A1A"/>
-                </a:solidFill>
-                <a:latin typeface="Arial" pitchFamily="34" charset="0"/>
-                <a:ea typeface="Arial" pitchFamily="34" charset="-122"/>
-                <a:cs typeface="Arial" pitchFamily="34" charset="-120"/>
-              </a:rPr>
-              <a:t>"Community expectations" come mostly from PL reviewers</a:t>
-            </a:r>
-            <a:endParaRPr lang="en-US" sz="2800" dirty="0"/>
-          </a:p>
-        </p:txBody>
-      </p:sp>
-      <p:sp>
-        <p:nvSpPr>
-          <p:cNvPr id="4" name="Text 2"/>
-          <p:cNvSpPr txBox="1"/>
-          <p:nvPr/>
-        </p:nvSpPr>
-        <p:spPr>
-          <a:xfrm>
-            <a:off x="640080" y="2103120"/>
-            <a:ext cx="10911535" cy="4114800"/>
+            <a:off x="640080" y="1463040"/>
+            <a:ext cx="10911535" cy="4754880"/>
           </a:xfrm>
           <a:prstGeom prst="rect">
             <a:avLst/>
@@ -11831,7 +11458,7 @@
               <a:buChar char="•"/>
             </a:pPr>
             <a:r>
-              <a:rPr lang="en-US" sz="2000" dirty="0">
+              <a:rPr lang="en-US" sz="2200" dirty="0">
                 <a:solidFill>
                   <a:srgbClr val="1A1A1A"/>
                 </a:solidFill>
@@ -11841,7 +11468,7 @@
               </a:rPr>
               <a:t>Only AEC members asked: authors who never submit are missing</a:t>
             </a:r>
-            <a:endParaRPr lang="en-US" sz="2000" dirty="0"/>
+            <a:endParaRPr lang="en-US" sz="2200" dirty="0"/>
           </a:p>
           <a:p>
             <a:pPr marL="279400" indent="-279400">
@@ -11852,7 +11479,7 @@
               <a:buChar char="•"/>
             </a:pPr>
             <a:r>
-              <a:rPr lang="en-US" sz="2000" dirty="0">
+              <a:rPr lang="en-US" sz="2200" dirty="0">
                 <a:solidFill>
                   <a:srgbClr val="1A1A1A"/>
                 </a:solidFill>
@@ -11862,7 +11489,7 @@
               </a:rPr>
               <a:t>125 PL vs 36 SE respondents; SE counts often single digits</a:t>
             </a:r>
-            <a:endParaRPr lang="en-US" sz="2000" dirty="0"/>
+            <a:endParaRPr lang="en-US" sz="2200" dirty="0"/>
           </a:p>
           <a:p>
             <a:pPr marL="279400" indent="-279400">
@@ -11873,7 +11500,7 @@
               <a:buChar char="•"/>
             </a:pPr>
             <a:r>
-              <a:rPr lang="en-US" sz="2000" dirty="0">
+              <a:rPr lang="en-US" sz="2200" dirty="0">
                 <a:solidFill>
                   <a:srgbClr val="1A1A1A"/>
                 </a:solidFill>
@@ -11883,7 +11510,7 @@
               </a:rPr>
               <a:t>257 started, 124 finished; each question has a different sample</a:t>
             </a:r>
-            <a:endParaRPr lang="en-US" sz="2000" dirty="0"/>
+            <a:endParaRPr lang="en-US" sz="2200" dirty="0"/>
           </a:p>
           <a:p>
             <a:pPr marL="279400" indent="-279400">
@@ -11894,7 +11521,7 @@
               <a:buChar char="•"/>
             </a:pPr>
             <a:r>
-              <a:rPr lang="en-US" sz="2000" dirty="0">
+              <a:rPr lang="en-US" sz="2200" dirty="0">
                 <a:solidFill>
                   <a:srgbClr val="1A1A1A"/>
                 </a:solidFill>
@@ -11904,7 +11531,7 @@
               </a:rPr>
               <a:t>Card-sort counts look precise but depend on one labeller</a:t>
             </a:r>
-            <a:endParaRPr lang="en-US" sz="2000" dirty="0"/>
+            <a:endParaRPr lang="en-US" sz="2200" dirty="0"/>
           </a:p>
           <a:p>
             <a:pPr marL="279400" indent="-279400">
@@ -11915,7 +11542,7 @@
               <a:buChar char="•"/>
             </a:pPr>
             <a:r>
-              <a:rPr lang="en-US" sz="2000" dirty="0">
+              <a:rPr lang="en-US" sz="2200" dirty="0">
                 <a:solidFill>
                   <a:srgbClr val="1A1A1A"/>
                 </a:solidFill>
@@ -11925,7 +11552,7 @@
               </a:rPr>
               <a:t>PL/SE totals differ between sections (p. 472 vs p. 474)</a:t>
             </a:r>
-            <a:endParaRPr lang="en-US" sz="2000" dirty="0"/>
+            <a:endParaRPr lang="en-US" sz="2200" dirty="0"/>
           </a:p>
         </p:txBody>
       </p:sp>
@@ -12113,8 +11740,8 @@
         </p:nvSpPr>
         <p:spPr>
           <a:xfrm>
-            <a:off x="640080" y="411480"/>
-            <a:ext cx="10911535" cy="365760"/>
+            <a:off x="640080" y="365760"/>
+            <a:ext cx="10911535" cy="822960"/>
           </a:xfrm>
           <a:prstGeom prst="rect">
             <a:avLst/>
@@ -12123,14 +11750,14 @@
           <a:ln/>
         </p:spPr>
         <p:txBody>
-          <a:bodyPr wrap="square" lIns="0" tIns="0" rIns="0" bIns="0" rtlCol="0" anchor="t"/>
+          <a:bodyPr wrap="square" lIns="0" tIns="0" rIns="0" bIns="0" rtlCol="0" anchor="ctr"/>
           <a:lstStyle/>
           <a:p>
             <a:pPr indent="0" marL="0">
               <a:buNone/>
             </a:pPr>
             <a:r>
-              <a:rPr lang="en-US" sz="1600" b="1" spc="100" kern="0" dirty="0">
+              <a:rPr lang="en-US" sz="4000" b="1" dirty="0">
                 <a:solidFill>
                   <a:srgbClr val="00883A"/>
                 </a:solidFill>
@@ -12140,7 +11767,7 @@
               </a:rPr>
               <a:t>Criticism · Paper 2</a:t>
             </a:r>
-            <a:endParaRPr lang="en-US" sz="1600" dirty="0"/>
+            <a:endParaRPr lang="en-US" sz="4000" dirty="0"/>
           </a:p>
         </p:txBody>
       </p:sp>
@@ -12152,47 +11779,8 @@
         </p:nvSpPr>
         <p:spPr>
           <a:xfrm>
-            <a:off x="640080" y="822960"/>
-            <a:ext cx="10911535" cy="1188720"/>
-          </a:xfrm>
-          <a:prstGeom prst="rect">
-            <a:avLst/>
-          </a:prstGeom>
-          <a:noFill/>
-          <a:ln/>
-        </p:spPr>
-        <p:txBody>
-          <a:bodyPr wrap="square" lIns="0" tIns="0" rIns="0" bIns="0" rtlCol="0" anchor="t"/>
-          <a:lstStyle/>
-          <a:p>
-            <a:pPr indent="0" marL="0">
-              <a:buNone/>
-            </a:pPr>
-            <a:r>
-              <a:rPr lang="en-US" sz="2800" b="1" dirty="0">
-                <a:solidFill>
-                  <a:srgbClr val="1A1A1A"/>
-                </a:solidFill>
-                <a:latin typeface="Arial" pitchFamily="34" charset="0"/>
-                <a:ea typeface="Arial" pitchFamily="34" charset="-122"/>
-                <a:cs typeface="Arial" pitchFamily="34" charset="-120"/>
-              </a:rPr>
-              <a:t>"Artifact" and "available" are defined generously</a:t>
-            </a:r>
-            <a:endParaRPr lang="en-US" sz="2800" dirty="0"/>
-          </a:p>
-        </p:txBody>
-      </p:sp>
-      <p:sp>
-        <p:nvSpPr>
-          <p:cNvPr id="4" name="Text 2"/>
-          <p:cNvSpPr txBox="1"/>
-          <p:nvPr/>
-        </p:nvSpPr>
-        <p:spPr>
-          <a:xfrm>
-            <a:off x="640080" y="2103120"/>
-            <a:ext cx="10911535" cy="4114800"/>
+            <a:off x="640080" y="1463040"/>
+            <a:ext cx="10911535" cy="4754880"/>
           </a:xfrm>
           <a:prstGeom prst="rect">
             <a:avLst/>
@@ -12212,7 +11800,7 @@
               <a:buChar char="•"/>
             </a:pPr>
             <a:r>
-              <a:rPr lang="en-US" sz="2000" dirty="0">
+              <a:rPr lang="en-US" sz="2200" dirty="0">
                 <a:solidFill>
                   <a:srgbClr val="1A1A1A"/>
                 </a:solidFill>
@@ -12222,7 +11810,7 @@
               </a:rPr>
               <a:t>Any link counts as an artifact; a live link counts as available</a:t>
             </a:r>
-            <a:endParaRPr lang="en-US" sz="2000" dirty="0"/>
+            <a:endParaRPr lang="en-US" sz="2200" dirty="0"/>
           </a:p>
           <a:p>
             <a:pPr marL="279400" indent="-279400">
@@ -12233,7 +11821,7 @@
               <a:buChar char="•"/>
             </a:pPr>
             <a:r>
-              <a:rPr lang="en-US" sz="2000" dirty="0">
+              <a:rPr lang="en-US" sz="2200" dirty="0">
                 <a:solidFill>
                   <a:srgbClr val="1A1A1A"/>
                 </a:solidFill>
@@ -12243,7 +11831,7 @@
               </a:rPr>
               <a:t>RQ1 "value" rests on link counts and quotes from willing respondents</a:t>
             </a:r>
-            <a:endParaRPr lang="en-US" sz="2000" dirty="0"/>
+            <a:endParaRPr lang="en-US" sz="2200" dirty="0"/>
           </a:p>
           <a:p>
             <a:pPr marL="279400" indent="-279400">
@@ -12254,7 +11842,7 @@
               <a:buChar char="•"/>
             </a:pPr>
             <a:r>
-              <a:rPr lang="en-US" sz="2000" dirty="0">
+              <a:rPr lang="en-US" sz="2200" dirty="0">
                 <a:solidFill>
                   <a:srgbClr val="1A1A1A"/>
                 </a:solidFill>
@@ -12264,7 +11852,7 @@
               </a:rPr>
               <a:t>Fig. 4: 26.33 % is 74 of all 281 papers; of 196 artifact papers it is 38 %</a:t>
             </a:r>
-            <a:endParaRPr lang="en-US" sz="2000" dirty="0"/>
+            <a:endParaRPr lang="en-US" sz="2200" dirty="0"/>
           </a:p>
           <a:p>
             <a:pPr marL="279400" indent="-279400">
@@ -12275,7 +11863,7 @@
               <a:buChar char="•"/>
             </a:pPr>
             <a:r>
-              <a:rPr lang="en-US" sz="2000" dirty="0">
+              <a:rPr lang="en-US" sz="2200" dirty="0">
                 <a:solidFill>
                   <a:srgbClr val="1A1A1A"/>
                 </a:solidFill>
@@ -12285,7 +11873,7 @@
               </a:rPr>
               <a:t>Small inconsistencies: 81 vs 82, 60 vs 62; Table 6 cites an undefined C13</a:t>
             </a:r>
-            <a:endParaRPr lang="en-US" sz="2000" dirty="0"/>
+            <a:endParaRPr lang="en-US" sz="2200" dirty="0"/>
           </a:p>
           <a:p>
             <a:pPr marL="279400" indent="-279400">
@@ -12296,7 +11884,7 @@
               <a:buChar char="•"/>
             </a:pPr>
             <a:r>
-              <a:rPr lang="en-US" sz="2000" dirty="0">
+              <a:rPr lang="en-US" sz="2200" dirty="0">
                 <a:solidFill>
                   <a:srgbClr val="1A1A1A"/>
                 </a:solidFill>
@@ -12306,7 +11894,7 @@
               </a:rPr>
               <a:t>Most recommendations still ask creators and reviewers for more work</a:t>
             </a:r>
-            <a:endParaRPr lang="en-US" sz="2000" dirty="0"/>
+            <a:endParaRPr lang="en-US" sz="2200" dirty="0"/>
           </a:p>
         </p:txBody>
       </p:sp>
@@ -12391,8 +11979,8 @@
         </p:nvSpPr>
         <p:spPr>
           <a:xfrm>
-            <a:off x="640080" y="2011680"/>
-            <a:ext cx="10911535" cy="1463040"/>
+            <a:off x="640080" y="2560320"/>
+            <a:ext cx="10911535" cy="1371600"/>
           </a:xfrm>
           <a:prstGeom prst="rect">
             <a:avLst/>
@@ -12401,14 +11989,14 @@
           <a:ln/>
         </p:spPr>
         <p:txBody>
-          <a:bodyPr wrap="square" lIns="0" tIns="0" rIns="0" bIns="0" rtlCol="0" anchor="b"/>
+          <a:bodyPr wrap="square" lIns="0" tIns="0" rIns="0" bIns="0" rtlCol="0" anchor="ctr"/>
           <a:lstStyle/>
           <a:p>
             <a:pPr indent="0" marL="0">
               <a:buNone/>
             </a:pPr>
             <a:r>
-              <a:rPr lang="en-US" sz="4400" b="1" dirty="0">
+              <a:rPr lang="en-US" sz="4800" b="1" dirty="0">
                 <a:solidFill>
                   <a:srgbClr val="FFFFFF"/>
                 </a:solidFill>
@@ -12416,48 +12004,9 @@
                 <a:ea typeface="Arial" pitchFamily="34" charset="-122"/>
                 <a:cs typeface="Arial" pitchFamily="34" charset="-120"/>
               </a:rPr>
-              <a:t>One change each</a:t>
-            </a:r>
-            <a:endParaRPr lang="en-US" sz="4400" dirty="0"/>
-          </a:p>
-        </p:txBody>
-      </p:sp>
-      <p:sp>
-        <p:nvSpPr>
-          <p:cNvPr id="3" name="Text 1"/>
-          <p:cNvSpPr txBox="1"/>
-          <p:nvPr/>
-        </p:nvSpPr>
-        <p:spPr>
-          <a:xfrm>
-            <a:off x="640080" y="3657600"/>
-            <a:ext cx="10911535" cy="914400"/>
-          </a:xfrm>
-          <a:prstGeom prst="rect">
-            <a:avLst/>
-          </a:prstGeom>
-          <a:noFill/>
-          <a:ln/>
-        </p:spPr>
-        <p:txBody>
-          <a:bodyPr wrap="square" lIns="0" tIns="0" rIns="0" bIns="0" rtlCol="0" anchor="t"/>
-          <a:lstStyle/>
-          <a:p>
-            <a:pPr indent="0" marL="0">
-              <a:buNone/>
-            </a:pPr>
-            <a:r>
-              <a:rPr lang="en-US" sz="2200" dirty="0">
-                <a:solidFill>
-                  <a:srgbClr val="FFFFFF"/>
-                </a:solidFill>
-                <a:latin typeface="Arial" pitchFamily="34" charset="0"/>
-                <a:ea typeface="Arial" pitchFamily="34" charset="-122"/>
-                <a:cs typeface="Arial" pitchFamily="34" charset="-120"/>
-              </a:rPr>
-              <a:t>Name one change to artifact evaluation you would make, and who has to make it: author, advisor, AEC chair, steering committee or funder.</a:t>
-            </a:r>
-            <a:endParaRPr lang="en-US" sz="2200" dirty="0"/>
+              <a:t>Thank you for your attention</a:t>
+            </a:r>
+            <a:endParaRPr lang="en-US" sz="4800" dirty="0"/>
           </a:p>
         </p:txBody>
       </p:sp>
@@ -12494,8 +12043,8 @@
         </p:nvSpPr>
         <p:spPr>
           <a:xfrm>
-            <a:off x="640080" y="411480"/>
-            <a:ext cx="10911535" cy="365760"/>
+            <a:off x="640080" y="365760"/>
+            <a:ext cx="10911535" cy="822960"/>
           </a:xfrm>
           <a:prstGeom prst="rect">
             <a:avLst/>
@@ -12504,14 +12053,14 @@
           <a:ln/>
         </p:spPr>
         <p:txBody>
-          <a:bodyPr wrap="square" lIns="0" tIns="0" rIns="0" bIns="0" rtlCol="0" anchor="t"/>
+          <a:bodyPr wrap="square" lIns="0" tIns="0" rIns="0" bIns="0" rtlCol="0" anchor="ctr"/>
           <a:lstStyle/>
           <a:p>
             <a:pPr indent="0" marL="0">
               <a:buNone/>
             </a:pPr>
             <a:r>
-              <a:rPr lang="en-US" sz="1600" b="1" spc="100" kern="0" dirty="0">
+              <a:rPr lang="en-US" sz="4000" b="1" dirty="0">
                 <a:solidFill>
                   <a:srgbClr val="00883A"/>
                 </a:solidFill>
@@ -12519,9 +12068,9 @@
                 <a:ea typeface="Arial" pitchFamily="34" charset="-122"/>
                 <a:cs typeface="Arial" pitchFamily="34" charset="-120"/>
               </a:rPr>
-              <a:t>General summary</a:t>
-            </a:r>
-            <a:endParaRPr lang="en-US" sz="1600" dirty="0"/>
+              <a:t>General Summary</a:t>
+            </a:r>
+            <a:endParaRPr lang="en-US" sz="4000" dirty="0"/>
           </a:p>
         </p:txBody>
       </p:sp>
@@ -12533,47 +12082,8 @@
         </p:nvSpPr>
         <p:spPr>
           <a:xfrm>
-            <a:off x="640080" y="822960"/>
-            <a:ext cx="10911535" cy="1188720"/>
-          </a:xfrm>
-          <a:prstGeom prst="rect">
-            <a:avLst/>
-          </a:prstGeom>
-          <a:noFill/>
-          <a:ln/>
-        </p:spPr>
-        <p:txBody>
-          <a:bodyPr wrap="square" lIns="0" tIns="0" rIns="0" bIns="0" rtlCol="0" anchor="t"/>
-          <a:lstStyle/>
-          <a:p>
-            <a:pPr indent="0" marL="0">
-              <a:buNone/>
-            </a:pPr>
-            <a:r>
-              <a:rPr lang="en-US" sz="2800" b="1" dirty="0">
-                <a:solidFill>
-                  <a:srgbClr val="1A1A1A"/>
-                </a:solidFill>
-                <a:latin typeface="Arial" pitchFamily="34" charset="0"/>
-                <a:ea typeface="Arial" pitchFamily="34" charset="-122"/>
-                <a:cs typeface="Arial" pitchFamily="34" charset="-120"/>
-              </a:rPr>
-              <a:t>Artifact evaluation has spread, but nobody agrees what a good artifact is</a:t>
-            </a:r>
-            <a:endParaRPr lang="en-US" sz="2800" dirty="0"/>
-          </a:p>
-        </p:txBody>
-      </p:sp>
-      <p:sp>
-        <p:nvSpPr>
-          <p:cNvPr id="4" name="Text 2"/>
-          <p:cNvSpPr txBox="1"/>
-          <p:nvPr/>
-        </p:nvSpPr>
-        <p:spPr>
-          <a:xfrm>
-            <a:off x="640080" y="2103120"/>
-            <a:ext cx="10911535" cy="4114800"/>
+            <a:off x="640080" y="1463040"/>
+            <a:ext cx="10911535" cy="4754880"/>
           </a:xfrm>
           <a:prstGeom prst="rect">
             <a:avLst/>
@@ -12593,7 +12103,7 @@
               <a:buChar char="•"/>
             </a:pPr>
             <a:r>
-              <a:rPr lang="en-US" sz="2000" dirty="0">
+              <a:rPr lang="en-US" sz="2200" dirty="0">
                 <a:solidFill>
                   <a:srgbClr val="1A1A1A"/>
                 </a:solidFill>
@@ -12603,7 +12113,7 @@
               </a:rPr>
               <a:t>Artifact evaluation (AE): committees check artifacts of accepted papers and award badges</a:t>
             </a:r>
-            <a:endParaRPr lang="en-US" sz="2000" dirty="0"/>
+            <a:endParaRPr lang="en-US" sz="2200" dirty="0"/>
           </a:p>
           <a:p>
             <a:pPr marL="279400" indent="-279400">
@@ -12614,7 +12124,7 @@
               <a:buChar char="•"/>
             </a:pPr>
             <a:r>
-              <a:rPr lang="en-US" sz="2000" dirty="0">
+              <a:rPr lang="en-US" sz="2200" dirty="0">
                 <a:solidFill>
                   <a:srgbClr val="1A1A1A"/>
                 </a:solidFill>
@@ -12624,7 +12134,7 @@
               </a:rPr>
               <a:t>Asked the reviewers (AEC members) what AE is for and what they expect</a:t>
             </a:r>
-            <a:endParaRPr lang="en-US" sz="2000" dirty="0"/>
+            <a:endParaRPr lang="en-US" sz="2200" dirty="0"/>
           </a:p>
           <a:p>
             <a:pPr marL="279400" indent="-279400">
@@ -12635,7 +12145,7 @@
               <a:buChar char="•"/>
             </a:pPr>
             <a:r>
-              <a:rPr lang="en-US" sz="2000" dirty="0">
+              <a:rPr lang="en-US" sz="2200" dirty="0">
                 <a:solidFill>
                   <a:srgbClr val="1A1A1A"/>
                 </a:solidFill>
@@ -12645,7 +12155,7 @@
               </a:rPr>
               <a:t>Found no shared quality threshold and inconsistent terms</a:t>
             </a:r>
-            <a:endParaRPr lang="en-US" sz="2000" dirty="0"/>
+            <a:endParaRPr lang="en-US" sz="2200" dirty="0"/>
           </a:p>
           <a:p>
             <a:pPr marL="279400" indent="-279400">
@@ -12656,7 +12166,7 @@
               <a:buChar char="•"/>
             </a:pPr>
             <a:r>
-              <a:rPr lang="en-US" sz="2000" dirty="0">
+              <a:rPr lang="en-US" sz="2200" dirty="0">
                 <a:solidFill>
                   <a:srgbClr val="1A1A1A"/>
                 </a:solidFill>
@@ -12666,7 +12176,7 @@
               </a:rPr>
               <a:t>A badge only means something within one conference and year (p. 478)</a:t>
             </a:r>
-            <a:endParaRPr lang="en-US" sz="2000" dirty="0"/>
+            <a:endParaRPr lang="en-US" sz="2200" dirty="0"/>
           </a:p>
         </p:txBody>
       </p:sp>
@@ -12751,8 +12261,8 @@
         </p:nvSpPr>
         <p:spPr>
           <a:xfrm>
-            <a:off x="640080" y="411480"/>
-            <a:ext cx="10911535" cy="365760"/>
+            <a:off x="640080" y="365760"/>
+            <a:ext cx="10911535" cy="822960"/>
           </a:xfrm>
           <a:prstGeom prst="rect">
             <a:avLst/>
@@ -12761,14 +12271,14 @@
           <a:ln/>
         </p:spPr>
         <p:txBody>
-          <a:bodyPr wrap="square" lIns="0" tIns="0" rIns="0" bIns="0" rtlCol="0" anchor="t"/>
+          <a:bodyPr wrap="square" lIns="0" tIns="0" rIns="0" bIns="0" rtlCol="0" anchor="ctr"/>
           <a:lstStyle/>
           <a:p>
             <a:pPr indent="0" marL="0">
               <a:buNone/>
             </a:pPr>
             <a:r>
-              <a:rPr lang="en-US" sz="1600" b="1" spc="100" kern="0" dirty="0">
+              <a:rPr lang="en-US" sz="4000" b="1" dirty="0">
                 <a:solidFill>
                   <a:srgbClr val="00883A"/>
                 </a:solidFill>
@@ -12776,48 +12286,9 @@
                 <a:ea typeface="Arial" pitchFamily="34" charset="-122"/>
                 <a:cs typeface="Arial" pitchFamily="34" charset="-120"/>
               </a:rPr>
-              <a:t>Terminology</a:t>
-            </a:r>
-            <a:endParaRPr lang="en-US" sz="1600" dirty="0"/>
-          </a:p>
-        </p:txBody>
-      </p:sp>
-      <p:sp>
-        <p:nvSpPr>
-          <p:cNvPr id="3" name="Text 1"/>
-          <p:cNvSpPr txBox="1"/>
-          <p:nvPr/>
-        </p:nvSpPr>
-        <p:spPr>
-          <a:xfrm>
-            <a:off x="640080" y="822960"/>
-            <a:ext cx="10911535" cy="1188720"/>
-          </a:xfrm>
-          <a:prstGeom prst="rect">
-            <a:avLst/>
-          </a:prstGeom>
-          <a:noFill/>
-          <a:ln/>
-        </p:spPr>
-        <p:txBody>
-          <a:bodyPr wrap="square" lIns="0" tIns="0" rIns="0" bIns="0" rtlCol="0" anchor="t"/>
-          <a:lstStyle/>
-          <a:p>
-            <a:pPr indent="0" marL="0">
-              <a:buNone/>
-            </a:pPr>
-            <a:r>
-              <a:rPr lang="en-US" sz="2800" b="1" dirty="0">
-                <a:solidFill>
-                  <a:srgbClr val="1A1A1A"/>
-                </a:solidFill>
-                <a:latin typeface="Arial" pitchFamily="34" charset="0"/>
-                <a:ea typeface="Arial" pitchFamily="34" charset="-122"/>
-                <a:cs typeface="Arial" pitchFamily="34" charset="-120"/>
-              </a:rPr>
-              <a:t>The paper uses the old ACM terms, which ACM swapped in 2020</a:t>
-            </a:r>
-            <a:endParaRPr lang="en-US" sz="2800" dirty="0"/>
+              <a:t>Terminology / Definitions</a:t>
+            </a:r>
+            <a:endParaRPr lang="en-US" sz="4000" dirty="0"/>
           </a:p>
         </p:txBody>
       </p:sp>
@@ -12836,7 +12307,7 @@
           </p:nvPr>
         </p:nvGraphicFramePr>
         <p:xfrm>
-          <a:off x="640080" y="2103120"/>
+          <a:off x="640080" y="1554480"/>
           <a:ext cx="10911535" cy="914400"/>
         </p:xfrm>
         <a:graphic>
@@ -12848,7 +12319,7 @@
                 <a:gridCol w="3637178"/>
                 <a:gridCol w="3637178"/>
               </a:tblGrid>
-              <a:tr h="566928">
+              <a:tr h="640080">
                 <a:tc>
                   <a:txBody>
                     <a:bodyPr/>
@@ -12858,7 +12329,7 @@
                         <a:buNone/>
                       </a:pPr>
                       <a:r>
-                        <a:rPr lang="en-US" sz="1800" b="1" dirty="0">
+                        <a:rPr lang="en-US" sz="2000" b="1" dirty="0">
                           <a:solidFill>
                             <a:srgbClr val="FFFFFF"/>
                           </a:solidFill>
@@ -12868,7 +12339,7 @@
                         </a:rPr>
                         <a:t>Setting</a:t>
                       </a:r>
-                      <a:endParaRPr lang="en-US" sz="1800" dirty="0">
+                      <a:endParaRPr lang="en-US" sz="2000" dirty="0">
                         <a:latin typeface="Arial" charset="0"/>
                         <a:ea typeface="Arial" charset="0"/>
                         <a:cs typeface="Arial" charset="0"/>
@@ -12926,7 +12397,7 @@
                         <a:buNone/>
                       </a:pPr>
                       <a:r>
-                        <a:rPr lang="en-US" sz="1800" b="1" dirty="0">
+                        <a:rPr lang="en-US" sz="2000" b="1" dirty="0">
                           <a:solidFill>
                             <a:srgbClr val="FFFFFF"/>
                           </a:solidFill>
@@ -12936,7 +12407,7 @@
                         </a:rPr>
                         <a:t>Paper (old ACM)</a:t>
                       </a:r>
-                      <a:endParaRPr lang="en-US" sz="1800" dirty="0">
+                      <a:endParaRPr lang="en-US" sz="2000" dirty="0">
                         <a:latin typeface="Arial" charset="0"/>
                         <a:ea typeface="Arial" charset="0"/>
                         <a:cs typeface="Arial" charset="0"/>
@@ -12994,7 +12465,7 @@
                         <a:buNone/>
                       </a:pPr>
                       <a:r>
-                        <a:rPr lang="en-US" sz="1800" b="1" dirty="0">
+                        <a:rPr lang="en-US" sz="2000" b="1" dirty="0">
                           <a:solidFill>
                             <a:srgbClr val="FFFFFF"/>
                           </a:solidFill>
@@ -13004,7 +12475,7 @@
                         </a:rPr>
                         <a:t>Our lecture (2020)</a:t>
                       </a:r>
-                      <a:endParaRPr lang="en-US" sz="1800" dirty="0">
+                      <a:endParaRPr lang="en-US" sz="2000" dirty="0">
                         <a:latin typeface="Arial" charset="0"/>
                         <a:ea typeface="Arial" charset="0"/>
                         <a:cs typeface="Arial" charset="0"/>
@@ -13054,7 +12525,7 @@
                   </a:tcPr>
                 </a:tc>
               </a:tr>
-              <a:tr h="566928">
+              <a:tr h="640080">
                 <a:tc>
                   <a:txBody>
                     <a:bodyPr/>
@@ -13064,7 +12535,7 @@
                         <a:buNone/>
                       </a:pPr>
                       <a:r>
-                        <a:rPr lang="en-US" sz="1800" b="1" dirty="0">
+                        <a:rPr lang="en-US" sz="2000" b="1" dirty="0">
                           <a:solidFill>
                             <a:srgbClr val="1A1A1A"/>
                           </a:solidFill>
@@ -13074,7 +12545,7 @@
                         </a:rPr>
                         <a:t>Same team, same setup</a:t>
                       </a:r>
-                      <a:endParaRPr lang="en-US" sz="1800" dirty="0">
+                      <a:endParaRPr lang="en-US" sz="2000" dirty="0">
                         <a:latin typeface="Arial" charset="0"/>
                         <a:ea typeface="Arial" charset="0"/>
                         <a:cs typeface="Arial" charset="0"/>
@@ -13132,7 +12603,7 @@
                         <a:buNone/>
                       </a:pPr>
                       <a:r>
-                        <a:rPr lang="en-US" sz="1800" dirty="0">
+                        <a:rPr lang="en-US" sz="2000" dirty="0">
                           <a:solidFill>
                             <a:srgbClr val="1A1A1A"/>
                           </a:solidFill>
@@ -13142,7 +12613,7 @@
                         </a:rPr>
                         <a:t>Repeatability</a:t>
                       </a:r>
-                      <a:endParaRPr lang="en-US" sz="1800" dirty="0">
+                      <a:endParaRPr lang="en-US" sz="2000" dirty="0">
                         <a:latin typeface="Arial" charset="0"/>
                         <a:ea typeface="Arial" charset="0"/>
                         <a:cs typeface="Arial" charset="0"/>
@@ -13200,7 +12671,7 @@
                         <a:buNone/>
                       </a:pPr>
                       <a:r>
-                        <a:rPr lang="en-US" sz="1800" dirty="0">
+                        <a:rPr lang="en-US" sz="2000" dirty="0">
                           <a:solidFill>
                             <a:srgbClr val="1A1A1A"/>
                           </a:solidFill>
@@ -13210,7 +12681,7 @@
                         </a:rPr>
                         <a:t>Repeatability</a:t>
                       </a:r>
-                      <a:endParaRPr lang="en-US" sz="1800" dirty="0">
+                      <a:endParaRPr lang="en-US" sz="2000" dirty="0">
                         <a:latin typeface="Arial" charset="0"/>
                         <a:ea typeface="Arial" charset="0"/>
                         <a:cs typeface="Arial" charset="0"/>
@@ -13260,7 +12731,7 @@
                   </a:tcPr>
                 </a:tc>
               </a:tr>
-              <a:tr h="566928">
+              <a:tr h="640080">
                 <a:tc>
                   <a:txBody>
                     <a:bodyPr/>
@@ -13270,7 +12741,7 @@
                         <a:buNone/>
                       </a:pPr>
                       <a:r>
-                        <a:rPr lang="en-US" sz="1800" b="1" dirty="0">
+                        <a:rPr lang="en-US" sz="2000" b="1" dirty="0">
                           <a:solidFill>
                             <a:srgbClr val="1A1A1A"/>
                           </a:solidFill>
@@ -13280,7 +12751,7 @@
                         </a:rPr>
                         <a:t>Other team, authors' artifacts</a:t>
                       </a:r>
-                      <a:endParaRPr lang="en-US" sz="1800" dirty="0">
+                      <a:endParaRPr lang="en-US" sz="2000" dirty="0">
                         <a:latin typeface="Arial" charset="0"/>
                         <a:ea typeface="Arial" charset="0"/>
                         <a:cs typeface="Arial" charset="0"/>
@@ -13338,7 +12809,7 @@
                         <a:buNone/>
                       </a:pPr>
                       <a:r>
-                        <a:rPr lang="en-US" sz="1800" dirty="0">
+                        <a:rPr lang="en-US" sz="2000" dirty="0">
                           <a:solidFill>
                             <a:srgbClr val="1A1A1A"/>
                           </a:solidFill>
@@ -13348,7 +12819,7 @@
                         </a:rPr>
                         <a:t>Replicability</a:t>
                       </a:r>
-                      <a:endParaRPr lang="en-US" sz="1800" dirty="0">
+                      <a:endParaRPr lang="en-US" sz="2000" dirty="0">
                         <a:latin typeface="Arial" charset="0"/>
                         <a:ea typeface="Arial" charset="0"/>
                         <a:cs typeface="Arial" charset="0"/>
@@ -13406,7 +12877,7 @@
                         <a:buNone/>
                       </a:pPr>
                       <a:r>
-                        <a:rPr lang="en-US" sz="1800" dirty="0">
+                        <a:rPr lang="en-US" sz="2000" dirty="0">
                           <a:solidFill>
                             <a:srgbClr val="1A1A1A"/>
                           </a:solidFill>
@@ -13416,7 +12887,7 @@
                         </a:rPr>
                         <a:t>Reproducibility</a:t>
                       </a:r>
-                      <a:endParaRPr lang="en-US" sz="1800" dirty="0">
+                      <a:endParaRPr lang="en-US" sz="2000" dirty="0">
                         <a:latin typeface="Arial" charset="0"/>
                         <a:ea typeface="Arial" charset="0"/>
                         <a:cs typeface="Arial" charset="0"/>
@@ -13466,7 +12937,7 @@
                   </a:tcPr>
                 </a:tc>
               </a:tr>
-              <a:tr h="566928">
+              <a:tr h="640080">
                 <a:tc>
                   <a:txBody>
                     <a:bodyPr/>
@@ -13476,7 +12947,7 @@
                         <a:buNone/>
                       </a:pPr>
                       <a:r>
-                        <a:rPr lang="en-US" sz="1800" b="1" dirty="0">
+                        <a:rPr lang="en-US" sz="2000" b="1" dirty="0">
                           <a:solidFill>
                             <a:srgbClr val="1A1A1A"/>
                           </a:solidFill>
@@ -13486,7 +12957,7 @@
                         </a:rPr>
                         <a:t>Other team, own artifacts</a:t>
                       </a:r>
-                      <a:endParaRPr lang="en-US" sz="1800" dirty="0">
+                      <a:endParaRPr lang="en-US" sz="2000" dirty="0">
                         <a:latin typeface="Arial" charset="0"/>
                         <a:ea typeface="Arial" charset="0"/>
                         <a:cs typeface="Arial" charset="0"/>
@@ -13544,7 +13015,7 @@
                         <a:buNone/>
                       </a:pPr>
                       <a:r>
-                        <a:rPr lang="en-US" sz="1800" dirty="0">
+                        <a:rPr lang="en-US" sz="2000" dirty="0">
                           <a:solidFill>
                             <a:srgbClr val="1A1A1A"/>
                           </a:solidFill>
@@ -13554,7 +13025,7 @@
                         </a:rPr>
                         <a:t>Reproducibility</a:t>
                       </a:r>
-                      <a:endParaRPr lang="en-US" sz="1800" dirty="0">
+                      <a:endParaRPr lang="en-US" sz="2000" dirty="0">
                         <a:latin typeface="Arial" charset="0"/>
                         <a:ea typeface="Arial" charset="0"/>
                         <a:cs typeface="Arial" charset="0"/>
@@ -13612,7 +13083,7 @@
                         <a:buNone/>
                       </a:pPr>
                       <a:r>
-                        <a:rPr lang="en-US" sz="1800" dirty="0">
+                        <a:rPr lang="en-US" sz="2000" dirty="0">
                           <a:solidFill>
                             <a:srgbClr val="1A1A1A"/>
                           </a:solidFill>
@@ -13622,7 +13093,7 @@
                         </a:rPr>
                         <a:t>Replicability</a:t>
                       </a:r>
-                      <a:endParaRPr lang="en-US" sz="1800" dirty="0">
+                      <a:endParaRPr lang="en-US" sz="2000" dirty="0">
                         <a:latin typeface="Arial" charset="0"/>
                         <a:ea typeface="Arial" charset="0"/>
                         <a:cs typeface="Arial" charset="0"/>
@@ -13678,14 +13149,14 @@
       </p:graphicFrame>
       <p:sp>
         <p:nvSpPr>
-          <p:cNvPr id="5" name="Text 2"/>
+          <p:cNvPr id="4" name="Text 1"/>
           <p:cNvSpPr txBox="1"/>
           <p:nvPr/>
         </p:nvSpPr>
         <p:spPr>
           <a:xfrm>
-            <a:off x="640080" y="4690872"/>
-            <a:ext cx="10911535" cy="822960"/>
+            <a:off x="640080" y="4434840"/>
+            <a:ext cx="10911535" cy="914400"/>
           </a:xfrm>
           <a:prstGeom prst="rect">
             <a:avLst/>
@@ -13701,7 +13172,7 @@
               <a:buNone/>
             </a:pPr>
             <a:r>
-              <a:rPr lang="en-US" sz="1600" dirty="0">
+              <a:rPr lang="en-US" sz="1800" dirty="0">
                 <a:solidFill>
                   <a:srgbClr val="5F6368"/>
                 </a:solidFill>
@@ -13711,7 +13182,7 @@
               </a:rPr>
               <a:t>Footnote 5, p. 471. Artifact = "a self-contained work result, having a context-specific purpose" (p. 470). Badges: Available, Functional, Reusable, Results.</a:t>
             </a:r>
-            <a:endParaRPr lang="en-US" sz="1600" dirty="0"/>
+            <a:endParaRPr lang="en-US" sz="1800" dirty="0"/>
           </a:p>
         </p:txBody>
       </p:sp>
@@ -13796,8 +13267,8 @@
         </p:nvSpPr>
         <p:spPr>
           <a:xfrm>
-            <a:off x="640080" y="411480"/>
-            <a:ext cx="10911535" cy="365760"/>
+            <a:off x="640080" y="365760"/>
+            <a:ext cx="10911535" cy="822960"/>
           </a:xfrm>
           <a:prstGeom prst="rect">
             <a:avLst/>
@@ -13806,14 +13277,14 @@
           <a:ln/>
         </p:spPr>
         <p:txBody>
-          <a:bodyPr wrap="square" lIns="0" tIns="0" rIns="0" bIns="0" rtlCol="0" anchor="t"/>
+          <a:bodyPr wrap="square" lIns="0" tIns="0" rIns="0" bIns="0" rtlCol="0" anchor="ctr"/>
           <a:lstStyle/>
           <a:p>
             <a:pPr indent="0" marL="0">
               <a:buNone/>
             </a:pPr>
             <a:r>
-              <a:rPr lang="en-US" sz="1600" b="1" spc="100" kern="0" dirty="0">
+              <a:rPr lang="en-US" sz="4000" b="1" dirty="0">
                 <a:solidFill>
                   <a:srgbClr val="00883A"/>
                 </a:solidFill>
@@ -13821,9 +13292,9 @@
                 <a:ea typeface="Arial" pitchFamily="34" charset="-122"/>
                 <a:cs typeface="Arial" pitchFamily="34" charset="-120"/>
               </a:rPr>
-              <a:t>Research questions</a:t>
-            </a:r>
-            <a:endParaRPr lang="en-US" sz="1600" dirty="0"/>
+              <a:t>Research Questions</a:t>
+            </a:r>
+            <a:endParaRPr lang="en-US" sz="4000" dirty="0"/>
           </a:p>
         </p:txBody>
       </p:sp>
@@ -13835,47 +13306,8 @@
         </p:nvSpPr>
         <p:spPr>
           <a:xfrm>
-            <a:off x="640080" y="822960"/>
-            <a:ext cx="10911535" cy="1188720"/>
-          </a:xfrm>
-          <a:prstGeom prst="rect">
-            <a:avLst/>
-          </a:prstGeom>
-          <a:noFill/>
-          <a:ln/>
-        </p:spPr>
-        <p:txBody>
-          <a:bodyPr wrap="square" lIns="0" tIns="0" rIns="0" bIns="0" rtlCol="0" anchor="t"/>
-          <a:lstStyle/>
-          <a:p>
-            <a:pPr indent="0" marL="0">
-              <a:buNone/>
-            </a:pPr>
-            <a:r>
-              <a:rPr lang="en-US" sz="2800" b="1" dirty="0">
-                <a:solidFill>
-                  <a:srgbClr val="1A1A1A"/>
-                </a:solidFill>
-                <a:latin typeface="Arial" pitchFamily="34" charset="0"/>
-                <a:ea typeface="Arial" pitchFamily="34" charset="-122"/>
-                <a:cs typeface="Arial" pitchFamily="34" charset="-120"/>
-              </a:rPr>
-              <a:t>Three questions about purpose and expectations</a:t>
-            </a:r>
-            <a:endParaRPr lang="en-US" sz="2800" dirty="0"/>
-          </a:p>
-        </p:txBody>
-      </p:sp>
-      <p:sp>
-        <p:nvSpPr>
-          <p:cNvPr id="4" name="Text 2"/>
-          <p:cNvSpPr txBox="1"/>
-          <p:nvPr/>
-        </p:nvSpPr>
-        <p:spPr>
-          <a:xfrm>
-            <a:off x="640080" y="2103120"/>
-            <a:ext cx="10911535" cy="4114800"/>
+            <a:off x="640080" y="1463040"/>
+            <a:ext cx="10911535" cy="4754880"/>
           </a:xfrm>
           <a:prstGeom prst="rect">
             <a:avLst/>
@@ -13895,7 +13327,7 @@
               <a:buChar char="•"/>
             </a:pPr>
             <a:r>
-              <a:rPr lang="en-US" sz="2000" dirty="0">
+              <a:rPr lang="en-US" sz="2200" dirty="0">
                 <a:solidFill>
                   <a:srgbClr val="1A1A1A"/>
                 </a:solidFill>
@@ -13905,7 +13337,7 @@
               </a:rPr>
               <a:t>RQ1: What do AEC members see as the purpose of artifact evaluation?</a:t>
             </a:r>
-            <a:endParaRPr lang="en-US" sz="2000" dirty="0"/>
+            <a:endParaRPr lang="en-US" sz="2200" dirty="0"/>
           </a:p>
           <a:p>
             <a:pPr marL="279400" indent="-279400">
@@ -13916,7 +13348,7 @@
               <a:buChar char="•"/>
             </a:pPr>
             <a:r>
-              <a:rPr lang="en-US" sz="2000" dirty="0">
+              <a:rPr lang="en-US" sz="2200" dirty="0">
                 <a:solidFill>
                   <a:srgbClr val="1A1A1A"/>
                 </a:solidFill>
@@ -13926,7 +13358,7 @@
               </a:rPr>
               <a:t>RQ2: What do they expect from an artifact as reviewers?</a:t>
             </a:r>
-            <a:endParaRPr lang="en-US" sz="2000" dirty="0"/>
+            <a:endParaRPr lang="en-US" sz="2200" dirty="0"/>
           </a:p>
           <a:p>
             <a:pPr marL="279400" indent="-279400">
@@ -13937,7 +13369,7 @@
               <a:buChar char="•"/>
             </a:pPr>
             <a:r>
-              <a:rPr lang="en-US" sz="2000" dirty="0">
+              <a:rPr lang="en-US" sz="2200" dirty="0">
                 <a:solidFill>
                   <a:srgbClr val="1A1A1A"/>
                 </a:solidFill>
@@ -13947,7 +13379,7 @@
               </a:rPr>
               <a:t>RQ3: What do they expect as users of artifacts?</a:t>
             </a:r>
-            <a:endParaRPr lang="en-US" sz="2000" dirty="0"/>
+            <a:endParaRPr lang="en-US" sz="2200" dirty="0"/>
           </a:p>
           <a:p>
             <a:pPr marL="279400" indent="-279400">
@@ -13958,7 +13390,7 @@
               <a:buChar char="•"/>
             </a:pPr>
             <a:r>
-              <a:rPr lang="en-US" sz="2000" dirty="0">
+              <a:rPr lang="en-US" sz="2200" dirty="0">
                 <a:solidFill>
                   <a:srgbClr val="1A1A1A"/>
                 </a:solidFill>
@@ -13968,7 +13400,7 @@
               </a:rPr>
               <a:t>Pre-study: what do calls for artifacts and ACM guidelines demand?</a:t>
             </a:r>
-            <a:endParaRPr lang="en-US" sz="2000" dirty="0"/>
+            <a:endParaRPr lang="en-US" sz="2200" dirty="0"/>
           </a:p>
         </p:txBody>
       </p:sp>
@@ -14053,8 +13485,8 @@
         </p:nvSpPr>
         <p:spPr>
           <a:xfrm>
-            <a:off x="640080" y="411480"/>
-            <a:ext cx="10911535" cy="365760"/>
+            <a:off x="640080" y="365760"/>
+            <a:ext cx="10911535" cy="822960"/>
           </a:xfrm>
           <a:prstGeom prst="rect">
             <a:avLst/>
@@ -14063,14 +13495,14 @@
           <a:ln/>
         </p:spPr>
         <p:txBody>
-          <a:bodyPr wrap="square" lIns="0" tIns="0" rIns="0" bIns="0" rtlCol="0" anchor="t"/>
+          <a:bodyPr wrap="square" lIns="0" tIns="0" rIns="0" bIns="0" rtlCol="0" anchor="ctr"/>
           <a:lstStyle/>
           <a:p>
             <a:pPr indent="0" marL="0">
               <a:buNone/>
             </a:pPr>
             <a:r>
-              <a:rPr lang="en-US" sz="1600" b="1" spc="100" kern="0" dirty="0">
+              <a:rPr lang="en-US" sz="4000" b="1" dirty="0">
                 <a:solidFill>
                   <a:srgbClr val="00883A"/>
                 </a:solidFill>
@@ -14080,58 +13512,19 @@
               </a:rPr>
               <a:t>Methodology</a:t>
             </a:r>
-            <a:endParaRPr lang="en-US" sz="1600" dirty="0"/>
-          </a:p>
-        </p:txBody>
-      </p:sp>
-      <p:sp>
-        <p:nvSpPr>
-          <p:cNvPr id="3" name="Text 1"/>
-          <p:cNvSpPr txBox="1"/>
-          <p:nvPr/>
-        </p:nvSpPr>
-        <p:spPr>
-          <a:xfrm>
-            <a:off x="640080" y="822960"/>
-            <a:ext cx="10911535" cy="1188720"/>
-          </a:xfrm>
-          <a:prstGeom prst="rect">
-            <a:avLst/>
-          </a:prstGeom>
-          <a:noFill/>
-          <a:ln/>
-        </p:spPr>
-        <p:txBody>
-          <a:bodyPr wrap="square" lIns="0" tIns="0" rIns="0" bIns="0" rtlCol="0" anchor="t"/>
-          <a:lstStyle/>
-          <a:p>
-            <a:pPr indent="0" marL="0">
-              <a:buNone/>
-            </a:pPr>
-            <a:r>
-              <a:rPr lang="en-US" sz="2800" b="1" dirty="0">
-                <a:solidFill>
-                  <a:srgbClr val="1A1A1A"/>
-                </a:solidFill>
-                <a:latin typeface="Arial" pitchFamily="34" charset="0"/>
-                <a:ea typeface="Arial" pitchFamily="34" charset="-122"/>
-                <a:cs typeface="Arial" pitchFamily="34" charset="-120"/>
-              </a:rPr>
-              <a:t>A document study plus a qualitative survey of reviewers</a:t>
-            </a:r>
-            <a:endParaRPr lang="en-US" sz="2800" dirty="0"/>
-          </a:p>
-        </p:txBody>
-      </p:sp>
-      <p:sp>
-        <p:nvSpPr>
-          <p:cNvPr id="4" name="panel0"/>
+            <a:endParaRPr lang="en-US" sz="4000" dirty="0"/>
+          </a:p>
+        </p:txBody>
+      </p:sp>
+      <p:sp>
+        <p:nvSpPr>
+          <p:cNvPr id="3" name="panel0"/>
           <p:cNvSpPr/>
           <p:nvPr/>
         </p:nvSpPr>
         <p:spPr>
           <a:xfrm>
-            <a:off x="640080" y="2103120"/>
+            <a:off x="640080" y="1463040"/>
             <a:ext cx="3454298" cy="1051560"/>
           </a:xfrm>
           <a:prstGeom prst="roundRect">
@@ -14152,14 +13545,53 @@
       </p:sp>
       <p:sp>
         <p:nvSpPr>
+          <p:cNvPr id="4" name="Text 2"/>
+          <p:cNvSpPr txBox="1"/>
+          <p:nvPr/>
+        </p:nvSpPr>
+        <p:spPr>
+          <a:xfrm>
+            <a:off x="868680" y="1572768"/>
+            <a:ext cx="1645920" cy="822960"/>
+          </a:xfrm>
+          <a:prstGeom prst="rect">
+            <a:avLst/>
+          </a:prstGeom>
+          <a:noFill/>
+          <a:ln/>
+        </p:spPr>
+        <p:txBody>
+          <a:bodyPr wrap="square" lIns="0" tIns="0" rIns="0" bIns="0" rtlCol="0" anchor="ctr"/>
+          <a:lstStyle/>
+          <a:p>
+            <a:pPr indent="0" marL="0">
+              <a:buNone/>
+            </a:pPr>
+            <a:r>
+              <a:rPr lang="en-US" sz="3600" b="1" dirty="0">
+                <a:solidFill>
+                  <a:srgbClr val="00883A"/>
+                </a:solidFill>
+                <a:latin typeface="Arial" pitchFamily="34" charset="0"/>
+                <a:ea typeface="Arial" pitchFamily="34" charset="-122"/>
+                <a:cs typeface="Arial" pitchFamily="34" charset="-120"/>
+              </a:rPr>
+              <a:t>79</a:t>
+            </a:r>
+            <a:endParaRPr lang="en-US" sz="3600" dirty="0"/>
+          </a:p>
+        </p:txBody>
+      </p:sp>
+      <p:sp>
+        <p:nvSpPr>
           <p:cNvPr id="5" name="Text 3"/>
           <p:cNvSpPr txBox="1"/>
           <p:nvPr/>
         </p:nvSpPr>
         <p:spPr>
           <a:xfrm>
-            <a:off x="868680" y="2212848"/>
-            <a:ext cx="1645920" cy="822960"/>
+            <a:off x="2468880" y="1572768"/>
+            <a:ext cx="1442618" cy="822960"/>
           </a:xfrm>
           <a:prstGeom prst="rect">
             <a:avLst/>
@@ -14175,45 +13607,6 @@
               <a:buNone/>
             </a:pPr>
             <a:r>
-              <a:rPr lang="en-US" sz="3600" b="1" dirty="0">
-                <a:solidFill>
-                  <a:srgbClr val="00883A"/>
-                </a:solidFill>
-                <a:latin typeface="Arial" pitchFamily="34" charset="0"/>
-                <a:ea typeface="Arial" pitchFamily="34" charset="-122"/>
-                <a:cs typeface="Arial" pitchFamily="34" charset="-120"/>
-              </a:rPr>
-              <a:t>79</a:t>
-            </a:r>
-            <a:endParaRPr lang="en-US" sz="3600" dirty="0"/>
-          </a:p>
-        </p:txBody>
-      </p:sp>
-      <p:sp>
-        <p:nvSpPr>
-          <p:cNvPr id="6" name="Text 4"/>
-          <p:cNvSpPr txBox="1"/>
-          <p:nvPr/>
-        </p:nvSpPr>
-        <p:spPr>
-          <a:xfrm>
-            <a:off x="2468880" y="2212848"/>
-            <a:ext cx="1442618" cy="822960"/>
-          </a:xfrm>
-          <a:prstGeom prst="rect">
-            <a:avLst/>
-          </a:prstGeom>
-          <a:noFill/>
-          <a:ln/>
-        </p:spPr>
-        <p:txBody>
-          <a:bodyPr wrap="square" lIns="0" tIns="0" rIns="0" bIns="0" rtlCol="0" anchor="ctr"/>
-          <a:lstStyle/>
-          <a:p>
-            <a:pPr indent="0" marL="0">
-              <a:buNone/>
-            </a:pPr>
-            <a:r>
               <a:rPr lang="en-US" sz="1800" dirty="0">
                 <a:solidFill>
                   <a:srgbClr val="5F6368"/>
@@ -14230,13 +13623,13 @@
       </p:sp>
       <p:sp>
         <p:nvSpPr>
-          <p:cNvPr id="7" name="panel1"/>
+          <p:cNvPr id="6" name="panel1"/>
           <p:cNvSpPr/>
           <p:nvPr/>
         </p:nvSpPr>
         <p:spPr>
           <a:xfrm>
-            <a:off x="4368698" y="2103120"/>
+            <a:off x="4368698" y="1463040"/>
             <a:ext cx="3454298" cy="1051560"/>
           </a:xfrm>
           <a:prstGeom prst="roundRect">
@@ -14257,14 +13650,53 @@
       </p:sp>
       <p:sp>
         <p:nvSpPr>
+          <p:cNvPr id="7" name="Text 5"/>
+          <p:cNvSpPr txBox="1"/>
+          <p:nvPr/>
+        </p:nvSpPr>
+        <p:spPr>
+          <a:xfrm>
+            <a:off x="4597298" y="1572768"/>
+            <a:ext cx="1645920" cy="822960"/>
+          </a:xfrm>
+          <a:prstGeom prst="rect">
+            <a:avLst/>
+          </a:prstGeom>
+          <a:noFill/>
+          <a:ln/>
+        </p:spPr>
+        <p:txBody>
+          <a:bodyPr wrap="square" lIns="0" tIns="0" rIns="0" bIns="0" rtlCol="0" anchor="ctr"/>
+          <a:lstStyle/>
+          <a:p>
+            <a:pPr indent="0" marL="0">
+              <a:buNone/>
+            </a:pPr>
+            <a:r>
+              <a:rPr lang="en-US" sz="3600" b="1" dirty="0">
+                <a:solidFill>
+                  <a:srgbClr val="00883A"/>
+                </a:solidFill>
+                <a:latin typeface="Arial" pitchFamily="34" charset="0"/>
+                <a:ea typeface="Arial" pitchFamily="34" charset="-122"/>
+                <a:cs typeface="Arial" pitchFamily="34" charset="-120"/>
+              </a:rPr>
+              <a:t>1034</a:t>
+            </a:r>
+            <a:endParaRPr lang="en-US" sz="3600" dirty="0"/>
+          </a:p>
+        </p:txBody>
+      </p:sp>
+      <p:sp>
+        <p:nvSpPr>
           <p:cNvPr id="8" name="Text 6"/>
           <p:cNvSpPr txBox="1"/>
           <p:nvPr/>
         </p:nvSpPr>
         <p:spPr>
           <a:xfrm>
-            <a:off x="4597298" y="2212848"/>
-            <a:ext cx="1645920" cy="822960"/>
+            <a:off x="6197498" y="1572768"/>
+            <a:ext cx="1442618" cy="822960"/>
           </a:xfrm>
           <a:prstGeom prst="rect">
             <a:avLst/>
@@ -14280,45 +13712,6 @@
               <a:buNone/>
             </a:pPr>
             <a:r>
-              <a:rPr lang="en-US" sz="3600" b="1" dirty="0">
-                <a:solidFill>
-                  <a:srgbClr val="00883A"/>
-                </a:solidFill>
-                <a:latin typeface="Arial" pitchFamily="34" charset="0"/>
-                <a:ea typeface="Arial" pitchFamily="34" charset="-122"/>
-                <a:cs typeface="Arial" pitchFamily="34" charset="-120"/>
-              </a:rPr>
-              <a:t>1034</a:t>
-            </a:r>
-            <a:endParaRPr lang="en-US" sz="3600" dirty="0"/>
-          </a:p>
-        </p:txBody>
-      </p:sp>
-      <p:sp>
-        <p:nvSpPr>
-          <p:cNvPr id="9" name="Text 7"/>
-          <p:cNvSpPr txBox="1"/>
-          <p:nvPr/>
-        </p:nvSpPr>
-        <p:spPr>
-          <a:xfrm>
-            <a:off x="6197498" y="2212848"/>
-            <a:ext cx="1442618" cy="822960"/>
-          </a:xfrm>
-          <a:prstGeom prst="rect">
-            <a:avLst/>
-          </a:prstGeom>
-          <a:noFill/>
-          <a:ln/>
-        </p:spPr>
-        <p:txBody>
-          <a:bodyPr wrap="square" lIns="0" tIns="0" rIns="0" bIns="0" rtlCol="0" anchor="ctr"/>
-          <a:lstStyle/>
-          <a:p>
-            <a:pPr indent="0" marL="0">
-              <a:buNone/>
-            </a:pPr>
-            <a:r>
               <a:rPr lang="en-US" sz="1800" dirty="0">
                 <a:solidFill>
                   <a:srgbClr val="5F6368"/>
@@ -14335,13 +13728,13 @@
       </p:sp>
       <p:sp>
         <p:nvSpPr>
-          <p:cNvPr id="10" name="panel2"/>
+          <p:cNvPr id="9" name="panel2"/>
           <p:cNvSpPr/>
           <p:nvPr/>
         </p:nvSpPr>
         <p:spPr>
           <a:xfrm>
-            <a:off x="8097317" y="2103120"/>
+            <a:off x="8097317" y="1463040"/>
             <a:ext cx="3454298" cy="1051560"/>
           </a:xfrm>
           <a:prstGeom prst="roundRect">
@@ -14362,14 +13755,53 @@
       </p:sp>
       <p:sp>
         <p:nvSpPr>
+          <p:cNvPr id="10" name="Text 8"/>
+          <p:cNvSpPr txBox="1"/>
+          <p:nvPr/>
+        </p:nvSpPr>
+        <p:spPr>
+          <a:xfrm>
+            <a:off x="8325917" y="1572768"/>
+            <a:ext cx="1645920" cy="822960"/>
+          </a:xfrm>
+          <a:prstGeom prst="rect">
+            <a:avLst/>
+          </a:prstGeom>
+          <a:noFill/>
+          <a:ln/>
+        </p:spPr>
+        <p:txBody>
+          <a:bodyPr wrap="square" lIns="0" tIns="0" rIns="0" bIns="0" rtlCol="0" anchor="ctr"/>
+          <a:lstStyle/>
+          <a:p>
+            <a:pPr indent="0" marL="0">
+              <a:buNone/>
+            </a:pPr>
+            <a:r>
+              <a:rPr lang="en-US" sz="3600" b="1" dirty="0">
+                <a:solidFill>
+                  <a:srgbClr val="00883A"/>
+                </a:solidFill>
+                <a:latin typeface="Arial" pitchFamily="34" charset="0"/>
+                <a:ea typeface="Arial" pitchFamily="34" charset="-122"/>
+                <a:cs typeface="Arial" pitchFamily="34" charset="-120"/>
+              </a:rPr>
+              <a:t>257</a:t>
+            </a:r>
+            <a:endParaRPr lang="en-US" sz="3600" dirty="0"/>
+          </a:p>
+        </p:txBody>
+      </p:sp>
+      <p:sp>
+        <p:nvSpPr>
           <p:cNvPr id="11" name="Text 9"/>
           <p:cNvSpPr txBox="1"/>
           <p:nvPr/>
         </p:nvSpPr>
         <p:spPr>
           <a:xfrm>
-            <a:off x="8325917" y="2212848"/>
-            <a:ext cx="1645920" cy="822960"/>
+            <a:off x="9926117" y="1572768"/>
+            <a:ext cx="1442618" cy="822960"/>
           </a:xfrm>
           <a:prstGeom prst="rect">
             <a:avLst/>
@@ -14385,17 +13817,17 @@
               <a:buNone/>
             </a:pPr>
             <a:r>
-              <a:rPr lang="en-US" sz="3600" b="1" dirty="0">
-                <a:solidFill>
-                  <a:srgbClr val="00883A"/>
-                </a:solidFill>
-                <a:latin typeface="Arial" pitchFamily="34" charset="0"/>
-                <a:ea typeface="Arial" pitchFamily="34" charset="-122"/>
-                <a:cs typeface="Arial" pitchFamily="34" charset="-120"/>
-              </a:rPr>
-              <a:t>257</a:t>
-            </a:r>
-            <a:endParaRPr lang="en-US" sz="3600" dirty="0"/>
+              <a:rPr lang="en-US" sz="1800" dirty="0">
+                <a:solidFill>
+                  <a:srgbClr val="5F6368"/>
+                </a:solidFill>
+                <a:latin typeface="Arial" pitchFamily="34" charset="0"/>
+                <a:ea typeface="Arial" pitchFamily="34" charset="-122"/>
+                <a:cs typeface="Arial" pitchFamily="34" charset="-120"/>
+              </a:rPr>
+              <a:t>responses</a:t>
+            </a:r>
+            <a:endParaRPr lang="en-US" sz="1800" dirty="0"/>
           </a:p>
         </p:txBody>
       </p:sp>
@@ -14407,47 +13839,8 @@
         </p:nvSpPr>
         <p:spPr>
           <a:xfrm>
-            <a:off x="9926117" y="2212848"/>
-            <a:ext cx="1442618" cy="822960"/>
-          </a:xfrm>
-          <a:prstGeom prst="rect">
-            <a:avLst/>
-          </a:prstGeom>
-          <a:noFill/>
-          <a:ln/>
-        </p:spPr>
-        <p:txBody>
-          <a:bodyPr wrap="square" lIns="0" tIns="0" rIns="0" bIns="0" rtlCol="0" anchor="ctr"/>
-          <a:lstStyle/>
-          <a:p>
-            <a:pPr indent="0" marL="0">
-              <a:buNone/>
-            </a:pPr>
-            <a:r>
-              <a:rPr lang="en-US" sz="1800" dirty="0">
-                <a:solidFill>
-                  <a:srgbClr val="5F6368"/>
-                </a:solidFill>
-                <a:latin typeface="Arial" pitchFamily="34" charset="0"/>
-                <a:ea typeface="Arial" pitchFamily="34" charset="-122"/>
-                <a:cs typeface="Arial" pitchFamily="34" charset="-120"/>
-              </a:rPr>
-              <a:t>responses</a:t>
-            </a:r>
-            <a:endParaRPr lang="en-US" sz="1800" dirty="0"/>
-          </a:p>
-        </p:txBody>
-      </p:sp>
-      <p:sp>
-        <p:nvSpPr>
-          <p:cNvPr id="13" name="Text 11"/>
-          <p:cNvSpPr txBox="1"/>
-          <p:nvPr/>
-        </p:nvSpPr>
-        <p:spPr>
-          <a:xfrm>
-            <a:off x="640080" y="3429000"/>
-            <a:ext cx="10911535" cy="2788920"/>
+            <a:off x="640080" y="2788920"/>
+            <a:ext cx="10911535" cy="3429000"/>
           </a:xfrm>
           <a:prstGeom prst="rect">
             <a:avLst/>
@@ -14625,8 +14018,8 @@
         </p:nvSpPr>
         <p:spPr>
           <a:xfrm>
-            <a:off x="640080" y="411480"/>
-            <a:ext cx="10911535" cy="365760"/>
+            <a:off x="640080" y="365760"/>
+            <a:ext cx="10911535" cy="822960"/>
           </a:xfrm>
           <a:prstGeom prst="rect">
             <a:avLst/>
@@ -14635,14 +14028,14 @@
           <a:ln/>
         </p:spPr>
         <p:txBody>
-          <a:bodyPr wrap="square" lIns="0" tIns="0" rIns="0" bIns="0" rtlCol="0" anchor="t"/>
+          <a:bodyPr wrap="square" lIns="0" tIns="0" rIns="0" bIns="0" rtlCol="0" anchor="ctr"/>
           <a:lstStyle/>
           <a:p>
             <a:pPr indent="0" marL="0">
               <a:buNone/>
             </a:pPr>
             <a:r>
-              <a:rPr lang="en-US" sz="1600" b="1" spc="100" kern="0" dirty="0">
+              <a:rPr lang="en-US" sz="4000" b="1" dirty="0">
                 <a:solidFill>
                   <a:srgbClr val="00883A"/>
                 </a:solidFill>
@@ -14652,7 +14045,7 @@
               </a:rPr>
               <a:t>Results</a:t>
             </a:r>
-            <a:endParaRPr lang="en-US" sz="1600" dirty="0"/>
+            <a:endParaRPr lang="en-US" sz="4000" dirty="0"/>
           </a:p>
         </p:txBody>
       </p:sp>
@@ -14664,47 +14057,8 @@
         </p:nvSpPr>
         <p:spPr>
           <a:xfrm>
-            <a:off x="640080" y="822960"/>
-            <a:ext cx="10911535" cy="1188720"/>
-          </a:xfrm>
-          <a:prstGeom prst="rect">
-            <a:avLst/>
-          </a:prstGeom>
-          <a:noFill/>
-          <a:ln/>
-        </p:spPr>
-        <p:txBody>
-          <a:bodyPr wrap="square" lIns="0" tIns="0" rIns="0" bIns="0" rtlCol="0" anchor="t"/>
-          <a:lstStyle/>
-          <a:p>
-            <a:pPr indent="0" marL="0">
-              <a:buNone/>
-            </a:pPr>
-            <a:r>
-              <a:rPr lang="en-US" sz="2800" b="1" dirty="0">
-                <a:solidFill>
-                  <a:srgbClr val="1A1A1A"/>
-                </a:solidFill>
-                <a:latin typeface="Arial" pitchFamily="34" charset="0"/>
-                <a:ea typeface="Arial" pitchFamily="34" charset="-122"/>
-                <a:cs typeface="Arial" pitchFamily="34" charset="-120"/>
-              </a:rPr>
-              <a:t>The only real threshold anywhere: set up and test in under 30 minutes</a:t>
-            </a:r>
-            <a:endParaRPr lang="en-US" sz="2800" dirty="0"/>
-          </a:p>
-        </p:txBody>
-      </p:sp>
-      <p:sp>
-        <p:nvSpPr>
-          <p:cNvPr id="4" name="Text 2"/>
-          <p:cNvSpPr txBox="1"/>
-          <p:nvPr/>
-        </p:nvSpPr>
-        <p:spPr>
-          <a:xfrm>
-            <a:off x="640080" y="2103120"/>
-            <a:ext cx="10911535" cy="4114800"/>
+            <a:off x="640080" y="1463040"/>
+            <a:ext cx="10911535" cy="4754880"/>
           </a:xfrm>
           <a:prstGeom prst="rect">
             <a:avLst/>
@@ -14724,7 +14078,7 @@
               <a:buChar char="•"/>
             </a:pPr>
             <a:r>
-              <a:rPr lang="en-US" sz="2000" dirty="0">
+              <a:rPr lang="en-US" sz="2200" dirty="0">
                 <a:solidFill>
                   <a:srgbClr val="1A1A1A"/>
                 </a:solidFill>
@@ -14734,7 +14088,7 @@
               </a:rPr>
               <a:t>Calls name criteria (documentation 46, consistency 45) but no levels (pp. 471–472)</a:t>
             </a:r>
-            <a:endParaRPr lang="en-US" sz="2000" dirty="0"/>
+            <a:endParaRPr lang="en-US" sz="2200" dirty="0"/>
           </a:p>
           <a:p>
             <a:pPr marL="279400" indent="-279400">
@@ -14745,7 +14099,7 @@
               <a:buChar char="•"/>
             </a:pPr>
             <a:r>
-              <a:rPr lang="en-US" sz="2000" dirty="0">
+              <a:rPr lang="en-US" sz="2200" dirty="0">
                 <a:solidFill>
                   <a:srgbClr val="1A1A1A"/>
                 </a:solidFill>
@@ -14755,7 +14109,7 @@
               </a:rPr>
               <a:t>Purpose drifts: from checking claims to reproducibility and reuse (RQ1)</a:t>
             </a:r>
-            <a:endParaRPr lang="en-US" sz="2000" dirty="0"/>
+            <a:endParaRPr lang="en-US" sz="2200" dirty="0"/>
           </a:p>
           <a:p>
             <a:pPr marL="279400" indent="-279400">
@@ -14766,7 +14120,7 @@
               <a:buChar char="•"/>
             </a:pPr>
             <a:r>
-              <a:rPr lang="en-US" sz="2000" dirty="0">
+              <a:rPr lang="en-US" sz="2200" dirty="0">
                 <a:solidFill>
                   <a:srgbClr val="1A1A1A"/>
                 </a:solidFill>
@@ -14776,7 +14130,7 @@
               </a:rPr>
               <a:t>Reviewers want reproducible results, users want reusable tools (RQ2, RQ3)</a:t>
             </a:r>
-            <a:endParaRPr lang="en-US" sz="2000" dirty="0"/>
+            <a:endParaRPr lang="en-US" sz="2200" dirty="0"/>
           </a:p>
           <a:p>
             <a:pPr marL="279400" indent="-279400">
@@ -14787,7 +14141,7 @@
               <a:buChar char="•"/>
             </a:pPr>
             <a:r>
-              <a:rPr lang="en-US" sz="2000" dirty="0">
+              <a:rPr lang="en-US" sz="2200" dirty="0">
                 <a:solidFill>
                   <a:srgbClr val="1A1A1A"/>
                 </a:solidFill>
@@ -14797,7 +14151,7 @@
               </a:rPr>
               <a:t>20 users see a difference between evaluated and unevaluated artifacts, 34 do not (p. 477)</a:t>
             </a:r>
-            <a:endParaRPr lang="en-US" sz="2000" dirty="0"/>
+            <a:endParaRPr lang="en-US" sz="2200" dirty="0"/>
           </a:p>
           <a:p>
             <a:pPr marL="279400" indent="-279400">
@@ -14808,7 +14162,7 @@
               <a:buChar char="•"/>
             </a:pPr>
             <a:r>
-              <a:rPr lang="en-US" sz="2000" dirty="0">
+              <a:rPr lang="en-US" sz="2200" dirty="0">
                 <a:solidFill>
                   <a:srgbClr val="1A1A1A"/>
                 </a:solidFill>
@@ -14818,7 +14172,7 @@
               </a:rPr>
               <a:t>Most reviewers serve once; a third never submitted an artifact (pp. 473, 478)</a:t>
             </a:r>
-            <a:endParaRPr lang="en-US" sz="2000" dirty="0"/>
+            <a:endParaRPr lang="en-US" sz="2200" dirty="0"/>
           </a:p>
         </p:txBody>
       </p:sp>
@@ -14903,8 +14257,8 @@
         </p:nvSpPr>
         <p:spPr>
           <a:xfrm>
-            <a:off x="640080" y="411480"/>
-            <a:ext cx="10911535" cy="365760"/>
+            <a:off x="640080" y="365760"/>
+            <a:ext cx="10911535" cy="822960"/>
           </a:xfrm>
           <a:prstGeom prst="rect">
             <a:avLst/>
@@ -14913,14 +14267,14 @@
           <a:ln/>
         </p:spPr>
         <p:txBody>
-          <a:bodyPr wrap="square" lIns="0" tIns="0" rIns="0" bIns="0" rtlCol="0" anchor="t"/>
+          <a:bodyPr wrap="square" lIns="0" tIns="0" rIns="0" bIns="0" rtlCol="0" anchor="ctr"/>
           <a:lstStyle/>
           <a:p>
             <a:pPr indent="0" marL="0">
               <a:buNone/>
             </a:pPr>
             <a:r>
-              <a:rPr lang="en-US" sz="1600" b="1" spc="100" kern="0" dirty="0">
+              <a:rPr lang="en-US" sz="4000" b="1" dirty="0">
                 <a:solidFill>
                   <a:srgbClr val="00883A"/>
                 </a:solidFill>
@@ -14928,9 +14282,9 @@
                 <a:ea typeface="Arial" pitchFamily="34" charset="-122"/>
                 <a:cs typeface="Arial" pitchFamily="34" charset="-120"/>
               </a:rPr>
-              <a:t>Validity and discussion</a:t>
-            </a:r>
-            <a:endParaRPr lang="en-US" sz="1600" dirty="0"/>
+              <a:t>Validity / Discussion</a:t>
+            </a:r>
+            <a:endParaRPr lang="en-US" sz="4000" dirty="0"/>
           </a:p>
         </p:txBody>
       </p:sp>
@@ -14942,47 +14296,8 @@
         </p:nvSpPr>
         <p:spPr>
           <a:xfrm>
-            <a:off x="640080" y="822960"/>
-            <a:ext cx="10911535" cy="1188720"/>
-          </a:xfrm>
-          <a:prstGeom prst="rect">
-            <a:avLst/>
-          </a:prstGeom>
-          <a:noFill/>
-          <a:ln/>
-        </p:spPr>
-        <p:txBody>
-          <a:bodyPr wrap="square" lIns="0" tIns="0" rIns="0" bIns="0" rtlCol="0" anchor="t"/>
-          <a:lstStyle/>
-          <a:p>
-            <a:pPr indent="0" marL="0">
-              <a:buNone/>
-            </a:pPr>
-            <a:r>
-              <a:rPr lang="en-US" sz="2800" b="1" dirty="0">
-                <a:solidFill>
-                  <a:srgbClr val="1A1A1A"/>
-                </a:solidFill>
-                <a:latin typeface="Arial" pitchFamily="34" charset="0"/>
-                <a:ea typeface="Arial" pitchFamily="34" charset="-122"/>
-                <a:cs typeface="Arial" pitchFamily="34" charset="-120"/>
-              </a:rPr>
-              <a:t>The authors accept selection bias to keep questions understood</a:t>
-            </a:r>
-            <a:endParaRPr lang="en-US" sz="2800" dirty="0"/>
-          </a:p>
-        </p:txBody>
-      </p:sp>
-      <p:sp>
-        <p:nvSpPr>
-          <p:cNvPr id="4" name="Text 2"/>
-          <p:cNvSpPr txBox="1"/>
-          <p:nvPr/>
-        </p:nvSpPr>
-        <p:spPr>
-          <a:xfrm>
-            <a:off x="640080" y="2103120"/>
-            <a:ext cx="10911535" cy="4114800"/>
+            <a:off x="640080" y="1463040"/>
+            <a:ext cx="10911535" cy="4754880"/>
           </a:xfrm>
           <a:prstGeom prst="rect">
             <a:avLst/>
@@ -15002,7 +14317,7 @@
               <a:buChar char="•"/>
             </a:pPr>
             <a:r>
-              <a:rPr lang="en-US" sz="2000" dirty="0">
+              <a:rPr lang="en-US" sz="2200" dirty="0">
                 <a:solidFill>
                   <a:srgbClr val="1A1A1A"/>
                 </a:solidFill>
@@ -15012,7 +14327,7 @@
               </a:rPr>
               <a:t>Only AEC members asked, mostly PL: a deliberate trade-off (p. 479)</a:t>
             </a:r>
-            <a:endParaRPr lang="en-US" sz="2000" dirty="0"/>
+            <a:endParaRPr lang="en-US" sz="2200" dirty="0"/>
           </a:p>
           <a:p>
             <a:pPr marL="279400" indent="-279400">
@@ -15023,7 +14338,7 @@
               <a:buChar char="•"/>
             </a:pPr>
             <a:r>
-              <a:rPr lang="en-US" sz="2000" dirty="0">
+              <a:rPr lang="en-US" sz="2200" dirty="0">
                 <a:solidFill>
                   <a:srgbClr val="1A1A1A"/>
                 </a:solidFill>
@@ -15033,7 +14348,7 @@
               </a:rPr>
               <a:t>Card sorting by one labeller, checked by a second, no agreement measure</a:t>
             </a:r>
-            <a:endParaRPr lang="en-US" sz="2000" dirty="0"/>
+            <a:endParaRPr lang="en-US" sz="2200" dirty="0"/>
           </a:p>
           <a:p>
             <a:pPr marL="279400" indent="-279400">
@@ -15044,7 +14359,7 @@
               <a:buChar char="•"/>
             </a:pPr>
             <a:r>
-              <a:rPr lang="en-US" sz="2000" dirty="0">
+              <a:rPr lang="en-US" sz="2200" dirty="0">
                 <a:solidFill>
                   <a:srgbClr val="1A1A1A"/>
                 </a:solidFill>
@@ -15054,7 +14369,7 @@
               </a:rPr>
               <a:t>Implications: purpose and standards per community, written into the calls</a:t>
             </a:r>
-            <a:endParaRPr lang="en-US" sz="2000" dirty="0"/>
+            <a:endParaRPr lang="en-US" sz="2200" dirty="0"/>
           </a:p>
           <a:p>
             <a:pPr marL="279400" indent="-279400">
@@ -15065,7 +14380,7 @@
               <a:buChar char="•"/>
             </a:pPr>
             <a:r>
-              <a:rPr lang="en-US" sz="2000" dirty="0">
+              <a:rPr lang="en-US" sz="2200" dirty="0">
                 <a:solidFill>
                   <a:srgbClr val="1A1A1A"/>
                 </a:solidFill>
@@ -15075,7 +14390,7 @@
               </a:rPr>
               <a:t>Brief one-time reviewers; couple AE more tightly to acceptance (p. 479)</a:t>
             </a:r>
-            <a:endParaRPr lang="en-US" sz="2000" dirty="0"/>
+            <a:endParaRPr lang="en-US" sz="2200" dirty="0"/>
           </a:p>
         </p:txBody>
       </p:sp>

--- a/Vorl_2/slides/lecture2-style-B.pptx
+++ b/Vorl_2/slides/lecture2-style-B.pptx
@@ -137,13 +137,13 @@
   <p:extLst>
     <p:ext uri="{521415D9-36F7-43E2-AB2F-B90AF26B5E84}">
       <p14:sectionLst xmlns:p14="http://schemas.microsoft.com/office/powerpoint/2010/main">
-        <p14:section name="Opening" id="{32ef97f3-c670-5141-b806-950a2eb3b0a0}">
+        <p14:section name="Opening" id="{1a004be6-2fd6-b06f-a0ab-15be5a1caadc}">
           <p14:sldIdLst>
             <p14:sldId id="256"/>
             <p14:sldId id="257"/>
           </p14:sldIdLst>
         </p14:section>
-        <p14:section name="Paper 1" id="{cf012760-16aa-aa46-a057-75098f840838}">
+        <p14:section name="Paper 1" id="{388f2aca-ca81-15fd-513a-8a5d519a775b}">
           <p14:sldIdLst>
             <p14:sldId id="258"/>
             <p14:sldId id="259"/>
@@ -157,7 +157,7 @@
             <p14:sldId id="267"/>
           </p14:sldIdLst>
         </p14:section>
-        <p14:section name="Paper 2" id="{25041ae3-4e37-254e-70c3-ca30288f845c}">
+        <p14:section name="Paper 2" id="{c873cca1-eec6-1ad6-fba6-6597845128ea}">
           <p14:sldIdLst>
             <p14:sldId id="268"/>
             <p14:sldId id="269"/>
@@ -171,7 +171,7 @@
             <p14:sldId id="277"/>
           </p14:sldIdLst>
         </p14:section>
-        <p14:section name="Cross Comparison" id="{9e1215ad-b6b7-33d9-d689-049e2a799ce1}">
+        <p14:section name="Cross Comparison" id="{00678f4c-f69d-7d58-8653-1547f1ca7d91}">
           <p14:sldIdLst>
             <p14:sldId id="278"/>
             <p14:sldId id="279"/>
@@ -180,14 +180,14 @@
             <p14:sldId id="282"/>
           </p14:sldIdLst>
         </p14:section>
-        <p14:section name="Criticism" id="{ebf04185-6457-c658-a734-92b5cd8c9186}">
+        <p14:section name="Criticism" id="{8f752d6b-b43d-f2b6-3321-1dcb30d99311}">
           <p14:sldIdLst>
             <p14:sldId id="283"/>
             <p14:sldId id="284"/>
             <p14:sldId id="285"/>
           </p14:sldIdLst>
         </p14:section>
-        <p14:section name="Close" id="{b4900a08-eb11-4f4f-4304-954fc19e6082}">
+        <p14:section name="Close" id="{e6b2780b-1f29-c60e-c03b-7c33c62c080f}">
           <p14:sldIdLst>
             <p14:sldId id="286"/>
           </p14:sldIdLst>
@@ -3332,45 +3332,6 @@
           <a:chExt cx="0" cy="0"/>
         </a:xfrm>
       </p:grpSpPr>
-      <p:sp>
-        <p:nvSpPr>
-          <p:cNvPr id="2" name="Text 0"/>
-          <p:cNvSpPr/>
-          <p:nvPr/>
-        </p:nvSpPr>
-        <p:spPr>
-          <a:xfrm>
-            <a:off x="640080" y="6355080"/>
-            <a:ext cx="5486400" cy="320040"/>
-          </a:xfrm>
-          <a:prstGeom prst="rect">
-            <a:avLst/>
-          </a:prstGeom>
-          <a:noFill/>
-          <a:ln/>
-        </p:spPr>
-        <p:txBody>
-          <a:bodyPr wrap="square" rtlCol="0" anchor="ctr"/>
-          <a:lstStyle/>
-          <a:p>
-            <a:pPr indent="0" marL="0">
-              <a:buNone/>
-            </a:pPr>
-            <a:r>
-              <a:rPr lang="en-US" sz="1100" dirty="0">
-                <a:solidFill>
-                  <a:srgbClr val="5F6368"/>
-                </a:solidFill>
-                <a:latin typeface="Arial" pitchFamily="34" charset="0"/>
-                <a:ea typeface="Arial" pitchFamily="34" charset="-122"/>
-                <a:cs typeface="Arial" pitchFamily="34" charset="-120"/>
-              </a:rPr>
-              <a:t>Lecture 2 · Artifact evaluation</a:t>
-            </a:r>
-            <a:endParaRPr lang="en-US" sz="1100" dirty="0"/>
-          </a:p>
-        </p:txBody>
-      </p:sp>
       <p:sp>
         <p:nvSpPr>
           <p:cNvPr id="25" name="Slide Number Placeholder 0"/>

--- a/Vorl_2/slides/lecture2-style-B.pptx
+++ b/Vorl_2/slides/lecture2-style-B.pptx
@@ -36,9 +36,10 @@
     <p:sldId id="284" r:id="rId30"/>
     <p:sldId id="285" r:id="rId31"/>
     <p:sldId id="286" r:id="rId32"/>
+    <p:sldId id="287" r:id="rId33"/>
   </p:sldIdLst>
   <p:notesMasterIdLst>
-    <p:notesMasterId r:id="rId33"/>
+    <p:notesMasterId r:id="rId34"/>
   </p:notesMasterIdLst>
   <p:sldSz cx="12192000" cy="6858000"/>
   <p:notesSz cx="6858000" cy="12192000"/>
@@ -137,13 +138,13 @@
   <p:extLst>
     <p:ext uri="{521415D9-36F7-43E2-AB2F-B90AF26B5E84}">
       <p14:sectionLst xmlns:p14="http://schemas.microsoft.com/office/powerpoint/2010/main">
-        <p14:section name="Opening" id="{1a004be6-2fd6-b06f-a0ab-15be5a1caadc}">
+        <p14:section name="Opening" id="{35b3c181-067d-9381-cbc0-2442e83121d4}">
           <p14:sldIdLst>
             <p14:sldId id="256"/>
             <p14:sldId id="257"/>
           </p14:sldIdLst>
         </p14:section>
-        <p14:section name="Paper 1" id="{388f2aca-ca81-15fd-513a-8a5d519a775b}">
+        <p14:section name="Paper 1" id="{56efa8ff-466a-346c-a957-d1c81ef4f9d3}">
           <p14:sldIdLst>
             <p14:sldId id="258"/>
             <p14:sldId id="259"/>
@@ -157,7 +158,7 @@
             <p14:sldId id="267"/>
           </p14:sldIdLst>
         </p14:section>
-        <p14:section name="Paper 2" id="{c873cca1-eec6-1ad6-fba6-6597845128ea}">
+        <p14:section name="Paper 2" id="{d2031bb7-b1b7-9827-98a5-f5fca2c947b4}">
           <p14:sldIdLst>
             <p14:sldId id="268"/>
             <p14:sldId id="269"/>
@@ -171,7 +172,7 @@
             <p14:sldId id="277"/>
           </p14:sldIdLst>
         </p14:section>
-        <p14:section name="Cross Comparison" id="{00678f4c-f69d-7d58-8653-1547f1ca7d91}">
+        <p14:section name="Cross Comparison" id="{3f1278c2-e357-14fa-5185-d1803fdf6fd7}">
           <p14:sldIdLst>
             <p14:sldId id="278"/>
             <p14:sldId id="279"/>
@@ -180,16 +181,17 @@
             <p14:sldId id="282"/>
           </p14:sldIdLst>
         </p14:section>
-        <p14:section name="Criticism" id="{8f752d6b-b43d-f2b6-3321-1dcb30d99311}">
+        <p14:section name="Criticism" id="{2ec8026e-be16-fd98-cd7e-cea994998717}">
           <p14:sldIdLst>
             <p14:sldId id="283"/>
             <p14:sldId id="284"/>
             <p14:sldId id="285"/>
+            <p14:sldId id="286"/>
           </p14:sldIdLst>
         </p14:section>
-        <p14:section name="Close" id="{e6b2780b-1f29-c60e-c03b-7c33c62c080f}">
+        <p14:section name="Close" id="{63870e26-e9cc-0141-5064-99d5d19450e0}">
           <p14:sldIdLst>
-            <p14:sldId id="286"/>
+            <p14:sldId id="287"/>
           </p14:sldIdLst>
         </p14:section>
       </p14:sectionLst>
@@ -2708,7 +2710,7 @@
           <a:p>
             <a:r>
               <a:rPr lang="en-US" dirty="0"/>
-              <a:t/>
+              <a:t>Give the audience room for points they prepared in advance. If nobody starts, ask who noted a criticism we did not cover.</a:t>
             </a:r>
             <a:endParaRPr lang="en-US" dirty="0"/>
           </a:p>
@@ -2732,6 +2734,94 @@
             <a:fld id="{F7021451-1387-4CA6-816F-3879F97B5CBC}" type="slidenum">
               <a:rPr lang="en-US"/>
               <a:t>31</a:t>
+            </a:fld>
+            <a:endParaRPr lang="en-US"/>
+          </a:p>
+        </p:txBody>
+      </p:sp>
+    </p:spTree>
+    <p:extLst>
+      <p:ext uri="{BB962C8B-B14F-4D97-AF65-F5344CB8AC3E}">
+        <p14:creationId xmlns:p14="http://schemas.microsoft.com/office/powerpoint/2010/main" val="1024086991"/>
+      </p:ext>
+    </p:extLst>
+  </p:cSld>
+  <p:clrMapOvr>
+    <a:masterClrMapping/>
+  </p:clrMapOvr>
+</p:notes>
+</file>
+
+<file path=ppt/notesSlides/notesSlide32.xml><?xml version="1.0" encoding="utf-8"?>
+<p:notes xmlns:a="http://schemas.openxmlformats.org/drawingml/2006/main" xmlns:r="http://schemas.openxmlformats.org/officeDocument/2006/relationships" xmlns:p="http://schemas.openxmlformats.org/presentationml/2006/main">
+  <p:cSld>
+    <p:spTree>
+      <p:nvGrpSpPr>
+        <p:cNvPr id="1" name=""/>
+        <p:cNvGrpSpPr/>
+        <p:nvPr/>
+      </p:nvGrpSpPr>
+      <p:grpSpPr>
+        <a:xfrm>
+          <a:off x="0" y="0"/>
+          <a:ext cx="0" cy="0"/>
+          <a:chOff x="0" y="0"/>
+          <a:chExt cx="0" cy="0"/>
+        </a:xfrm>
+      </p:grpSpPr>
+      <p:sp>
+        <p:nvSpPr>
+          <p:cNvPr id="2" name="Slide Image Placeholder 1"/>
+          <p:cNvSpPr>
+            <a:spLocks noGrp="1" noRot="1" noChangeAspect="1"/>
+          </p:cNvSpPr>
+          <p:nvPr>
+            <p:ph type="sldImg"/>
+          </p:nvPr>
+        </p:nvSpPr>
+        <p:spPr/>
+      </p:sp>
+      <p:sp>
+        <p:nvSpPr>
+          <p:cNvPr id="3" name="Notes Placeholder 2"/>
+          <p:cNvSpPr>
+            <a:spLocks noGrp="1"/>
+          </p:cNvSpPr>
+          <p:nvPr>
+            <p:ph type="body" idx="1"/>
+          </p:nvPr>
+        </p:nvSpPr>
+        <p:spPr/>
+        <p:txBody>
+          <a:bodyPr/>
+          <a:lstStyle/>
+          <a:p>
+            <a:r>
+              <a:rPr lang="en-US" dirty="0"/>
+              <a:t/>
+            </a:r>
+            <a:endParaRPr lang="en-US" dirty="0"/>
+          </a:p>
+        </p:txBody>
+      </p:sp>
+      <p:sp>
+        <p:nvSpPr>
+          <p:cNvPr id="4" name="Slide Number Placeholder 3"/>
+          <p:cNvSpPr>
+            <a:spLocks noGrp="1"/>
+          </p:cNvSpPr>
+          <p:nvPr>
+            <p:ph type="sldNum" sz="quarter" idx="10"/>
+          </p:nvPr>
+        </p:nvSpPr>
+        <p:spPr/>
+        <p:txBody>
+          <a:bodyPr/>
+          <a:lstStyle/>
+          <a:p>
+            <a:fld id="{F7021451-1387-4CA6-816F-3879F97B5CBC}" type="slidenum">
+              <a:rPr lang="en-US"/>
+              <a:t>32</a:t>
             </a:fld>
             <a:endParaRPr lang="en-US"/>
           </a:p>
@@ -11940,6 +12030,224 @@
         </p:nvSpPr>
         <p:spPr>
           <a:xfrm>
+            <a:off x="640080" y="365760"/>
+            <a:ext cx="10911535" cy="822960"/>
+          </a:xfrm>
+          <a:prstGeom prst="rect">
+            <a:avLst/>
+          </a:prstGeom>
+          <a:noFill/>
+          <a:ln/>
+        </p:spPr>
+        <p:txBody>
+          <a:bodyPr wrap="square" lIns="0" tIns="0" rIns="0" bIns="0" rtlCol="0" anchor="ctr"/>
+          <a:lstStyle/>
+          <a:p>
+            <a:pPr indent="0" marL="0">
+              <a:buNone/>
+            </a:pPr>
+            <a:r>
+              <a:rPr lang="en-US" sz="4000" b="1" dirty="0">
+                <a:solidFill>
+                  <a:srgbClr val="00883A"/>
+                </a:solidFill>
+                <a:latin typeface="Arial" pitchFamily="34" charset="0"/>
+                <a:ea typeface="Arial" pitchFamily="34" charset="-122"/>
+                <a:cs typeface="Arial" pitchFamily="34" charset="-120"/>
+              </a:rPr>
+              <a:t>Open Floor</a:t>
+            </a:r>
+            <a:endParaRPr lang="en-US" sz="4000" dirty="0"/>
+          </a:p>
+        </p:txBody>
+      </p:sp>
+      <p:sp>
+        <p:nvSpPr>
+          <p:cNvPr id="3" name="Text 1"/>
+          <p:cNvSpPr txBox="1"/>
+          <p:nvPr/>
+        </p:nvSpPr>
+        <p:spPr>
+          <a:xfrm>
+            <a:off x="640080" y="1463040"/>
+            <a:ext cx="10911535" cy="4754880"/>
+          </a:xfrm>
+          <a:prstGeom prst="rect">
+            <a:avLst/>
+          </a:prstGeom>
+          <a:noFill/>
+          <a:ln/>
+        </p:spPr>
+        <p:txBody>
+          <a:bodyPr wrap="square" lIns="0" tIns="0" rIns="0" bIns="0" rtlCol="0" anchor="t"/>
+          <a:lstStyle/>
+          <a:p>
+            <a:pPr marL="279400" indent="-279400">
+              <a:spcAft>
+                <a:spcPts val="1000"/>
+              </a:spcAft>
+              <a:buSzPct val="100000"/>
+              <a:buChar char="•"/>
+            </a:pPr>
+            <a:r>
+              <a:rPr lang="en-US" sz="2200" dirty="0">
+                <a:solidFill>
+                  <a:srgbClr val="1A1A1A"/>
+                </a:solidFill>
+                <a:latin typeface="Arial" pitchFamily="34" charset="0"/>
+                <a:ea typeface="Arial" pitchFamily="34" charset="-122"/>
+                <a:cs typeface="Arial" pitchFamily="34" charset="-120"/>
+              </a:rPr>
+              <a:t>Any further discussion points you wanted to bring up?</a:t>
+            </a:r>
+            <a:endParaRPr lang="en-US" sz="2200" dirty="0"/>
+          </a:p>
+          <a:p>
+            <a:pPr marL="279400" indent="-279400">
+              <a:spcAft>
+                <a:spcPts val="1000"/>
+              </a:spcAft>
+              <a:buSzPct val="100000"/>
+              <a:buChar char="•"/>
+            </a:pPr>
+            <a:r>
+              <a:rPr lang="en-US" sz="2200" dirty="0">
+                <a:solidFill>
+                  <a:srgbClr val="1A1A1A"/>
+                </a:solidFill>
+                <a:latin typeface="Arial" pitchFamily="34" charset="0"/>
+                <a:ea typeface="Arial" pitchFamily="34" charset="-122"/>
+                <a:cs typeface="Arial" pitchFamily="34" charset="-120"/>
+              </a:rPr>
+              <a:t>Criticisms of either paper we have not covered</a:t>
+            </a:r>
+            <a:endParaRPr lang="en-US" sz="2200" dirty="0"/>
+          </a:p>
+          <a:p>
+            <a:pPr marL="279400" indent="-279400">
+              <a:spcAft>
+                <a:spcPts val="1000"/>
+              </a:spcAft>
+              <a:buSzPct val="100000"/>
+              <a:buChar char="•"/>
+            </a:pPr>
+            <a:r>
+              <a:rPr lang="en-US" sz="2200" dirty="0">
+                <a:solidFill>
+                  <a:srgbClr val="1A1A1A"/>
+                </a:solidFill>
+                <a:latin typeface="Arial" pitchFamily="34" charset="0"/>
+                <a:ea typeface="Arial" pitchFamily="34" charset="-122"/>
+                <a:cs typeface="Arial" pitchFamily="34" charset="-120"/>
+              </a:rPr>
+              <a:t>Further interesting ideas or approaches you want to talk about</a:t>
+            </a:r>
+            <a:endParaRPr lang="en-US" sz="2200" dirty="0"/>
+          </a:p>
+          <a:p>
+            <a:pPr marL="279400" indent="-279400">
+              <a:spcAft>
+                <a:spcPts val="1000"/>
+              </a:spcAft>
+              <a:buSzPct val="100000"/>
+              <a:buChar char="•"/>
+            </a:pPr>
+            <a:r>
+              <a:rPr lang="en-US" sz="2200" dirty="0">
+                <a:solidFill>
+                  <a:srgbClr val="1A1A1A"/>
+                </a:solidFill>
+                <a:latin typeface="Arial" pitchFamily="34" charset="0"/>
+                <a:ea typeface="Arial" pitchFamily="34" charset="-122"/>
+                <a:cs typeface="Arial" pitchFamily="34" charset="-120"/>
+              </a:rPr>
+              <a:t>Anything from your own notes and preparation</a:t>
+            </a:r>
+            <a:endParaRPr lang="en-US" sz="2200" dirty="0"/>
+          </a:p>
+        </p:txBody>
+      </p:sp>
+      <p:sp>
+        <p:nvSpPr>
+          <p:cNvPr id="25" name="Slide Number Placeholder 0"/>
+          <p:cNvSpPr>
+            <a:spLocks noGrp="1"/>
+          </p:cNvSpPr>
+          <p:nvPr>
+            <p:ph type="sldNum" sz="quarter" idx="4294967295"/>
+          </p:nvPr>
+        </p:nvSpPr>
+        <p:spPr>
+          <a:xfrm>
+            <a:off x="11247120" y="6355080"/>
+            <a:ext cx="548640" cy="320040"/>
+          </a:xfrm>
+          <a:prstGeom prst="rect">
+            <a:avLst/>
+          </a:prstGeom>
+          <a:extLst>
+            <a:ext uri="{C572A759-6A51-4108-AA02-DFA0A04FC94B}">
+              <ma14:wrappingTextBoxFlag xmlns:ma14="http://schemas.microsoft.com/office/mac/drawingml/2011/main" val="0"/>
+            </a:ext>
+          </a:extLst>
+        </p:spPr>
+        <p:txBody>
+          <a:bodyPr/>
+          <a:lstStyle>
+            <a:lvl1pPr>
+              <a:defRPr sz="1100">
+                <a:solidFill>
+                  <a:srgbClr val="5F6368"/>
+                </a:solidFill>
+                <a:latin typeface="Arial"/>
+                <a:ea typeface="Arial"/>
+                <a:cs typeface="Arial"/>
+              </a:defRPr>
+            </a:lvl1pPr>
+          </a:lstStyle>
+          <a:p>
+            <a:pPr algn="l"/>
+            <a:fld id="{F7021451-1387-4CA6-816F-3879F97B5CBC}" type="slidenum">
+              <a:rPr b="0" lang="en-US"/>
+              <a:t>31</a:t>
+            </a:fld>
+            <a:endParaRPr lang="en-US"/>
+          </a:p>
+        </p:txBody>
+      </p:sp>
+    </p:spTree>
+  </p:cSld>
+  <p:clrMapOvr>
+    <a:masterClrMapping/>
+  </p:clrMapOvr>
+</p:sld>
+</file>
+
+<file path=ppt/slides/slide32.xml><?xml version="1.0" encoding="utf-8"?>
+<p:sld xmlns:a="http://schemas.openxmlformats.org/drawingml/2006/main" xmlns:r="http://schemas.openxmlformats.org/officeDocument/2006/relationships" xmlns:p="http://schemas.openxmlformats.org/presentationml/2006/main">
+  <p:cSld name="Slide 32">
+    <p:spTree>
+      <p:nvGrpSpPr>
+        <p:cNvPr id="1" name=""/>
+        <p:cNvGrpSpPr/>
+        <p:nvPr/>
+      </p:nvGrpSpPr>
+      <p:grpSpPr>
+        <a:xfrm>
+          <a:off x="0" y="0"/>
+          <a:ext cx="0" cy="0"/>
+          <a:chOff x="0" y="0"/>
+          <a:chExt cx="0" cy="0"/>
+        </a:xfrm>
+      </p:grpSpPr>
+      <p:sp>
+        <p:nvSpPr>
+          <p:cNvPr id="2" name="Text 0"/>
+          <p:cNvSpPr txBox="1"/>
+          <p:nvPr/>
+        </p:nvSpPr>
+        <p:spPr>
+          <a:xfrm>
             <a:off x="640080" y="2560320"/>
             <a:ext cx="10911535" cy="1371600"/>
           </a:xfrm>
